--- a/presentation/KD_pointcloud_presentation.pptx
+++ b/presentation/KD_pointcloud_presentation.pptx
@@ -15,9 +15,13 @@
     <p:sldId id="263" r:id="rId9"/>
     <p:sldId id="264" r:id="rId10"/>
     <p:sldId id="265" r:id="rId11"/>
+    <p:sldId id="266" r:id="rId12"/>
+    <p:sldId id="267" r:id="rId13"/>
+    <p:sldId id="268" r:id="rId14"/>
+    <p:sldId id="269" r:id="rId15"/>
   </p:sldIdLst>
   <p:notesMasterIdLst>
-    <p:notesMasterId r:id="rId12"/>
+    <p:notesMasterId r:id="rId16"/>
   </p:notesMasterIdLst>
   <p:sldSz cx="12192000" cy="6858000"/>
   <p:notesSz cx="6858000" cy="12192000"/>
@@ -233,25 +237,25 @@
                 <c:formatCode>General</c:formatCode>
                 <c:ptCount val="7"/>
                 <c:pt idx="0">
-                  <c:v>0.791</c:v>
+                  <c:v>0.765</c:v>
                 </c:pt>
                 <c:pt idx="1">
-                  <c:v>0.776</c:v>
+                  <c:v>0.762</c:v>
                 </c:pt>
                 <c:pt idx="2">
-                  <c:v>0.773</c:v>
+                  <c:v>0.748</c:v>
                 </c:pt>
                 <c:pt idx="3">
-                  <c:v>0.726</c:v>
+                  <c:v>0.72</c:v>
                 </c:pt>
                 <c:pt idx="4">
-                  <c:v>0.708</c:v>
+                  <c:v>0.668</c:v>
                 </c:pt>
                 <c:pt idx="5">
-                  <c:v>0.667</c:v>
+                  <c:v>0.671</c:v>
                 </c:pt>
                 <c:pt idx="6">
-                  <c:v>0.572</c:v>
+                  <c:v>0.605</c:v>
                 </c:pt>
               </c:numCache>
             </c:numRef>
@@ -365,25 +369,25 @@
                 <c:formatCode>General</c:formatCode>
                 <c:ptCount val="7"/>
                 <c:pt idx="0">
-                  <c:v>0.81</c:v>
+                  <c:v>0.763</c:v>
                 </c:pt>
                 <c:pt idx="1">
-                  <c:v>0.785</c:v>
+                  <c:v>0.758</c:v>
                 </c:pt>
                 <c:pt idx="2">
-                  <c:v>0.779</c:v>
+                  <c:v>0.746</c:v>
                 </c:pt>
                 <c:pt idx="3">
-                  <c:v>0.731</c:v>
+                  <c:v>0.714</c:v>
                 </c:pt>
                 <c:pt idx="4">
-                  <c:v>0.677</c:v>
+                  <c:v>0.66</c:v>
                 </c:pt>
                 <c:pt idx="5">
-                  <c:v>0.616</c:v>
+                  <c:v>0.654</c:v>
                 </c:pt>
                 <c:pt idx="6">
-                  <c:v>0.568</c:v>
+                  <c:v>0.585</c:v>
                 </c:pt>
               </c:numCache>
             </c:numRef>
@@ -494,7 +498,7 @@
         <c:scaling>
           <c:orientation val="minMax"/>
           <c:max val="0.85"/>
-          <c:min val="0.5"/>
+          <c:min val="0.55"/>
         </c:scaling>
         <c:delete val="0"/>
         <c:axPos val="l"/>
@@ -530,7 +534,7 @@
                     </a:solidFill>
                     <a:latin typeface="Calibri"/>
                   </a:rPr>
-                  <a:t>ROC-AUC</a:t>
+                  <a:t>ROC-AUC (moyenne 5 seeds)</a:t>
                 </a:r>
               </a:p>
             </c:rich>
@@ -587,7 +591,1527 @@
         <a:lstStyle/>
         <a:p>
           <a:pPr>
-            <a:defRPr sz="1200">
+            <a:defRPr sz="1100">
+              <a:latin typeface="Calibri"/>
+              <a:cs typeface="Calibri"/>
+            </a:defRPr>
+          </a:pPr>
+          <a:endParaRPr lang="en-US"/>
+        </a:p>
+      </c:txPr>
+    </c:legend>
+    <c:plotVisOnly val="1"/>
+    <c:dispBlanksAs val="span"/>
+  </c:chart>
+  <c:spPr>
+    <a:noFill/>
+    <a:ln>
+      <a:noFill/>
+    </a:ln>
+    <a:effectLst/>
+  </c:spPr>
+  <c:externalData r:id="rId1">
+    <c:autoUpdate val="0"/>
+  </c:externalData>
+</c:chartSpace>
+</file>
+
+<file path=ppt/charts/chart2.xml><?xml version="1.0" encoding="utf-8"?>
+<c:chartSpace xmlns:c="http://schemas.openxmlformats.org/drawingml/2006/chart" xmlns:a="http://schemas.openxmlformats.org/drawingml/2006/main" xmlns:r="http://schemas.openxmlformats.org/officeDocument/2006/relationships">
+  <c:date1904 val="0"/>
+  <c:roundedCorners val="1"/>
+  <c:chart>
+    <c:autoTitleDeleted val="1"/>
+    <c:plotArea>
+      <c:layout/>
+      <c:lineChart>
+        <c:varyColors val="0"/>
+        <c:ser>
+          <c:idx val="0"/>
+          <c:order val="0"/>
+          <c:tx>
+            <c:strRef>
+              <c:f>Sheet1!$B$1</c:f>
+              <c:strCache>
+                <c:ptCount val="1"/>
+                <c:pt idx="0">
+                  <c:v>Teacher dense</c:v>
+                </c:pt>
+              </c:strCache>
+            </c:strRef>
+          </c:tx>
+          <c:spPr>
+            <a:solidFill>
+              <a:srgbClr val="0B3C5D"/>
+            </a:solidFill>
+            <a:ln w="38100" cap="flat">
+              <a:solidFill>
+                <a:srgbClr val="0B3C5D"/>
+              </a:solidFill>
+              <a:prstDash val="solid"/>
+              <a:round/>
+            </a:ln>
+            <a:effectLst/>
+          </c:spPr>
+          <c:invertIfNegative val="0"/>
+          <c:dLbls>
+            <c:numFmt formatCode="#,##0" sourceLinked="0"/>
+            <c:txPr>
+              <a:bodyPr/>
+              <a:lstStyle/>
+              <a:p>
+                <a:pPr>
+                  <a:defRPr b="0" i="0" strike="noStrike" sz="1200" u="none">
+                    <a:solidFill>
+                      <a:srgbClr val="000000"/>
+                    </a:solidFill>
+                    <a:latin typeface="Arial"/>
+                  </a:defRPr>
+                </a:pPr>
+              </a:p>
+            </c:txPr>
+            <c:showLegendKey val="0"/>
+            <c:showVal val="0"/>
+            <c:showCatName val="0"/>
+            <c:showSerName val="0"/>
+            <c:showPercent val="0"/>
+            <c:showBubbleSize val="0"/>
+            <c:showLeaderLines val="0"/>
+          </c:dLbls>
+          <c:marker>
+            <c:symbol val="circle"/>
+            <c:size val="7"/>
+            <c:spPr>
+              <a:solidFill>
+                <a:srgbClr val="0B3C5D"/>
+              </a:solidFill>
+              <a:ln w="9525" cap="flat">
+                <a:solidFill>
+                  <a:srgbClr val="0B3C5D"/>
+                </a:solidFill>
+                <a:prstDash val="solid"/>
+                <a:round/>
+              </a:ln>
+              <a:effectLst/>
+            </c:spPr>
+          </c:marker>
+          <c:cat>
+            <c:multiLvlStrRef>
+              <c:f>Sheet1!$A$2:$A$8</c:f>
+              <c:multiLvlStrCache>
+                <c:ptCount val="7"/>
+                <c:lvl>
+                  <c:pt idx="0">
+                    <c:v>1024</c:v>
+                  </c:pt>
+                  <c:pt idx="1">
+                    <c:v>512</c:v>
+                  </c:pt>
+                  <c:pt idx="2">
+                    <c:v>256</c:v>
+                  </c:pt>
+                  <c:pt idx="3">
+                    <c:v>128</c:v>
+                  </c:pt>
+                  <c:pt idx="4">
+                    <c:v>64</c:v>
+                  </c:pt>
+                  <c:pt idx="5">
+                    <c:v>32</c:v>
+                  </c:pt>
+                  <c:pt idx="6">
+                    <c:v>16</c:v>
+                  </c:pt>
+                </c:lvl>
+              </c:multiLvlStrCache>
+            </c:multiLvlStrRef>
+          </c:cat>
+          <c:val>
+            <c:numRef>
+              <c:f>Sheet1!$B$2:$B$8</c:f>
+              <c:numCache>
+                <c:formatCode>General</c:formatCode>
+                <c:ptCount val="7"/>
+                <c:pt idx="0">
+                  <c:v>0.765</c:v>
+                </c:pt>
+                <c:pt idx="1">
+                  <c:v>0.762</c:v>
+                </c:pt>
+                <c:pt idx="2">
+                  <c:v>0.748</c:v>
+                </c:pt>
+                <c:pt idx="3">
+                  <c:v>0.72</c:v>
+                </c:pt>
+                <c:pt idx="4">
+                  <c:v>0.668</c:v>
+                </c:pt>
+                <c:pt idx="5">
+                  <c:v>0.671</c:v>
+                </c:pt>
+                <c:pt idx="6">
+                  <c:v>0.605</c:v>
+                </c:pt>
+              </c:numCache>
+            </c:numRef>
+          </c:val>
+          <c:smooth val="0"/>
+        </c:ser>
+        <c:ser>
+          <c:idx val="1"/>
+          <c:order val="1"/>
+          <c:tx>
+            <c:strRef>
+              <c:f>Sheet1!$C$1</c:f>
+              <c:strCache>
+                <c:ptCount val="1"/>
+                <c:pt idx="0">
+                  <c:v>Scratch</c:v>
+                </c:pt>
+              </c:strCache>
+            </c:strRef>
+          </c:tx>
+          <c:spPr>
+            <a:solidFill>
+              <a:srgbClr val="A9B6BC"/>
+            </a:solidFill>
+            <a:ln w="38100" cap="flat">
+              <a:solidFill>
+                <a:srgbClr val="A9B6BC"/>
+              </a:solidFill>
+              <a:prstDash val="solid"/>
+              <a:round/>
+            </a:ln>
+            <a:effectLst/>
+          </c:spPr>
+          <c:invertIfNegative val="0"/>
+          <c:dLbls>
+            <c:numFmt formatCode="#,##0" sourceLinked="0"/>
+            <c:txPr>
+              <a:bodyPr/>
+              <a:lstStyle/>
+              <a:p>
+                <a:pPr>
+                  <a:defRPr b="0" i="0" strike="noStrike" sz="1200" u="none">
+                    <a:solidFill>
+                      <a:srgbClr val="000000"/>
+                    </a:solidFill>
+                    <a:latin typeface="Arial"/>
+                  </a:defRPr>
+                </a:pPr>
+              </a:p>
+            </c:txPr>
+            <c:showLegendKey val="0"/>
+            <c:showVal val="0"/>
+            <c:showCatName val="0"/>
+            <c:showSerName val="0"/>
+            <c:showPercent val="0"/>
+            <c:showBubbleSize val="0"/>
+            <c:showLeaderLines val="0"/>
+          </c:dLbls>
+          <c:marker>
+            <c:symbol val="circle"/>
+            <c:size val="7"/>
+            <c:spPr>
+              <a:solidFill>
+                <a:srgbClr val="A9B6BC"/>
+              </a:solidFill>
+              <a:ln w="9525" cap="flat">
+                <a:solidFill>
+                  <a:srgbClr val="A9B6BC"/>
+                </a:solidFill>
+                <a:prstDash val="solid"/>
+                <a:round/>
+              </a:ln>
+              <a:effectLst/>
+            </c:spPr>
+          </c:marker>
+          <c:cat>
+            <c:multiLvlStrRef>
+              <c:f>Sheet1!$A$2:$A$8</c:f>
+              <c:multiLvlStrCache>
+                <c:ptCount val="7"/>
+                <c:lvl>
+                  <c:pt idx="0">
+                    <c:v>1024</c:v>
+                  </c:pt>
+                  <c:pt idx="1">
+                    <c:v>512</c:v>
+                  </c:pt>
+                  <c:pt idx="2">
+                    <c:v>256</c:v>
+                  </c:pt>
+                  <c:pt idx="3">
+                    <c:v>128</c:v>
+                  </c:pt>
+                  <c:pt idx="4">
+                    <c:v>64</c:v>
+                  </c:pt>
+                  <c:pt idx="5">
+                    <c:v>32</c:v>
+                  </c:pt>
+                  <c:pt idx="6">
+                    <c:v>16</c:v>
+                  </c:pt>
+                </c:lvl>
+              </c:multiLvlStrCache>
+            </c:multiLvlStrRef>
+          </c:cat>
+          <c:val>
+            <c:numRef>
+              <c:f>Sheet1!$C$2:$C$8</c:f>
+              <c:numCache>
+                <c:formatCode>General</c:formatCode>
+                <c:ptCount val="7"/>
+                <c:pt idx="0">
+                  <c:v>0.763</c:v>
+                </c:pt>
+                <c:pt idx="1">
+                  <c:v>0.758</c:v>
+                </c:pt>
+                <c:pt idx="2">
+                  <c:v>0.746</c:v>
+                </c:pt>
+                <c:pt idx="3">
+                  <c:v>0.714</c:v>
+                </c:pt>
+                <c:pt idx="4">
+                  <c:v>0.66</c:v>
+                </c:pt>
+                <c:pt idx="5">
+                  <c:v>0.654</c:v>
+                </c:pt>
+                <c:pt idx="6">
+                  <c:v>0.585</c:v>
+                </c:pt>
+              </c:numCache>
+            </c:numRef>
+          </c:val>
+          <c:smooth val="0"/>
+        </c:ser>
+        <c:ser>
+          <c:idx val="2"/>
+          <c:order val="2"/>
+          <c:tx>
+            <c:strRef>
+              <c:f>Sheet1!$D$1</c:f>
+              <c:strCache>
+                <c:ptCount val="1"/>
+                <c:pt idx="0">
+                  <c:v>KD logit</c:v>
+                </c:pt>
+              </c:strCache>
+            </c:strRef>
+          </c:tx>
+          <c:spPr>
+            <a:solidFill>
+              <a:srgbClr val="8FB8C4"/>
+            </a:solidFill>
+            <a:ln w="38100" cap="flat">
+              <a:solidFill>
+                <a:srgbClr val="8FB8C4"/>
+              </a:solidFill>
+              <a:prstDash val="solid"/>
+              <a:round/>
+            </a:ln>
+            <a:effectLst/>
+          </c:spPr>
+          <c:invertIfNegative val="0"/>
+          <c:dLbls>
+            <c:numFmt formatCode="#,##0" sourceLinked="0"/>
+            <c:txPr>
+              <a:bodyPr/>
+              <a:lstStyle/>
+              <a:p>
+                <a:pPr>
+                  <a:defRPr b="0" i="0" strike="noStrike" sz="1200" u="none">
+                    <a:solidFill>
+                      <a:srgbClr val="000000"/>
+                    </a:solidFill>
+                    <a:latin typeface="Arial"/>
+                  </a:defRPr>
+                </a:pPr>
+              </a:p>
+            </c:txPr>
+            <c:showLegendKey val="0"/>
+            <c:showVal val="0"/>
+            <c:showCatName val="0"/>
+            <c:showSerName val="0"/>
+            <c:showPercent val="0"/>
+            <c:showBubbleSize val="0"/>
+            <c:showLeaderLines val="0"/>
+          </c:dLbls>
+          <c:marker>
+            <c:symbol val="circle"/>
+            <c:size val="7"/>
+            <c:spPr>
+              <a:solidFill>
+                <a:srgbClr val="8FB8C4"/>
+              </a:solidFill>
+              <a:ln w="9525" cap="flat">
+                <a:solidFill>
+                  <a:srgbClr val="8FB8C4"/>
+                </a:solidFill>
+                <a:prstDash val="solid"/>
+                <a:round/>
+              </a:ln>
+              <a:effectLst/>
+            </c:spPr>
+          </c:marker>
+          <c:cat>
+            <c:multiLvlStrRef>
+              <c:f>Sheet1!$A$2:$A$8</c:f>
+              <c:multiLvlStrCache>
+                <c:ptCount val="7"/>
+                <c:lvl>
+                  <c:pt idx="0">
+                    <c:v>1024</c:v>
+                  </c:pt>
+                  <c:pt idx="1">
+                    <c:v>512</c:v>
+                  </c:pt>
+                  <c:pt idx="2">
+                    <c:v>256</c:v>
+                  </c:pt>
+                  <c:pt idx="3">
+                    <c:v>128</c:v>
+                  </c:pt>
+                  <c:pt idx="4">
+                    <c:v>64</c:v>
+                  </c:pt>
+                  <c:pt idx="5">
+                    <c:v>32</c:v>
+                  </c:pt>
+                  <c:pt idx="6">
+                    <c:v>16</c:v>
+                  </c:pt>
+                </c:lvl>
+              </c:multiLvlStrCache>
+            </c:multiLvlStrRef>
+          </c:cat>
+          <c:val>
+            <c:numRef>
+              <c:f>Sheet1!$D$2:$D$8</c:f>
+              <c:numCache>
+                <c:formatCode>General</c:formatCode>
+                <c:ptCount val="7"/>
+                <c:pt idx="0">
+                  <c:v>0.779</c:v>
+                </c:pt>
+                <c:pt idx="1">
+                  <c:v>0.779</c:v>
+                </c:pt>
+                <c:pt idx="2">
+                  <c:v>0.765</c:v>
+                </c:pt>
+                <c:pt idx="3">
+                  <c:v>0.739</c:v>
+                </c:pt>
+                <c:pt idx="4">
+                  <c:v>0.673</c:v>
+                </c:pt>
+                <c:pt idx="5">
+                  <c:v>0.666</c:v>
+                </c:pt>
+                <c:pt idx="6">
+                  <c:v>0.582</c:v>
+                </c:pt>
+              </c:numCache>
+            </c:numRef>
+          </c:val>
+          <c:smooth val="0"/>
+        </c:ser>
+        <c:ser>
+          <c:idx val="3"/>
+          <c:order val="3"/>
+          <c:tx>
+            <c:strRef>
+              <c:f>Sheet1!$E$1</c:f>
+              <c:strCache>
+                <c:ptCount val="1"/>
+                <c:pt idx="0">
+                  <c:v>Aug (témoin)</c:v>
+                </c:pt>
+              </c:strCache>
+            </c:strRef>
+          </c:tx>
+          <c:spPr>
+            <a:solidFill>
+              <a:srgbClr val="E76F51"/>
+            </a:solidFill>
+            <a:ln w="38100" cap="flat">
+              <a:solidFill>
+                <a:srgbClr val="E76F51"/>
+              </a:solidFill>
+              <a:prstDash val="solid"/>
+              <a:round/>
+            </a:ln>
+            <a:effectLst/>
+          </c:spPr>
+          <c:invertIfNegative val="0"/>
+          <c:dLbls>
+            <c:numFmt formatCode="#,##0" sourceLinked="0"/>
+            <c:txPr>
+              <a:bodyPr/>
+              <a:lstStyle/>
+              <a:p>
+                <a:pPr>
+                  <a:defRPr b="0" i="0" strike="noStrike" sz="1200" u="none">
+                    <a:solidFill>
+                      <a:srgbClr val="000000"/>
+                    </a:solidFill>
+                    <a:latin typeface="Arial"/>
+                  </a:defRPr>
+                </a:pPr>
+              </a:p>
+            </c:txPr>
+            <c:showLegendKey val="0"/>
+            <c:showVal val="0"/>
+            <c:showCatName val="0"/>
+            <c:showSerName val="0"/>
+            <c:showPercent val="0"/>
+            <c:showBubbleSize val="0"/>
+            <c:showLeaderLines val="0"/>
+          </c:dLbls>
+          <c:marker>
+            <c:symbol val="circle"/>
+            <c:size val="7"/>
+            <c:spPr>
+              <a:solidFill>
+                <a:srgbClr val="E76F51"/>
+              </a:solidFill>
+              <a:ln w="9525" cap="flat">
+                <a:solidFill>
+                  <a:srgbClr val="E76F51"/>
+                </a:solidFill>
+                <a:prstDash val="solid"/>
+                <a:round/>
+              </a:ln>
+              <a:effectLst/>
+            </c:spPr>
+          </c:marker>
+          <c:cat>
+            <c:multiLvlStrRef>
+              <c:f>Sheet1!$A$2:$A$8</c:f>
+              <c:multiLvlStrCache>
+                <c:ptCount val="7"/>
+                <c:lvl>
+                  <c:pt idx="0">
+                    <c:v>1024</c:v>
+                  </c:pt>
+                  <c:pt idx="1">
+                    <c:v>512</c:v>
+                  </c:pt>
+                  <c:pt idx="2">
+                    <c:v>256</c:v>
+                  </c:pt>
+                  <c:pt idx="3">
+                    <c:v>128</c:v>
+                  </c:pt>
+                  <c:pt idx="4">
+                    <c:v>64</c:v>
+                  </c:pt>
+                  <c:pt idx="5">
+                    <c:v>32</c:v>
+                  </c:pt>
+                  <c:pt idx="6">
+                    <c:v>16</c:v>
+                  </c:pt>
+                </c:lvl>
+              </c:multiLvlStrCache>
+            </c:multiLvlStrRef>
+          </c:cat>
+          <c:val>
+            <c:numRef>
+              <c:f>Sheet1!$E$2:$E$8</c:f>
+              <c:numCache>
+                <c:formatCode>General</c:formatCode>
+                <c:ptCount val="7"/>
+                <c:pt idx="0">
+                  <c:v>0.791</c:v>
+                </c:pt>
+                <c:pt idx="1">
+                  <c:v>0.796</c:v>
+                </c:pt>
+                <c:pt idx="2">
+                  <c:v>0.798</c:v>
+                </c:pt>
+                <c:pt idx="3">
+                  <c:v>0.779</c:v>
+                </c:pt>
+                <c:pt idx="4">
+                  <c:v>0.743</c:v>
+                </c:pt>
+                <c:pt idx="5">
+                  <c:v>0.726</c:v>
+                </c:pt>
+                <c:pt idx="6">
+                  <c:v>0.648</c:v>
+                </c:pt>
+              </c:numCache>
+            </c:numRef>
+          </c:val>
+          <c:smooth val="0"/>
+        </c:ser>
+        <c:ser>
+          <c:idx val="4"/>
+          <c:order val="4"/>
+          <c:tx>
+            <c:strRef>
+              <c:f>Sheet1!$F$1</c:f>
+              <c:strCache>
+                <c:ptCount val="1"/>
+                <c:pt idx="0">
+                  <c:v>KD robuste</c:v>
+                </c:pt>
+              </c:strCache>
+            </c:strRef>
+          </c:tx>
+          <c:spPr>
+            <a:solidFill>
+              <a:srgbClr val="2EC4B6"/>
+            </a:solidFill>
+            <a:ln w="38100" cap="flat">
+              <a:solidFill>
+                <a:srgbClr val="2EC4B6"/>
+              </a:solidFill>
+              <a:prstDash val="solid"/>
+              <a:round/>
+            </a:ln>
+            <a:effectLst/>
+          </c:spPr>
+          <c:invertIfNegative val="0"/>
+          <c:dLbls>
+            <c:numFmt formatCode="#,##0" sourceLinked="0"/>
+            <c:txPr>
+              <a:bodyPr/>
+              <a:lstStyle/>
+              <a:p>
+                <a:pPr>
+                  <a:defRPr b="0" i="0" strike="noStrike" sz="1200" u="none">
+                    <a:solidFill>
+                      <a:srgbClr val="000000"/>
+                    </a:solidFill>
+                    <a:latin typeface="Arial"/>
+                  </a:defRPr>
+                </a:pPr>
+              </a:p>
+            </c:txPr>
+            <c:showLegendKey val="0"/>
+            <c:showVal val="0"/>
+            <c:showCatName val="0"/>
+            <c:showSerName val="0"/>
+            <c:showPercent val="0"/>
+            <c:showBubbleSize val="0"/>
+            <c:showLeaderLines val="0"/>
+          </c:dLbls>
+          <c:marker>
+            <c:symbol val="circle"/>
+            <c:size val="7"/>
+            <c:spPr>
+              <a:solidFill>
+                <a:srgbClr val="2EC4B6"/>
+              </a:solidFill>
+              <a:ln w="9525" cap="flat">
+                <a:solidFill>
+                  <a:srgbClr val="2EC4B6"/>
+                </a:solidFill>
+                <a:prstDash val="solid"/>
+                <a:round/>
+              </a:ln>
+              <a:effectLst/>
+            </c:spPr>
+          </c:marker>
+          <c:cat>
+            <c:multiLvlStrRef>
+              <c:f>Sheet1!$A$2:$A$8</c:f>
+              <c:multiLvlStrCache>
+                <c:ptCount val="7"/>
+                <c:lvl>
+                  <c:pt idx="0">
+                    <c:v>1024</c:v>
+                  </c:pt>
+                  <c:pt idx="1">
+                    <c:v>512</c:v>
+                  </c:pt>
+                  <c:pt idx="2">
+                    <c:v>256</c:v>
+                  </c:pt>
+                  <c:pt idx="3">
+                    <c:v>128</c:v>
+                  </c:pt>
+                  <c:pt idx="4">
+                    <c:v>64</c:v>
+                  </c:pt>
+                  <c:pt idx="5">
+                    <c:v>32</c:v>
+                  </c:pt>
+                  <c:pt idx="6">
+                    <c:v>16</c:v>
+                  </c:pt>
+                </c:lvl>
+              </c:multiLvlStrCache>
+            </c:multiLvlStrRef>
+          </c:cat>
+          <c:val>
+            <c:numRef>
+              <c:f>Sheet1!$F$2:$F$8</c:f>
+              <c:numCache>
+                <c:formatCode>General</c:formatCode>
+                <c:ptCount val="7"/>
+                <c:pt idx="0">
+                  <c:v>0.793</c:v>
+                </c:pt>
+                <c:pt idx="1">
+                  <c:v>0.795</c:v>
+                </c:pt>
+                <c:pt idx="2">
+                  <c:v>0.795</c:v>
+                </c:pt>
+                <c:pt idx="3">
+                  <c:v>0.778</c:v>
+                </c:pt>
+                <c:pt idx="4">
+                  <c:v>0.74</c:v>
+                </c:pt>
+                <c:pt idx="5">
+                  <c:v>0.726</c:v>
+                </c:pt>
+                <c:pt idx="6">
+                  <c:v>0.643</c:v>
+                </c:pt>
+              </c:numCache>
+            </c:numRef>
+          </c:val>
+          <c:smooth val="0"/>
+        </c:ser>
+        <c:dLbls>
+          <c:numFmt formatCode="#,##0" sourceLinked="0"/>
+          <c:txPr>
+            <a:bodyPr/>
+            <a:lstStyle/>
+            <a:p>
+              <a:pPr>
+                <a:defRPr b="0" i="0" strike="noStrike" sz="1200" u="none">
+                  <a:solidFill>
+                    <a:srgbClr val="000000"/>
+                  </a:solidFill>
+                  <a:latin typeface="Arial"/>
+                </a:defRPr>
+              </a:pPr>
+            </a:p>
+          </c:txPr>
+          <c:showLegendKey val="0"/>
+          <c:showVal val="0"/>
+          <c:showCatName val="0"/>
+          <c:showSerName val="0"/>
+          <c:showPercent val="0"/>
+          <c:showBubbleSize val="0"/>
+          <c:showLeaderLines val="0"/>
+        </c:dLbls>
+        <c:marker val="1"/>
+        <c:axId val="2094734554"/>
+        <c:axId val="2094734552"/>
+        <c:axId val="2094734556"/>
+      </c:lineChart>
+      <c:catAx>
+        <c:axId val="2094734554"/>
+        <c:scaling>
+          <c:orientation val="minMax"/>
+        </c:scaling>
+        <c:delete val="0"/>
+        <c:axPos val="b"/>
+        <c:title>
+          <c:tx>
+            <c:rich>
+              <a:bodyPr/>
+              <a:lstStyle/>
+              <a:p>
+                <a:pPr>
+                  <a:defRPr sz="1100" b="0" i="0" u="none" strike="noStrike">
+                    <a:solidFill>
+                      <a:srgbClr val="6B7B84"/>
+                    </a:solidFill>
+                    <a:latin typeface="Calibri"/>
+                  </a:defRPr>
+                </a:pPr>
+                <a:r>
+                  <a:rPr sz="1100" b="0" i="0" u="none" strike="noStrike">
+                    <a:solidFill>
+                      <a:srgbClr val="6B7B84"/>
+                    </a:solidFill>
+                    <a:latin typeface="Calibri"/>
+                  </a:rPr>
+                  <a:t># points à l'inférence (→ plus parcimonieux)</a:t>
+                </a:r>
+              </a:p>
+            </c:rich>
+          </c:tx>
+          <c:layout/>
+          <c:overlay val="0"/>
+        </c:title>
+        <c:numFmt formatCode="General" sourceLinked="1"/>
+        <c:majorTickMark val="out"/>
+        <c:minorTickMark val="none"/>
+        <c:tickLblPos val="low"/>
+        <c:spPr>
+          <a:ln w="12700" cap="flat">
+            <a:solidFill>
+              <a:srgbClr val="888888"/>
+            </a:solidFill>
+            <a:prstDash val="solid"/>
+            <a:round/>
+          </a:ln>
+        </c:spPr>
+        <c:txPr>
+          <a:bodyPr/>
+          <a:lstStyle/>
+          <a:p>
+            <a:pPr>
+              <a:defRPr sz="1100" b="0" i="0" u="none" strike="noStrike">
+                <a:solidFill>
+                  <a:srgbClr val="6B7B84"/>
+                </a:solidFill>
+                <a:latin typeface="Calibri"/>
+              </a:defRPr>
+            </a:pPr>
+            <a:endParaRPr lang="en-US"/>
+          </a:p>
+        </c:txPr>
+        <c:crossAx val="2094734552"/>
+        <c:crosses val="autoZero"/>
+        <c:auto val="1"/>
+        <c:lblAlgn val="ctr"/>
+        <c:noMultiLvlLbl val="1"/>
+      </c:catAx>
+      <c:valAx>
+        <c:axId val="2094734552"/>
+        <c:scaling>
+          <c:orientation val="minMax"/>
+          <c:max val="0.85"/>
+          <c:min val="0.55"/>
+        </c:scaling>
+        <c:delete val="0"/>
+        <c:axPos val="l"/>
+        <c:majorGridlines>
+          <c:spPr>
+            <a:ln w="12700" cap="flat">
+              <a:solidFill>
+                <a:srgbClr val="E6ECEF"/>
+              </a:solidFill>
+              <a:prstDash val="solid"/>
+              <a:round/>
+            </a:ln>
+          </c:spPr>
+        </c:majorGridlines>
+        <c:title>
+          <c:tx>
+            <c:rich>
+              <a:bodyPr/>
+              <a:lstStyle/>
+              <a:p>
+                <a:pPr>
+                  <a:defRPr sz="1100" b="0" i="0" u="none" strike="noStrike">
+                    <a:solidFill>
+                      <a:srgbClr val="6B7B84"/>
+                    </a:solidFill>
+                    <a:latin typeface="Calibri"/>
+                  </a:defRPr>
+                </a:pPr>
+                <a:r>
+                  <a:rPr sz="1100" b="0" i="0" u="none" strike="noStrike">
+                    <a:solidFill>
+                      <a:srgbClr val="6B7B84"/>
+                    </a:solidFill>
+                    <a:latin typeface="Calibri"/>
+                  </a:rPr>
+                  <a:t>ROC-AUC (moyenne 5 seeds)</a:t>
+                </a:r>
+              </a:p>
+            </c:rich>
+          </c:tx>
+          <c:layout/>
+          <c:overlay val="0"/>
+        </c:title>
+        <c:numFmt formatCode="General" sourceLinked="0"/>
+        <c:majorTickMark val="out"/>
+        <c:minorTickMark val="none"/>
+        <c:tickLblPos val="nextTo"/>
+        <c:spPr>
+          <a:ln w="12700" cap="flat">
+            <a:solidFill>
+              <a:srgbClr val="888888"/>
+            </a:solidFill>
+            <a:prstDash val="solid"/>
+            <a:round/>
+          </a:ln>
+        </c:spPr>
+        <c:txPr>
+          <a:bodyPr/>
+          <a:lstStyle/>
+          <a:p>
+            <a:pPr>
+              <a:defRPr sz="1100" b="0" i="0" u="none" strike="noStrike">
+                <a:solidFill>
+                  <a:srgbClr val="6B7B84"/>
+                </a:solidFill>
+                <a:latin typeface="Calibri"/>
+              </a:defRPr>
+            </a:pPr>
+            <a:endParaRPr lang="en-US"/>
+          </a:p>
+        </c:txPr>
+        <c:crossAx val="2094734554"/>
+        <c:crosses val="autoZero"/>
+        <c:crossBetween val="between"/>
+        <c:majorUnit val="0.05"/>
+      </c:valAx>
+      <c:spPr>
+        <a:noFill/>
+        <a:ln>
+          <a:noFill/>
+        </a:ln>
+        <a:effectLst/>
+      </c:spPr>
+    </c:plotArea>
+    <c:legend>
+      <c:legendPos val="b"/>
+      <c:overlay val="0"/>
+      <c:txPr>
+        <a:bodyPr/>
+        <a:lstStyle/>
+        <a:p>
+          <a:pPr>
+            <a:defRPr sz="1100">
+              <a:latin typeface="Calibri"/>
+              <a:cs typeface="Calibri"/>
+            </a:defRPr>
+          </a:pPr>
+          <a:endParaRPr lang="en-US"/>
+        </a:p>
+      </c:txPr>
+    </c:legend>
+    <c:plotVisOnly val="1"/>
+    <c:dispBlanksAs val="span"/>
+  </c:chart>
+  <c:spPr>
+    <a:noFill/>
+    <a:ln>
+      <a:noFill/>
+    </a:ln>
+    <a:effectLst/>
+  </c:spPr>
+  <c:externalData r:id="rId1">
+    <c:autoUpdate val="0"/>
+  </c:externalData>
+</c:chartSpace>
+</file>
+
+<file path=ppt/charts/chart3.xml><?xml version="1.0" encoding="utf-8"?>
+<c:chartSpace xmlns:c="http://schemas.openxmlformats.org/drawingml/2006/chart" xmlns:a="http://schemas.openxmlformats.org/drawingml/2006/main" xmlns:r="http://schemas.openxmlformats.org/officeDocument/2006/relationships">
+  <c:date1904 val="0"/>
+  <c:roundedCorners val="1"/>
+  <c:chart>
+    <c:autoTitleDeleted val="1"/>
+    <c:plotArea>
+      <c:layout/>
+      <c:lineChart>
+        <c:varyColors val="0"/>
+        <c:ser>
+          <c:idx val="0"/>
+          <c:order val="0"/>
+          <c:tx>
+            <c:strRef>
+              <c:f>Sheet1!$B$1</c:f>
+              <c:strCache>
+                <c:ptCount val="1"/>
+                <c:pt idx="0">
+                  <c:v>Teacher robuste (0.8M)</c:v>
+                </c:pt>
+              </c:strCache>
+            </c:strRef>
+          </c:tx>
+          <c:spPr>
+            <a:solidFill>
+              <a:srgbClr val="0B3C5D"/>
+            </a:solidFill>
+            <a:ln w="38100" cap="flat">
+              <a:solidFill>
+                <a:srgbClr val="0B3C5D"/>
+              </a:solidFill>
+              <a:prstDash val="solid"/>
+              <a:round/>
+            </a:ln>
+            <a:effectLst/>
+          </c:spPr>
+          <c:invertIfNegative val="0"/>
+          <c:dLbls>
+            <c:numFmt formatCode="#,##0" sourceLinked="0"/>
+            <c:txPr>
+              <a:bodyPr/>
+              <a:lstStyle/>
+              <a:p>
+                <a:pPr>
+                  <a:defRPr b="0" i="0" strike="noStrike" sz="1200" u="none">
+                    <a:solidFill>
+                      <a:srgbClr val="000000"/>
+                    </a:solidFill>
+                    <a:latin typeface="Arial"/>
+                  </a:defRPr>
+                </a:pPr>
+              </a:p>
+            </c:txPr>
+            <c:showLegendKey val="0"/>
+            <c:showVal val="0"/>
+            <c:showCatName val="0"/>
+            <c:showSerName val="0"/>
+            <c:showPercent val="0"/>
+            <c:showBubbleSize val="0"/>
+            <c:showLeaderLines val="0"/>
+          </c:dLbls>
+          <c:marker>
+            <c:symbol val="circle"/>
+            <c:size val="7"/>
+            <c:spPr>
+              <a:solidFill>
+                <a:srgbClr val="0B3C5D"/>
+              </a:solidFill>
+              <a:ln w="9525" cap="flat">
+                <a:solidFill>
+                  <a:srgbClr val="0B3C5D"/>
+                </a:solidFill>
+                <a:prstDash val="solid"/>
+                <a:round/>
+              </a:ln>
+              <a:effectLst/>
+            </c:spPr>
+          </c:marker>
+          <c:cat>
+            <c:multiLvlStrRef>
+              <c:f>Sheet1!$A$2:$A$8</c:f>
+              <c:multiLvlStrCache>
+                <c:ptCount val="7"/>
+                <c:lvl>
+                  <c:pt idx="0">
+                    <c:v>1024</c:v>
+                  </c:pt>
+                  <c:pt idx="1">
+                    <c:v>512</c:v>
+                  </c:pt>
+                  <c:pt idx="2">
+                    <c:v>256</c:v>
+                  </c:pt>
+                  <c:pt idx="3">
+                    <c:v>128</c:v>
+                  </c:pt>
+                  <c:pt idx="4">
+                    <c:v>64</c:v>
+                  </c:pt>
+                  <c:pt idx="5">
+                    <c:v>32</c:v>
+                  </c:pt>
+                  <c:pt idx="6">
+                    <c:v>16</c:v>
+                  </c:pt>
+                </c:lvl>
+              </c:multiLvlStrCache>
+            </c:multiLvlStrRef>
+          </c:cat>
+          <c:val>
+            <c:numRef>
+              <c:f>Sheet1!$B$2:$B$8</c:f>
+              <c:numCache>
+                <c:formatCode>General</c:formatCode>
+                <c:ptCount val="7"/>
+                <c:pt idx="0">
+                  <c:v>0.783</c:v>
+                </c:pt>
+                <c:pt idx="1">
+                  <c:v>0.788</c:v>
+                </c:pt>
+                <c:pt idx="2">
+                  <c:v>0.793</c:v>
+                </c:pt>
+                <c:pt idx="3">
+                  <c:v>0.774</c:v>
+                </c:pt>
+                <c:pt idx="4">
+                  <c:v>0.728</c:v>
+                </c:pt>
+                <c:pt idx="5">
+                  <c:v>0.709</c:v>
+                </c:pt>
+                <c:pt idx="6">
+                  <c:v>0.646</c:v>
+                </c:pt>
+              </c:numCache>
+            </c:numRef>
+          </c:val>
+          <c:smooth val="0"/>
+        </c:ser>
+        <c:ser>
+          <c:idx val="1"/>
+          <c:order val="1"/>
+          <c:tx>
+            <c:strRef>
+              <c:f>Sheet1!$C$1</c:f>
+              <c:strCache>
+                <c:ptCount val="1"/>
+                <c:pt idx="0">
+                  <c:v>Aug (student 54k)</c:v>
+                </c:pt>
+              </c:strCache>
+            </c:strRef>
+          </c:tx>
+          <c:spPr>
+            <a:solidFill>
+              <a:srgbClr val="E76F51"/>
+            </a:solidFill>
+            <a:ln w="38100" cap="flat">
+              <a:solidFill>
+                <a:srgbClr val="E76F51"/>
+              </a:solidFill>
+              <a:prstDash val="solid"/>
+              <a:round/>
+            </a:ln>
+            <a:effectLst/>
+          </c:spPr>
+          <c:invertIfNegative val="0"/>
+          <c:dLbls>
+            <c:numFmt formatCode="#,##0" sourceLinked="0"/>
+            <c:txPr>
+              <a:bodyPr/>
+              <a:lstStyle/>
+              <a:p>
+                <a:pPr>
+                  <a:defRPr b="0" i="0" strike="noStrike" sz="1200" u="none">
+                    <a:solidFill>
+                      <a:srgbClr val="000000"/>
+                    </a:solidFill>
+                    <a:latin typeface="Arial"/>
+                  </a:defRPr>
+                </a:pPr>
+              </a:p>
+            </c:txPr>
+            <c:showLegendKey val="0"/>
+            <c:showVal val="0"/>
+            <c:showCatName val="0"/>
+            <c:showSerName val="0"/>
+            <c:showPercent val="0"/>
+            <c:showBubbleSize val="0"/>
+            <c:showLeaderLines val="0"/>
+          </c:dLbls>
+          <c:marker>
+            <c:symbol val="circle"/>
+            <c:size val="7"/>
+            <c:spPr>
+              <a:solidFill>
+                <a:srgbClr val="E76F51"/>
+              </a:solidFill>
+              <a:ln w="9525" cap="flat">
+                <a:solidFill>
+                  <a:srgbClr val="E76F51"/>
+                </a:solidFill>
+                <a:prstDash val="solid"/>
+                <a:round/>
+              </a:ln>
+              <a:effectLst/>
+            </c:spPr>
+          </c:marker>
+          <c:cat>
+            <c:multiLvlStrRef>
+              <c:f>Sheet1!$A$2:$A$8</c:f>
+              <c:multiLvlStrCache>
+                <c:ptCount val="7"/>
+                <c:lvl>
+                  <c:pt idx="0">
+                    <c:v>1024</c:v>
+                  </c:pt>
+                  <c:pt idx="1">
+                    <c:v>512</c:v>
+                  </c:pt>
+                  <c:pt idx="2">
+                    <c:v>256</c:v>
+                  </c:pt>
+                  <c:pt idx="3">
+                    <c:v>128</c:v>
+                  </c:pt>
+                  <c:pt idx="4">
+                    <c:v>64</c:v>
+                  </c:pt>
+                  <c:pt idx="5">
+                    <c:v>32</c:v>
+                  </c:pt>
+                  <c:pt idx="6">
+                    <c:v>16</c:v>
+                  </c:pt>
+                </c:lvl>
+              </c:multiLvlStrCache>
+            </c:multiLvlStrRef>
+          </c:cat>
+          <c:val>
+            <c:numRef>
+              <c:f>Sheet1!$C$2:$C$8</c:f>
+              <c:numCache>
+                <c:formatCode>General</c:formatCode>
+                <c:ptCount val="7"/>
+                <c:pt idx="0">
+                  <c:v>0.791</c:v>
+                </c:pt>
+                <c:pt idx="1">
+                  <c:v>0.796</c:v>
+                </c:pt>
+                <c:pt idx="2">
+                  <c:v>0.798</c:v>
+                </c:pt>
+                <c:pt idx="3">
+                  <c:v>0.779</c:v>
+                </c:pt>
+                <c:pt idx="4">
+                  <c:v>0.743</c:v>
+                </c:pt>
+                <c:pt idx="5">
+                  <c:v>0.726</c:v>
+                </c:pt>
+                <c:pt idx="6">
+                  <c:v>0.648</c:v>
+                </c:pt>
+              </c:numCache>
+            </c:numRef>
+          </c:val>
+          <c:smooth val="0"/>
+        </c:ser>
+        <c:ser>
+          <c:idx val="2"/>
+          <c:order val="2"/>
+          <c:tx>
+            <c:strRef>
+              <c:f>Sheet1!$D$1</c:f>
+              <c:strCache>
+                <c:ptCount val="1"/>
+                <c:pt idx="0">
+                  <c:v>KD depuis teacher robuste</c:v>
+                </c:pt>
+              </c:strCache>
+            </c:strRef>
+          </c:tx>
+          <c:spPr>
+            <a:solidFill>
+              <a:srgbClr val="2EC4B6"/>
+            </a:solidFill>
+            <a:ln w="38100" cap="flat">
+              <a:solidFill>
+                <a:srgbClr val="2EC4B6"/>
+              </a:solidFill>
+              <a:prstDash val="solid"/>
+              <a:round/>
+            </a:ln>
+            <a:effectLst/>
+          </c:spPr>
+          <c:invertIfNegative val="0"/>
+          <c:dLbls>
+            <c:numFmt formatCode="#,##0" sourceLinked="0"/>
+            <c:txPr>
+              <a:bodyPr/>
+              <a:lstStyle/>
+              <a:p>
+                <a:pPr>
+                  <a:defRPr b="0" i="0" strike="noStrike" sz="1200" u="none">
+                    <a:solidFill>
+                      <a:srgbClr val="000000"/>
+                    </a:solidFill>
+                    <a:latin typeface="Arial"/>
+                  </a:defRPr>
+                </a:pPr>
+              </a:p>
+            </c:txPr>
+            <c:showLegendKey val="0"/>
+            <c:showVal val="0"/>
+            <c:showCatName val="0"/>
+            <c:showSerName val="0"/>
+            <c:showPercent val="0"/>
+            <c:showBubbleSize val="0"/>
+            <c:showLeaderLines val="0"/>
+          </c:dLbls>
+          <c:marker>
+            <c:symbol val="circle"/>
+            <c:size val="7"/>
+            <c:spPr>
+              <a:solidFill>
+                <a:srgbClr val="2EC4B6"/>
+              </a:solidFill>
+              <a:ln w="9525" cap="flat">
+                <a:solidFill>
+                  <a:srgbClr val="2EC4B6"/>
+                </a:solidFill>
+                <a:prstDash val="solid"/>
+                <a:round/>
+              </a:ln>
+              <a:effectLst/>
+            </c:spPr>
+          </c:marker>
+          <c:cat>
+            <c:multiLvlStrRef>
+              <c:f>Sheet1!$A$2:$A$8</c:f>
+              <c:multiLvlStrCache>
+                <c:ptCount val="7"/>
+                <c:lvl>
+                  <c:pt idx="0">
+                    <c:v>1024</c:v>
+                  </c:pt>
+                  <c:pt idx="1">
+                    <c:v>512</c:v>
+                  </c:pt>
+                  <c:pt idx="2">
+                    <c:v>256</c:v>
+                  </c:pt>
+                  <c:pt idx="3">
+                    <c:v>128</c:v>
+                  </c:pt>
+                  <c:pt idx="4">
+                    <c:v>64</c:v>
+                  </c:pt>
+                  <c:pt idx="5">
+                    <c:v>32</c:v>
+                  </c:pt>
+                  <c:pt idx="6">
+                    <c:v>16</c:v>
+                  </c:pt>
+                </c:lvl>
+              </c:multiLvlStrCache>
+            </c:multiLvlStrRef>
+          </c:cat>
+          <c:val>
+            <c:numRef>
+              <c:f>Sheet1!$D$2:$D$8</c:f>
+              <c:numCache>
+                <c:formatCode>General</c:formatCode>
+                <c:ptCount val="7"/>
+                <c:pt idx="0">
+                  <c:v>0.794</c:v>
+                </c:pt>
+                <c:pt idx="1">
+                  <c:v>0.794</c:v>
+                </c:pt>
+                <c:pt idx="2">
+                  <c:v>0.793</c:v>
+                </c:pt>
+                <c:pt idx="3">
+                  <c:v>0.775</c:v>
+                </c:pt>
+                <c:pt idx="4">
+                  <c:v>0.739</c:v>
+                </c:pt>
+                <c:pt idx="5">
+                  <c:v>0.731</c:v>
+                </c:pt>
+                <c:pt idx="6">
+                  <c:v>0.652</c:v>
+                </c:pt>
+              </c:numCache>
+            </c:numRef>
+          </c:val>
+          <c:smooth val="0"/>
+        </c:ser>
+        <c:dLbls>
+          <c:numFmt formatCode="#,##0" sourceLinked="0"/>
+          <c:txPr>
+            <a:bodyPr/>
+            <a:lstStyle/>
+            <a:p>
+              <a:pPr>
+                <a:defRPr b="0" i="0" strike="noStrike" sz="1200" u="none">
+                  <a:solidFill>
+                    <a:srgbClr val="000000"/>
+                  </a:solidFill>
+                  <a:latin typeface="Arial"/>
+                </a:defRPr>
+              </a:pPr>
+            </a:p>
+          </c:txPr>
+          <c:showLegendKey val="0"/>
+          <c:showVal val="0"/>
+          <c:showCatName val="0"/>
+          <c:showSerName val="0"/>
+          <c:showPercent val="0"/>
+          <c:showBubbleSize val="0"/>
+          <c:showLeaderLines val="0"/>
+        </c:dLbls>
+        <c:marker val="1"/>
+        <c:axId val="2094734554"/>
+        <c:axId val="2094734552"/>
+        <c:axId val="2094734556"/>
+      </c:lineChart>
+      <c:catAx>
+        <c:axId val="2094734554"/>
+        <c:scaling>
+          <c:orientation val="minMax"/>
+        </c:scaling>
+        <c:delete val="0"/>
+        <c:axPos val="b"/>
+        <c:title>
+          <c:tx>
+            <c:rich>
+              <a:bodyPr/>
+              <a:lstStyle/>
+              <a:p>
+                <a:pPr>
+                  <a:defRPr sz="1100" b="0" i="0" u="none" strike="noStrike">
+                    <a:solidFill>
+                      <a:srgbClr val="6B7B84"/>
+                    </a:solidFill>
+                    <a:latin typeface="Calibri"/>
+                  </a:defRPr>
+                </a:pPr>
+                <a:r>
+                  <a:rPr sz="1100" b="0" i="0" u="none" strike="noStrike">
+                    <a:solidFill>
+                      <a:srgbClr val="6B7B84"/>
+                    </a:solidFill>
+                    <a:latin typeface="Calibri"/>
+                  </a:rPr>
+                  <a:t># points à l'inférence (→ plus parcimonieux)</a:t>
+                </a:r>
+              </a:p>
+            </c:rich>
+          </c:tx>
+          <c:layout/>
+          <c:overlay val="0"/>
+        </c:title>
+        <c:numFmt formatCode="General" sourceLinked="1"/>
+        <c:majorTickMark val="out"/>
+        <c:minorTickMark val="none"/>
+        <c:tickLblPos val="low"/>
+        <c:spPr>
+          <a:ln w="12700" cap="flat">
+            <a:solidFill>
+              <a:srgbClr val="888888"/>
+            </a:solidFill>
+            <a:prstDash val="solid"/>
+            <a:round/>
+          </a:ln>
+        </c:spPr>
+        <c:txPr>
+          <a:bodyPr/>
+          <a:lstStyle/>
+          <a:p>
+            <a:pPr>
+              <a:defRPr sz="1100" b="0" i="0" u="none" strike="noStrike">
+                <a:solidFill>
+                  <a:srgbClr val="6B7B84"/>
+                </a:solidFill>
+                <a:latin typeface="Calibri"/>
+              </a:defRPr>
+            </a:pPr>
+            <a:endParaRPr lang="en-US"/>
+          </a:p>
+        </c:txPr>
+        <c:crossAx val="2094734552"/>
+        <c:crosses val="autoZero"/>
+        <c:auto val="1"/>
+        <c:lblAlgn val="ctr"/>
+        <c:noMultiLvlLbl val="1"/>
+      </c:catAx>
+      <c:valAx>
+        <c:axId val="2094734552"/>
+        <c:scaling>
+          <c:orientation val="minMax"/>
+          <c:max val="0.85"/>
+          <c:min val="0.6"/>
+        </c:scaling>
+        <c:delete val="0"/>
+        <c:axPos val="l"/>
+        <c:majorGridlines>
+          <c:spPr>
+            <a:ln w="12700" cap="flat">
+              <a:solidFill>
+                <a:srgbClr val="E6ECEF"/>
+              </a:solidFill>
+              <a:prstDash val="solid"/>
+              <a:round/>
+            </a:ln>
+          </c:spPr>
+        </c:majorGridlines>
+        <c:title>
+          <c:tx>
+            <c:rich>
+              <a:bodyPr/>
+              <a:lstStyle/>
+              <a:p>
+                <a:pPr>
+                  <a:defRPr sz="1100" b="0" i="0" u="none" strike="noStrike">
+                    <a:solidFill>
+                      <a:srgbClr val="6B7B84"/>
+                    </a:solidFill>
+                    <a:latin typeface="Calibri"/>
+                  </a:defRPr>
+                </a:pPr>
+                <a:r>
+                  <a:rPr sz="1100" b="0" i="0" u="none" strike="noStrike">
+                    <a:solidFill>
+                      <a:srgbClr val="6B7B84"/>
+                    </a:solidFill>
+                    <a:latin typeface="Calibri"/>
+                  </a:rPr>
+                  <a:t>ROC-AUC (moyenne 5 seeds)</a:t>
+                </a:r>
+              </a:p>
+            </c:rich>
+          </c:tx>
+          <c:layout/>
+          <c:overlay val="0"/>
+        </c:title>
+        <c:numFmt formatCode="General" sourceLinked="0"/>
+        <c:majorTickMark val="out"/>
+        <c:minorTickMark val="none"/>
+        <c:tickLblPos val="nextTo"/>
+        <c:spPr>
+          <a:ln w="12700" cap="flat">
+            <a:solidFill>
+              <a:srgbClr val="888888"/>
+            </a:solidFill>
+            <a:prstDash val="solid"/>
+            <a:round/>
+          </a:ln>
+        </c:spPr>
+        <c:txPr>
+          <a:bodyPr/>
+          <a:lstStyle/>
+          <a:p>
+            <a:pPr>
+              <a:defRPr sz="1100" b="0" i="0" u="none" strike="noStrike">
+                <a:solidFill>
+                  <a:srgbClr val="6B7B84"/>
+                </a:solidFill>
+                <a:latin typeface="Calibri"/>
+              </a:defRPr>
+            </a:pPr>
+            <a:endParaRPr lang="en-US"/>
+          </a:p>
+        </c:txPr>
+        <c:crossAx val="2094734554"/>
+        <c:crosses val="autoZero"/>
+        <c:crossBetween val="between"/>
+        <c:majorUnit val="0.05"/>
+      </c:valAx>
+      <c:spPr>
+        <a:noFill/>
+        <a:ln>
+          <a:noFill/>
+        </a:ln>
+        <a:effectLst/>
+      </c:spPr>
+    </c:plotArea>
+    <c:legend>
+      <c:legendPos val="b"/>
+      <c:overlay val="0"/>
+      <c:txPr>
+        <a:bodyPr/>
+        <a:lstStyle/>
+        <a:p>
+          <a:pPr>
+            <a:defRPr sz="1100">
               <a:latin typeface="Calibri"/>
               <a:cs typeface="Calibri"/>
             </a:defRPr>
@@ -1007,7 +2531,7 @@
           <a:p>
             <a:r>
               <a:rPr lang="en-US" dirty="0"/>
-              <a:t>Projet autour des nuages de points en imagerie médicale, focus distillation de connaissances. Sujet imposé: robustesse au sous-échantillonnage pour la classification. Ce deck couvre la première moitié: données, modèles baselines, et le protocole de robustesse.</a:t>
+              <a:t>Projet autour des nuages de points en imagerie médicale, focus distillation de connaissances. Sujet imposé: robustesse au sous-échantillonnage pour la classification. Ce deck couvre le projet complet: données, baselines, distillation (5 variantes + teacher robuste), et une analyse critique qui réfute H1.</a:t>
             </a:r>
             <a:endParaRPr lang="en-US" dirty="0"/>
           </a:p>
@@ -1095,7 +2619,7 @@
           <a:p>
             <a:r>
               <a:rPr lang="en-US" dirty="0"/>
-              <a:t>Résumé: la moitié du projet livre toute l'infrastructure et les baselines. Le phénomène de robustesse est établi, l'hypothèse recadrée, et la KD est la suite.</a:t>
+              <a:t>C'est le résultat central. La différence appariée KD robuste moins aug est nulle à toutes les densités. La robustesse vient de l'augmentation.</a:t>
             </a:r>
             <a:endParaRPr lang="en-US" dirty="0"/>
           </a:p>
@@ -1119,6 +2643,358 @@
             <a:fld id="{F7021451-1387-4CA6-816F-3879F97B5CBC}" type="slidenum">
               <a:rPr lang="en-US"/>
               <a:t>10</a:t>
+            </a:fld>
+            <a:endParaRPr lang="en-US"/>
+          </a:p>
+        </p:txBody>
+      </p:sp>
+    </p:spTree>
+    <p:extLst>
+      <p:ext uri="{BB962C8B-B14F-4D97-AF65-F5344CB8AC3E}">
+        <p14:creationId xmlns:p14="http://schemas.microsoft.com/office/powerpoint/2010/main" val="1024086991"/>
+      </p:ext>
+    </p:extLst>
+  </p:cSld>
+  <p:clrMapOvr>
+    <a:masterClrMapping/>
+  </p:clrMapOvr>
+</p:notes>
+</file>
+
+<file path=ppt/notesSlides/notesSlide11.xml><?xml version="1.0" encoding="utf-8"?>
+<p:notes xmlns:a="http://schemas.openxmlformats.org/drawingml/2006/main" xmlns:r="http://schemas.openxmlformats.org/officeDocument/2006/relationships" xmlns:p="http://schemas.openxmlformats.org/presentationml/2006/main">
+  <p:cSld>
+    <p:spTree>
+      <p:nvGrpSpPr>
+        <p:cNvPr id="1" name=""/>
+        <p:cNvGrpSpPr/>
+        <p:nvPr/>
+      </p:nvGrpSpPr>
+      <p:grpSpPr>
+        <a:xfrm>
+          <a:off x="0" y="0"/>
+          <a:ext cx="0" cy="0"/>
+          <a:chOff x="0" y="0"/>
+          <a:chExt cx="0" cy="0"/>
+        </a:xfrm>
+      </p:grpSpPr>
+      <p:sp>
+        <p:nvSpPr>
+          <p:cNvPr id="2" name="Slide Image Placeholder 1"/>
+          <p:cNvSpPr>
+            <a:spLocks noGrp="1" noRot="1" noChangeAspect="1"/>
+          </p:cNvSpPr>
+          <p:nvPr>
+            <p:ph type="sldImg"/>
+          </p:nvPr>
+        </p:nvSpPr>
+        <p:spPr/>
+      </p:sp>
+      <p:sp>
+        <p:nvSpPr>
+          <p:cNvPr id="3" name="Notes Placeholder 2"/>
+          <p:cNvSpPr>
+            <a:spLocks noGrp="1"/>
+          </p:cNvSpPr>
+          <p:nvPr>
+            <p:ph type="body" idx="1"/>
+          </p:nvPr>
+        </p:nvSpPr>
+        <p:spPr/>
+        <p:txBody>
+          <a:bodyPr/>
+          <a:lstStyle/>
+          <a:p>
+            <a:r>
+              <a:rPr lang="en-US" dirty="0"/>
+              <a:t>Hypothèse testée: le teacher dense n'avait pas de robustesse à transmettre. On l'a donc rendu robuste. Résultat: il reste moins bon que le petit modèle augmenté — 1158 nodules ne suffisent pas à exploiter 0.8M paramètres. La KD ne peut transférer que ce que le teacher sait de plus.</a:t>
+            </a:r>
+            <a:endParaRPr lang="en-US" dirty="0"/>
+          </a:p>
+        </p:txBody>
+      </p:sp>
+      <p:sp>
+        <p:nvSpPr>
+          <p:cNvPr id="4" name="Slide Number Placeholder 3"/>
+          <p:cNvSpPr>
+            <a:spLocks noGrp="1"/>
+          </p:cNvSpPr>
+          <p:nvPr>
+            <p:ph type="sldNum" sz="quarter" idx="10"/>
+          </p:nvPr>
+        </p:nvSpPr>
+        <p:spPr/>
+        <p:txBody>
+          <a:bodyPr/>
+          <a:lstStyle/>
+          <a:p>
+            <a:fld id="{F7021451-1387-4CA6-816F-3879F97B5CBC}" type="slidenum">
+              <a:rPr lang="en-US"/>
+              <a:t>11</a:t>
+            </a:fld>
+            <a:endParaRPr lang="en-US"/>
+          </a:p>
+        </p:txBody>
+      </p:sp>
+    </p:spTree>
+    <p:extLst>
+      <p:ext uri="{BB962C8B-B14F-4D97-AF65-F5344CB8AC3E}">
+        <p14:creationId xmlns:p14="http://schemas.microsoft.com/office/powerpoint/2010/main" val="1024086991"/>
+      </p:ext>
+    </p:extLst>
+  </p:cSld>
+  <p:clrMapOvr>
+    <a:masterClrMapping/>
+  </p:clrMapOvr>
+</p:notes>
+</file>
+
+<file path=ppt/notesSlides/notesSlide12.xml><?xml version="1.0" encoding="utf-8"?>
+<p:notes xmlns:a="http://schemas.openxmlformats.org/drawingml/2006/main" xmlns:r="http://schemas.openxmlformats.org/officeDocument/2006/relationships" xmlns:p="http://schemas.openxmlformats.org/presentationml/2006/main">
+  <p:cSld>
+    <p:spTree>
+      <p:nvGrpSpPr>
+        <p:cNvPr id="1" name=""/>
+        <p:cNvGrpSpPr/>
+        <p:nvPr/>
+      </p:nvGrpSpPr>
+      <p:grpSpPr>
+        <a:xfrm>
+          <a:off x="0" y="0"/>
+          <a:ext cx="0" cy="0"/>
+          <a:chOff x="0" y="0"/>
+          <a:chExt cx="0" cy="0"/>
+        </a:xfrm>
+      </p:grpSpPr>
+      <p:sp>
+        <p:nvSpPr>
+          <p:cNvPr id="2" name="Slide Image Placeholder 1"/>
+          <p:cNvSpPr>
+            <a:spLocks noGrp="1" noRot="1" noChangeAspect="1"/>
+          </p:cNvSpPr>
+          <p:nvPr>
+            <p:ph type="sldImg"/>
+          </p:nvPr>
+        </p:nvSpPr>
+        <p:spPr/>
+      </p:sp>
+      <p:sp>
+        <p:nvSpPr>
+          <p:cNvPr id="3" name="Notes Placeholder 2"/>
+          <p:cNvSpPr>
+            <a:spLocks noGrp="1"/>
+          </p:cNvSpPr>
+          <p:nvPr>
+            <p:ph type="body" idx="1"/>
+          </p:nvPr>
+        </p:nvSpPr>
+        <p:spPr/>
+        <p:txBody>
+          <a:bodyPr/>
+          <a:lstStyle/>
+          <a:p>
+            <a:r>
+              <a:rPr lang="en-US" dirty="0"/>
+              <a:t>Résultat négatif propre et défendable. Bonus: le sous-échantillonnage régularise aussi à pleine densité (+0.03 AUC). Et un problème pratique mis en évidence: le seuil de décision n'est valable que pour une densité.</a:t>
+            </a:r>
+            <a:endParaRPr lang="en-US" dirty="0"/>
+          </a:p>
+        </p:txBody>
+      </p:sp>
+      <p:sp>
+        <p:nvSpPr>
+          <p:cNvPr id="4" name="Slide Number Placeholder 3"/>
+          <p:cNvSpPr>
+            <a:spLocks noGrp="1"/>
+          </p:cNvSpPr>
+          <p:nvPr>
+            <p:ph type="sldNum" sz="quarter" idx="10"/>
+          </p:nvPr>
+        </p:nvSpPr>
+        <p:spPr/>
+        <p:txBody>
+          <a:bodyPr/>
+          <a:lstStyle/>
+          <a:p>
+            <a:fld id="{F7021451-1387-4CA6-816F-3879F97B5CBC}" type="slidenum">
+              <a:rPr lang="en-US"/>
+              <a:t>12</a:t>
+            </a:fld>
+            <a:endParaRPr lang="en-US"/>
+          </a:p>
+        </p:txBody>
+      </p:sp>
+    </p:spTree>
+    <p:extLst>
+      <p:ext uri="{BB962C8B-B14F-4D97-AF65-F5344CB8AC3E}">
+        <p14:creationId xmlns:p14="http://schemas.microsoft.com/office/powerpoint/2010/main" val="1024086991"/>
+      </p:ext>
+    </p:extLst>
+  </p:cSld>
+  <p:clrMapOvr>
+    <a:masterClrMapping/>
+  </p:clrMapOvr>
+</p:notes>
+</file>
+
+<file path=ppt/notesSlides/notesSlide13.xml><?xml version="1.0" encoding="utf-8"?>
+<p:notes xmlns:a="http://schemas.openxmlformats.org/drawingml/2006/main" xmlns:r="http://schemas.openxmlformats.org/officeDocument/2006/relationships" xmlns:p="http://schemas.openxmlformats.org/presentationml/2006/main">
+  <p:cSld>
+    <p:spTree>
+      <p:nvGrpSpPr>
+        <p:cNvPr id="1" name=""/>
+        <p:cNvGrpSpPr/>
+        <p:nvPr/>
+      </p:nvGrpSpPr>
+      <p:grpSpPr>
+        <a:xfrm>
+          <a:off x="0" y="0"/>
+          <a:ext cx="0" cy="0"/>
+          <a:chOff x="0" y="0"/>
+          <a:chExt cx="0" cy="0"/>
+        </a:xfrm>
+      </p:grpSpPr>
+      <p:sp>
+        <p:nvSpPr>
+          <p:cNvPr id="2" name="Slide Image Placeholder 1"/>
+          <p:cNvSpPr>
+            <a:spLocks noGrp="1" noRot="1" noChangeAspect="1"/>
+          </p:cNvSpPr>
+          <p:nvPr>
+            <p:ph type="sldImg"/>
+          </p:nvPr>
+        </p:nvSpPr>
+        <p:spPr/>
+      </p:sp>
+      <p:sp>
+        <p:nvSpPr>
+          <p:cNvPr id="3" name="Notes Placeholder 2"/>
+          <p:cNvSpPr>
+            <a:spLocks noGrp="1"/>
+          </p:cNvSpPr>
+          <p:nvPr>
+            <p:ph type="body" idx="1"/>
+          </p:nvPr>
+        </p:nvSpPr>
+        <p:spPr/>
+        <p:txBody>
+          <a:bodyPr/>
+          <a:lstStyle/>
+          <a:p>
+            <a:r>
+              <a:rPr lang="en-US" dirty="0"/>
+              <a:t>Limites en corail, pistes en teal. La piste la plus prometteuse: une KD cross-modale depuis un modèle voxel qui a accès à de l'information que le nuage de points n'a pas.</a:t>
+            </a:r>
+            <a:endParaRPr lang="en-US" dirty="0"/>
+          </a:p>
+        </p:txBody>
+      </p:sp>
+      <p:sp>
+        <p:nvSpPr>
+          <p:cNvPr id="4" name="Slide Number Placeholder 3"/>
+          <p:cNvSpPr>
+            <a:spLocks noGrp="1"/>
+          </p:cNvSpPr>
+          <p:nvPr>
+            <p:ph type="sldNum" sz="quarter" idx="10"/>
+          </p:nvPr>
+        </p:nvSpPr>
+        <p:spPr/>
+        <p:txBody>
+          <a:bodyPr/>
+          <a:lstStyle/>
+          <a:p>
+            <a:fld id="{F7021451-1387-4CA6-816F-3879F97B5CBC}" type="slidenum">
+              <a:rPr lang="en-US"/>
+              <a:t>13</a:t>
+            </a:fld>
+            <a:endParaRPr lang="en-US"/>
+          </a:p>
+        </p:txBody>
+      </p:sp>
+    </p:spTree>
+    <p:extLst>
+      <p:ext uri="{BB962C8B-B14F-4D97-AF65-F5344CB8AC3E}">
+        <p14:creationId xmlns:p14="http://schemas.microsoft.com/office/powerpoint/2010/main" val="1024086991"/>
+      </p:ext>
+    </p:extLst>
+  </p:cSld>
+  <p:clrMapOvr>
+    <a:masterClrMapping/>
+  </p:clrMapOvr>
+</p:notes>
+</file>
+
+<file path=ppt/notesSlides/notesSlide14.xml><?xml version="1.0" encoding="utf-8"?>
+<p:notes xmlns:a="http://schemas.openxmlformats.org/drawingml/2006/main" xmlns:r="http://schemas.openxmlformats.org/officeDocument/2006/relationships" xmlns:p="http://schemas.openxmlformats.org/presentationml/2006/main">
+  <p:cSld>
+    <p:spTree>
+      <p:nvGrpSpPr>
+        <p:cNvPr id="1" name=""/>
+        <p:cNvGrpSpPr/>
+        <p:nvPr/>
+      </p:nvGrpSpPr>
+      <p:grpSpPr>
+        <a:xfrm>
+          <a:off x="0" y="0"/>
+          <a:ext cx="0" cy="0"/>
+          <a:chOff x="0" y="0"/>
+          <a:chExt cx="0" cy="0"/>
+        </a:xfrm>
+      </p:grpSpPr>
+      <p:sp>
+        <p:nvSpPr>
+          <p:cNvPr id="2" name="Slide Image Placeholder 1"/>
+          <p:cNvSpPr>
+            <a:spLocks noGrp="1" noRot="1" noChangeAspect="1"/>
+          </p:cNvSpPr>
+          <p:nvPr>
+            <p:ph type="sldImg"/>
+          </p:nvPr>
+        </p:nvSpPr>
+        <p:spPr/>
+      </p:sp>
+      <p:sp>
+        <p:nvSpPr>
+          <p:cNvPr id="3" name="Notes Placeholder 2"/>
+          <p:cNvSpPr>
+            <a:spLocks noGrp="1"/>
+          </p:cNvSpPr>
+          <p:nvPr>
+            <p:ph type="body" idx="1"/>
+          </p:nvPr>
+        </p:nvSpPr>
+        <p:spPr/>
+        <p:txBody>
+          <a:bodyPr/>
+          <a:lstStyle/>
+          <a:p>
+            <a:r>
+              <a:rPr lang="en-US" dirty="0"/>
+              <a:t>Résumé: résultat négatif mais rigoureux. La méthodologie (5 seeds, tests appariés, témoin aug) est ce qui permet de l'affirmer.</a:t>
+            </a:r>
+            <a:endParaRPr lang="en-US" dirty="0"/>
+          </a:p>
+        </p:txBody>
+      </p:sp>
+      <p:sp>
+        <p:nvSpPr>
+          <p:cNvPr id="4" name="Slide Number Placeholder 3"/>
+          <p:cNvSpPr>
+            <a:spLocks noGrp="1"/>
+          </p:cNvSpPr>
+          <p:nvPr>
+            <p:ph type="sldNum" sz="quarter" idx="10"/>
+          </p:nvPr>
+        </p:nvSpPr>
+        <p:spPr/>
+        <p:txBody>
+          <a:bodyPr/>
+          <a:lstStyle/>
+          <a:p>
+            <a:fld id="{F7021451-1387-4CA6-816F-3879F97B5CBC}" type="slidenum">
+              <a:rPr lang="en-US"/>
+              <a:t>14</a:t>
             </a:fld>
             <a:endParaRPr lang="en-US"/>
           </a:p>
@@ -1535,7 +3411,7 @@
           <a:p>
             <a:r>
               <a:rPr lang="en-US" dirty="0"/>
-              <a:t>Protocole standard de robustesse: on construit un nuage dense fixe puis on en retire des points au test. On mesure l'AUC à chaque densité.</a:t>
+              <a:t>Le protocole de la première moitié a été renforcé: une seule seed ne permettait pas de conclure. 5 seeds, 5 tirages de points par densité, intervalles de confiance et tests appariés. Les hyper-paramètres de KD sont choisis sur la validation, jamais sur le test.</a:t>
             </a:r>
             <a:endParaRPr lang="en-US" dirty="0"/>
           </a:p>
@@ -1623,7 +3499,7 @@
           <a:p>
             <a:r>
               <a:rPr lang="en-US" dirty="0"/>
-              <a:t>Courbe de robustesse. Deux observations clés: le petit student est compétitif à pleine densité, mais le teacher se dégrade plus gracieusement en sous-échantillonnage extrême. C'est exactement ce que la KD pourrait transférer.</a:t>
+              <a:t>Les résultats single-seed de la première moitié étaient trompeurs. Sur 5 seeds teacher et student sont à égalité à pleine densité, et le teacher n'est un peu plus robuste qu'en sparsité extrême.</a:t>
             </a:r>
             <a:endParaRPr lang="en-US" dirty="0"/>
           </a:p>
@@ -1711,7 +3587,7 @@
           <a:p>
             <a:r>
               <a:rPr lang="en-US" dirty="0"/>
-              <a:t>Analyse honnête incluant le résultat inattendu (student ~ teacher). Le point important: le teacher est plus robuste en sparsité, ce qui motive et recadre l'hypothèse de KD.</a:t>
+              <a:t>Toutes les variantes partagent le même code (src/kd.py). Le point méthodologique central: le témoin aug. Sans lui, impossible de séparer l'effet de la distillation de l'effet de l'augmentation par sous-échantillonnage. T=2, alpha=0.7 choisis sur la validation.</a:t>
             </a:r>
             <a:endParaRPr lang="en-US" dirty="0"/>
           </a:p>
@@ -1799,7 +3675,7 @@
           <a:p>
             <a:r>
               <a:rPr lang="en-US" dirty="0"/>
-              <a:t>Plan concret de la suite, branché sur le code existant. L'idée originale: KD robuste où le student apprend à reproduire la sortie dense du teacher à partir d'un nuage parcimonieux.</a:t>
+              <a:t>Deux groupes de courbes: les modèles entraînés sur nuages denses en bas, ceux entraînés avec sous-échantillonnage en haut. La KD robuste et le témoin aug sont indiscernables.</a:t>
             </a:r>
             <a:endParaRPr lang="en-US" dirty="0"/>
           </a:p>
@@ -2180,15 +4056,15 @@
         </p:nvSpPr>
         <p:spPr>
           <a:xfrm>
-            <a:off x="10749521" y="3035608"/>
-            <a:ext cx="110215" cy="110215"/>
+            <a:off x="10641918" y="1158334"/>
+            <a:ext cx="235029" cy="235029"/>
           </a:xfrm>
           <a:prstGeom prst="ellipse">
             <a:avLst/>
           </a:prstGeom>
           <a:solidFill>
             <a:srgbClr val="2EC4B6">
-              <a:alpha val="43373"/>
+              <a:alpha val="51919"/>
             </a:srgbClr>
           </a:solidFill>
           <a:ln/>
@@ -2202,15 +4078,15 @@
         </p:nvSpPr>
         <p:spPr>
           <a:xfrm>
-            <a:off x="11176078" y="1324277"/>
-            <a:ext cx="159949" cy="159949"/>
+            <a:off x="9599942" y="443564"/>
+            <a:ext cx="193127" cy="193127"/>
           </a:xfrm>
           <a:prstGeom prst="ellipse">
             <a:avLst/>
           </a:prstGeom>
           <a:solidFill>
             <a:srgbClr val="2EC4B6">
-              <a:alpha val="39990"/>
+              <a:alpha val="31020"/>
             </a:srgbClr>
           </a:solidFill>
           <a:ln/>
@@ -2224,15 +4100,15 @@
         </p:nvSpPr>
         <p:spPr>
           <a:xfrm>
-            <a:off x="9684496" y="611655"/>
-            <a:ext cx="197593" cy="197593"/>
+            <a:off x="10451162" y="641711"/>
+            <a:ext cx="46548" cy="46548"/>
           </a:xfrm>
           <a:prstGeom prst="ellipse">
             <a:avLst/>
           </a:prstGeom>
           <a:solidFill>
             <a:srgbClr val="2EC4B6">
-              <a:alpha val="36095"/>
+              <a:alpha val="37135"/>
             </a:srgbClr>
           </a:solidFill>
           <a:ln/>
@@ -2246,15 +4122,15 @@
         </p:nvSpPr>
         <p:spPr>
           <a:xfrm>
-            <a:off x="10719358" y="1442884"/>
-            <a:ext cx="95201" cy="95201"/>
+            <a:off x="10145218" y="3034324"/>
+            <a:ext cx="239021" cy="239021"/>
           </a:xfrm>
           <a:prstGeom prst="ellipse">
             <a:avLst/>
           </a:prstGeom>
           <a:solidFill>
             <a:srgbClr val="2EC4B6">
-              <a:alpha val="69645"/>
+              <a:alpha val="36354"/>
             </a:srgbClr>
           </a:solidFill>
           <a:ln/>
@@ -2268,15 +4144,15 @@
         </p:nvSpPr>
         <p:spPr>
           <a:xfrm>
-            <a:off x="9581626" y="2127689"/>
-            <a:ext cx="195433" cy="195433"/>
+            <a:off x="9480822" y="413490"/>
+            <a:ext cx="242780" cy="242780"/>
           </a:xfrm>
           <a:prstGeom prst="ellipse">
             <a:avLst/>
           </a:prstGeom>
           <a:solidFill>
             <a:srgbClr val="2EC4B6">
-              <a:alpha val="53592"/>
+              <a:alpha val="60905"/>
             </a:srgbClr>
           </a:solidFill>
           <a:ln/>
@@ -2290,15 +4166,15 @@
         </p:nvSpPr>
         <p:spPr>
           <a:xfrm>
-            <a:off x="9854151" y="3091937"/>
-            <a:ext cx="150582" cy="150582"/>
+            <a:off x="11239991" y="2224329"/>
+            <a:ext cx="172826" cy="172826"/>
           </a:xfrm>
           <a:prstGeom prst="ellipse">
             <a:avLst/>
           </a:prstGeom>
           <a:solidFill>
             <a:srgbClr val="2EC4B6">
-              <a:alpha val="36953"/>
+              <a:alpha val="58969"/>
             </a:srgbClr>
           </a:solidFill>
           <a:ln/>
@@ -2312,15 +4188,15 @@
         </p:nvSpPr>
         <p:spPr>
           <a:xfrm>
-            <a:off x="10642258" y="773952"/>
-            <a:ext cx="145260" cy="145260"/>
+            <a:off x="11381565" y="3162940"/>
+            <a:ext cx="99069" cy="99069"/>
           </a:xfrm>
           <a:prstGeom prst="ellipse">
             <a:avLst/>
           </a:prstGeom>
           <a:solidFill>
             <a:srgbClr val="2EC4B6">
-              <a:alpha val="73935"/>
+              <a:alpha val="70253"/>
             </a:srgbClr>
           </a:solidFill>
           <a:ln/>
@@ -2334,15 +4210,15 @@
         </p:nvSpPr>
         <p:spPr>
           <a:xfrm>
-            <a:off x="11280582" y="2788483"/>
-            <a:ext cx="234027" cy="234027"/>
+            <a:off x="9223437" y="2157617"/>
+            <a:ext cx="87514" cy="87514"/>
           </a:xfrm>
           <a:prstGeom prst="ellipse">
             <a:avLst/>
           </a:prstGeom>
           <a:solidFill>
             <a:srgbClr val="2EC4B6">
-              <a:alpha val="44812"/>
+              <a:alpha val="60570"/>
             </a:srgbClr>
           </a:solidFill>
           <a:ln/>
@@ -2356,15 +4232,15 @@
         </p:nvSpPr>
         <p:spPr>
           <a:xfrm>
-            <a:off x="11736496" y="3018610"/>
-            <a:ext cx="267768" cy="267768"/>
+            <a:off x="9863282" y="1083429"/>
+            <a:ext cx="60097" cy="60097"/>
           </a:xfrm>
           <a:prstGeom prst="ellipse">
             <a:avLst/>
           </a:prstGeom>
           <a:solidFill>
             <a:srgbClr val="2EC4B6">
-              <a:alpha val="55502"/>
+              <a:alpha val="63635"/>
             </a:srgbClr>
           </a:solidFill>
           <a:ln/>
@@ -2378,15 +4254,15 @@
         </p:nvSpPr>
         <p:spPr>
           <a:xfrm>
-            <a:off x="10971272" y="1812926"/>
-            <a:ext cx="111819" cy="111819"/>
+            <a:off x="11205041" y="387070"/>
+            <a:ext cx="132149" cy="132149"/>
           </a:xfrm>
           <a:prstGeom prst="ellipse">
             <a:avLst/>
           </a:prstGeom>
           <a:solidFill>
             <a:srgbClr val="2EC4B6">
-              <a:alpha val="44843"/>
+              <a:alpha val="65131"/>
             </a:srgbClr>
           </a:solidFill>
           <a:ln/>
@@ -2400,15 +4276,15 @@
         </p:nvSpPr>
         <p:spPr>
           <a:xfrm>
-            <a:off x="9732713" y="2890388"/>
-            <a:ext cx="149049" cy="149049"/>
+            <a:off x="9656260" y="1866623"/>
+            <a:ext cx="219099" cy="219099"/>
           </a:xfrm>
           <a:prstGeom prst="ellipse">
             <a:avLst/>
           </a:prstGeom>
           <a:solidFill>
             <a:srgbClr val="2EC4B6">
-              <a:alpha val="30343"/>
+              <a:alpha val="32243"/>
             </a:srgbClr>
           </a:solidFill>
           <a:ln/>
@@ -2422,15 +4298,15 @@
         </p:nvSpPr>
         <p:spPr>
           <a:xfrm>
-            <a:off x="10456384" y="1637084"/>
-            <a:ext cx="158525" cy="158525"/>
+            <a:off x="11317229" y="1070092"/>
+            <a:ext cx="112376" cy="112376"/>
           </a:xfrm>
           <a:prstGeom prst="ellipse">
             <a:avLst/>
           </a:prstGeom>
           <a:solidFill>
             <a:srgbClr val="2EC4B6">
-              <a:alpha val="36253"/>
+              <a:alpha val="75420"/>
             </a:srgbClr>
           </a:solidFill>
           <a:ln/>
@@ -2444,15 +4320,15 @@
         </p:nvSpPr>
         <p:spPr>
           <a:xfrm>
-            <a:off x="10306777" y="2216482"/>
-            <a:ext cx="175709" cy="175709"/>
+            <a:off x="9411712" y="925426"/>
+            <a:ext cx="169393" cy="169393"/>
           </a:xfrm>
           <a:prstGeom prst="ellipse">
             <a:avLst/>
           </a:prstGeom>
           <a:solidFill>
             <a:srgbClr val="2EC4B6">
-              <a:alpha val="75128"/>
+              <a:alpha val="45362"/>
             </a:srgbClr>
           </a:solidFill>
           <a:ln/>
@@ -2466,15 +4342,15 @@
         </p:nvSpPr>
         <p:spPr>
           <a:xfrm>
-            <a:off x="9247873" y="1281377"/>
-            <a:ext cx="92032" cy="92032"/>
+            <a:off x="11638491" y="2157570"/>
+            <a:ext cx="272877" cy="272877"/>
           </a:xfrm>
           <a:prstGeom prst="ellipse">
             <a:avLst/>
           </a:prstGeom>
           <a:solidFill>
             <a:srgbClr val="2EC4B6">
-              <a:alpha val="41125"/>
+              <a:alpha val="47988"/>
             </a:srgbClr>
           </a:solidFill>
           <a:ln/>
@@ -2488,15 +4364,15 @@
         </p:nvSpPr>
         <p:spPr>
           <a:xfrm>
-            <a:off x="11077100" y="2304830"/>
-            <a:ext cx="195614" cy="195614"/>
+            <a:off x="11588852" y="1970146"/>
+            <a:ext cx="272072" cy="272072"/>
           </a:xfrm>
           <a:prstGeom prst="ellipse">
             <a:avLst/>
           </a:prstGeom>
           <a:solidFill>
             <a:srgbClr val="2EC4B6">
-              <a:alpha val="53757"/>
+              <a:alpha val="66734"/>
             </a:srgbClr>
           </a:solidFill>
           <a:ln/>
@@ -2510,15 +4386,15 @@
         </p:nvSpPr>
         <p:spPr>
           <a:xfrm>
-            <a:off x="10341815" y="2551276"/>
-            <a:ext cx="57430" cy="57430"/>
+            <a:off x="10693168" y="675053"/>
+            <a:ext cx="139226" cy="139226"/>
           </a:xfrm>
           <a:prstGeom prst="ellipse">
             <a:avLst/>
           </a:prstGeom>
           <a:solidFill>
             <a:srgbClr val="2EC4B6">
-              <a:alpha val="38262"/>
+              <a:alpha val="59373"/>
             </a:srgbClr>
           </a:solidFill>
           <a:ln/>
@@ -2532,15 +4408,15 @@
         </p:nvSpPr>
         <p:spPr>
           <a:xfrm>
-            <a:off x="10551146" y="724350"/>
-            <a:ext cx="57306" cy="57306"/>
+            <a:off x="9721074" y="2829744"/>
+            <a:ext cx="94223" cy="94223"/>
           </a:xfrm>
           <a:prstGeom prst="ellipse">
             <a:avLst/>
           </a:prstGeom>
           <a:solidFill>
             <a:srgbClr val="2EC4B6">
-              <a:alpha val="67766"/>
+              <a:alpha val="74979"/>
             </a:srgbClr>
           </a:solidFill>
           <a:ln/>
@@ -2554,15 +4430,15 @@
         </p:nvSpPr>
         <p:spPr>
           <a:xfrm>
-            <a:off x="10520392" y="2023991"/>
-            <a:ext cx="115502" cy="115502"/>
+            <a:off x="9997211" y="1536875"/>
+            <a:ext cx="193168" cy="193168"/>
           </a:xfrm>
           <a:prstGeom prst="ellipse">
             <a:avLst/>
           </a:prstGeom>
           <a:solidFill>
             <a:srgbClr val="2EC4B6">
-              <a:alpha val="51938"/>
+              <a:alpha val="45037"/>
             </a:srgbClr>
           </a:solidFill>
           <a:ln/>
@@ -2576,15 +4452,15 @@
         </p:nvSpPr>
         <p:spPr>
           <a:xfrm>
-            <a:off x="10222667" y="663407"/>
-            <a:ext cx="39219" cy="39219"/>
+            <a:off x="9793709" y="2820872"/>
+            <a:ext cx="138966" cy="138966"/>
           </a:xfrm>
           <a:prstGeom prst="ellipse">
             <a:avLst/>
           </a:prstGeom>
           <a:solidFill>
             <a:srgbClr val="2EC4B6">
-              <a:alpha val="37003"/>
+              <a:alpha val="66687"/>
             </a:srgbClr>
           </a:solidFill>
           <a:ln/>
@@ -2598,15 +4474,15 @@
         </p:nvSpPr>
         <p:spPr>
           <a:xfrm>
-            <a:off x="10124042" y="1790623"/>
-            <a:ext cx="210774" cy="210774"/>
+            <a:off x="10017588" y="796250"/>
+            <a:ext cx="187518" cy="187518"/>
           </a:xfrm>
           <a:prstGeom prst="ellipse">
             <a:avLst/>
           </a:prstGeom>
           <a:solidFill>
             <a:srgbClr val="2EC4B6">
-              <a:alpha val="41848"/>
+              <a:alpha val="50786"/>
             </a:srgbClr>
           </a:solidFill>
           <a:ln/>
@@ -2620,15 +4496,15 @@
         </p:nvSpPr>
         <p:spPr>
           <a:xfrm>
-            <a:off x="11179112" y="2885737"/>
-            <a:ext cx="54191" cy="54191"/>
+            <a:off x="10362818" y="613637"/>
+            <a:ext cx="270367" cy="270367"/>
           </a:xfrm>
           <a:prstGeom prst="ellipse">
             <a:avLst/>
           </a:prstGeom>
           <a:solidFill>
             <a:srgbClr val="2EC4B6">
-              <a:alpha val="56749"/>
+              <a:alpha val="34480"/>
             </a:srgbClr>
           </a:solidFill>
           <a:ln/>
@@ -2642,15 +4518,15 @@
         </p:nvSpPr>
         <p:spPr>
           <a:xfrm>
-            <a:off x="9869204" y="3142202"/>
-            <a:ext cx="76755" cy="76755"/>
+            <a:off x="9683550" y="2524062"/>
+            <a:ext cx="140865" cy="140865"/>
           </a:xfrm>
           <a:prstGeom prst="ellipse">
             <a:avLst/>
           </a:prstGeom>
           <a:solidFill>
             <a:srgbClr val="2EC4B6">
-              <a:alpha val="55476"/>
+              <a:alpha val="49151"/>
             </a:srgbClr>
           </a:solidFill>
           <a:ln/>
@@ -2664,15 +4540,15 @@
         </p:nvSpPr>
         <p:spPr>
           <a:xfrm>
-            <a:off x="8936516" y="2713674"/>
-            <a:ext cx="73914" cy="73914"/>
+            <a:off x="9435596" y="912378"/>
+            <a:ext cx="231122" cy="231122"/>
           </a:xfrm>
           <a:prstGeom prst="ellipse">
             <a:avLst/>
           </a:prstGeom>
           <a:solidFill>
             <a:srgbClr val="2EC4B6">
-              <a:alpha val="71827"/>
+              <a:alpha val="62631"/>
             </a:srgbClr>
           </a:solidFill>
           <a:ln/>
@@ -2686,15 +4562,15 @@
         </p:nvSpPr>
         <p:spPr>
           <a:xfrm>
-            <a:off x="9653789" y="1410147"/>
-            <a:ext cx="247854" cy="247854"/>
+            <a:off x="11287927" y="1693134"/>
+            <a:ext cx="142972" cy="142972"/>
           </a:xfrm>
           <a:prstGeom prst="ellipse">
             <a:avLst/>
           </a:prstGeom>
           <a:solidFill>
             <a:srgbClr val="2EC4B6">
-              <a:alpha val="54508"/>
+              <a:alpha val="59854"/>
             </a:srgbClr>
           </a:solidFill>
           <a:ln/>
@@ -2708,15 +4584,15 @@
         </p:nvSpPr>
         <p:spPr>
           <a:xfrm>
-            <a:off x="9690343" y="3275476"/>
-            <a:ext cx="148007" cy="148007"/>
+            <a:off x="9666909" y="2562924"/>
+            <a:ext cx="272788" cy="272788"/>
           </a:xfrm>
           <a:prstGeom prst="ellipse">
             <a:avLst/>
           </a:prstGeom>
           <a:solidFill>
             <a:srgbClr val="2EC4B6">
-              <a:alpha val="62677"/>
+              <a:alpha val="32844"/>
             </a:srgbClr>
           </a:solidFill>
           <a:ln/>
@@ -2730,15 +4606,15 @@
         </p:nvSpPr>
         <p:spPr>
           <a:xfrm>
-            <a:off x="9527167" y="1049995"/>
-            <a:ext cx="247446" cy="247446"/>
+            <a:off x="9678168" y="586794"/>
+            <a:ext cx="205864" cy="205864"/>
           </a:xfrm>
           <a:prstGeom prst="ellipse">
             <a:avLst/>
           </a:prstGeom>
           <a:solidFill>
             <a:srgbClr val="2EC4B6">
-              <a:alpha val="77199"/>
+              <a:alpha val="44886"/>
             </a:srgbClr>
           </a:solidFill>
           <a:ln/>
@@ -2753,7 +4629,7 @@
         <p:spPr>
           <a:xfrm>
             <a:off x="640080" y="1234440"/>
-            <a:ext cx="3657600" cy="365760"/>
+            <a:ext cx="7315200" cy="365760"/>
           </a:xfrm>
           <a:prstGeom prst="rect">
             <a:avLst/>
@@ -2777,7 +4653,7 @@
                 <a:ea typeface="Calibri" pitchFamily="34" charset="-122"/>
                 <a:cs typeface="Calibri" pitchFamily="34" charset="-120"/>
               </a:rPr>
-              <a:t>1ʳᵉ moitié du projet</a:t>
+              <a:t>Projet complet — résultats finaux</a:t>
             </a:r>
             <a:endParaRPr lang="en-US" sz="1400" dirty="0"/>
           </a:p>
@@ -2917,7 +4793,7 @@
                 <a:ea typeface="Calibri" pitchFamily="34" charset="-122"/>
                 <a:cs typeface="Calibri" pitchFamily="34" charset="-120"/>
               </a:rPr>
-              <a:t>PointNet (teacher / student)  ·  Knowledge Distillation  ·  GPU (RTX 5060)</a:t>
+              <a:t>PointNet (teacher / student)  ·  Knowledge Distillation  ·  5 seeds · tests appariés</a:t>
             </a:r>
             <a:endParaRPr lang="en-US" sz="1400" dirty="0"/>
           </a:p>
@@ -2934,6 +4810,2211 @@
 <file path=ppt/slides/slide10.xml><?xml version="1.0" encoding="utf-8"?>
 <p:sld xmlns:a="http://schemas.openxmlformats.org/drawingml/2006/main" xmlns:r="http://schemas.openxmlformats.org/officeDocument/2006/relationships" xmlns:p="http://schemas.openxmlformats.org/presentationml/2006/main">
   <p:cSld name="Slide 10">
+    <p:bg>
+      <p:bgPr>
+        <a:solidFill>
+          <a:srgbClr val="FFFFFF"/>
+        </a:solidFill>
+      </p:bgPr>
+    </p:bg>
+    <p:spTree>
+      <p:nvGrpSpPr>
+        <p:cNvPr id="1" name=""/>
+        <p:cNvGrpSpPr/>
+        <p:nvPr/>
+      </p:nvGrpSpPr>
+      <p:grpSpPr>
+        <a:xfrm>
+          <a:off x="0" y="0"/>
+          <a:ext cx="0" cy="0"/>
+          <a:chOff x="0" y="0"/>
+          <a:chExt cx="0" cy="0"/>
+        </a:xfrm>
+      </p:grpSpPr>
+      <p:sp>
+        <p:nvSpPr>
+          <p:cNvPr id="2" name="Text 0"/>
+          <p:cNvSpPr txBox="1"/>
+          <p:nvPr/>
+        </p:nvSpPr>
+        <p:spPr>
+          <a:xfrm>
+            <a:off x="548640" y="384048"/>
+            <a:ext cx="11064240" cy="822960"/>
+          </a:xfrm>
+          <a:prstGeom prst="rect">
+            <a:avLst/>
+          </a:prstGeom>
+          <a:noFill/>
+          <a:ln/>
+        </p:spPr>
+        <p:txBody>
+          <a:bodyPr wrap="square" lIns="0" tIns="0" rIns="0" bIns="0" rtlCol="0" anchor="ctr"/>
+          <a:lstStyle/>
+          <a:p>
+            <a:pPr indent="0" marL="0">
+              <a:buNone/>
+            </a:pPr>
+            <a:r>
+              <a:rPr lang="en-US" sz="3200" b="1" dirty="0">
+                <a:solidFill>
+                  <a:srgbClr val="0B3C5D"/>
+                </a:solidFill>
+                <a:latin typeface="Cambria" pitchFamily="34" charset="0"/>
+                <a:ea typeface="Cambria" pitchFamily="34" charset="-122"/>
+                <a:cs typeface="Cambria" pitchFamily="34" charset="-120"/>
+              </a:rPr>
+              <a:t>Le test décisif — KD robuste vs témoin aug</a:t>
+            </a:r>
+            <a:endParaRPr lang="en-US" sz="3200" dirty="0"/>
+          </a:p>
+        </p:txBody>
+      </p:sp>
+      <p:sp>
+        <p:nvSpPr>
+          <p:cNvPr id="3" name="Shape 1"/>
+          <p:cNvSpPr/>
+          <p:nvPr/>
+        </p:nvSpPr>
+        <p:spPr>
+          <a:xfrm>
+            <a:off x="548640" y="1508760"/>
+            <a:ext cx="2697480" cy="1737360"/>
+          </a:xfrm>
+          <a:prstGeom prst="roundRect">
+            <a:avLst>
+              <a:gd name="adj" fmla="val 4737"/>
+            </a:avLst>
+          </a:prstGeom>
+          <a:solidFill>
+            <a:srgbClr val="EAF3F3"/>
+          </a:solidFill>
+          <a:ln/>
+          <a:effectLst>
+            <a:outerShdw sx="100000" sy="100000" kx="0" ky="0" algn="bl" rotWithShape="0" blurRad="88900" dist="25400" dir="5400000">
+              <a:srgbClr val="9AAEB5">
+                <a:alpha val="35000"/>
+              </a:srgbClr>
+            </a:outerShdw>
+          </a:effectLst>
+        </p:spPr>
+      </p:sp>
+      <p:sp>
+        <p:nvSpPr>
+          <p:cNvPr id="4" name="Text 2"/>
+          <p:cNvSpPr txBox="1"/>
+          <p:nvPr/>
+        </p:nvSpPr>
+        <p:spPr>
+          <a:xfrm>
+            <a:off x="548640" y="1645920"/>
+            <a:ext cx="2697480" cy="731520"/>
+          </a:xfrm>
+          <a:prstGeom prst="rect">
+            <a:avLst/>
+          </a:prstGeom>
+          <a:noFill/>
+          <a:ln/>
+        </p:spPr>
+        <p:txBody>
+          <a:bodyPr wrap="square" lIns="0" tIns="0" rIns="0" bIns="0" rtlCol="0" anchor="ctr"/>
+          <a:lstStyle/>
+          <a:p>
+            <a:pPr algn="ctr" indent="0" marL="0">
+              <a:buNone/>
+            </a:pPr>
+            <a:r>
+              <a:rPr lang="en-US" sz="3400" b="1" dirty="0">
+                <a:solidFill>
+                  <a:srgbClr val="1C7293"/>
+                </a:solidFill>
+                <a:latin typeface="Cambria" pitchFamily="34" charset="0"/>
+                <a:ea typeface="Cambria" pitchFamily="34" charset="-122"/>
+                <a:cs typeface="Cambria" pitchFamily="34" charset="-120"/>
+              </a:rPr>
+              <a:t>+0.08</a:t>
+            </a:r>
+            <a:endParaRPr lang="en-US" sz="3400" dirty="0"/>
+          </a:p>
+        </p:txBody>
+      </p:sp>
+      <p:sp>
+        <p:nvSpPr>
+          <p:cNvPr id="5" name="Text 3"/>
+          <p:cNvSpPr txBox="1"/>
+          <p:nvPr/>
+        </p:nvSpPr>
+        <p:spPr>
+          <a:xfrm>
+            <a:off x="685800" y="2377440"/>
+            <a:ext cx="2423160" cy="777240"/>
+          </a:xfrm>
+          <a:prstGeom prst="rect">
+            <a:avLst/>
+          </a:prstGeom>
+          <a:noFill/>
+          <a:ln/>
+        </p:spPr>
+        <p:txBody>
+          <a:bodyPr wrap="square" lIns="0" tIns="0" rIns="0" bIns="0" rtlCol="0" anchor="ctr"/>
+          <a:lstStyle/>
+          <a:p>
+            <a:pPr algn="ctr" indent="0" marL="0">
+              <a:buNone/>
+            </a:pPr>
+            <a:r>
+              <a:rPr lang="en-US" sz="1250" dirty="0">
+                <a:solidFill>
+                  <a:srgbClr val="6B7B84"/>
+                </a:solidFill>
+                <a:latin typeface="Calibri" pitchFamily="34" charset="0"/>
+                <a:ea typeface="Calibri" pitchFamily="34" charset="-122"/>
+                <a:cs typeface="Calibri" pitchFamily="34" charset="-120"/>
+              </a:rPr>
+              <a:t>KD robuste − scratch</a:t>
+            </a:r>
+            <a:endParaRPr lang="en-US" sz="1250" dirty="0"/>
+          </a:p>
+          <a:p>
+            <a:pPr algn="ctr" indent="0" marL="0">
+              <a:buNone/>
+            </a:pPr>
+            <a:r>
+              <a:rPr lang="en-US" sz="1250" dirty="0">
+                <a:solidFill>
+                  <a:srgbClr val="6B7B84"/>
+                </a:solidFill>
+                <a:latin typeface="Calibri" pitchFamily="34" charset="0"/>
+                <a:ea typeface="Calibri" pitchFamily="34" charset="-122"/>
+                <a:cs typeface="Calibri" pitchFamily="34" charset="-120"/>
+              </a:rPr>
+              <a:t>(64 pts, p &lt; 0.01, 5/5)</a:t>
+            </a:r>
+            <a:endParaRPr lang="en-US" sz="1250" dirty="0"/>
+          </a:p>
+        </p:txBody>
+      </p:sp>
+      <p:sp>
+        <p:nvSpPr>
+          <p:cNvPr id="6" name="Shape 4"/>
+          <p:cNvSpPr/>
+          <p:nvPr/>
+        </p:nvSpPr>
+        <p:spPr>
+          <a:xfrm>
+            <a:off x="3410712" y="1508760"/>
+            <a:ext cx="2697480" cy="1737360"/>
+          </a:xfrm>
+          <a:prstGeom prst="roundRect">
+            <a:avLst>
+              <a:gd name="adj" fmla="val 4737"/>
+            </a:avLst>
+          </a:prstGeom>
+          <a:solidFill>
+            <a:srgbClr val="F2F6F7"/>
+          </a:solidFill>
+          <a:ln/>
+          <a:effectLst>
+            <a:outerShdw sx="100000" sy="100000" kx="0" ky="0" algn="bl" rotWithShape="0" blurRad="88900" dist="25400" dir="5400000">
+              <a:srgbClr val="9AAEB5">
+                <a:alpha val="35000"/>
+              </a:srgbClr>
+            </a:outerShdw>
+          </a:effectLst>
+        </p:spPr>
+      </p:sp>
+      <p:sp>
+        <p:nvSpPr>
+          <p:cNvPr id="7" name="Text 5"/>
+          <p:cNvSpPr txBox="1"/>
+          <p:nvPr/>
+        </p:nvSpPr>
+        <p:spPr>
+          <a:xfrm>
+            <a:off x="3410712" y="1645920"/>
+            <a:ext cx="2697480" cy="731520"/>
+          </a:xfrm>
+          <a:prstGeom prst="rect">
+            <a:avLst/>
+          </a:prstGeom>
+          <a:noFill/>
+          <a:ln/>
+        </p:spPr>
+        <p:txBody>
+          <a:bodyPr wrap="square" lIns="0" tIns="0" rIns="0" bIns="0" rtlCol="0" anchor="ctr"/>
+          <a:lstStyle/>
+          <a:p>
+            <a:pPr algn="ctr" indent="0" marL="0">
+              <a:buNone/>
+            </a:pPr>
+            <a:r>
+              <a:rPr lang="en-US" sz="3400" b="1" dirty="0">
+                <a:solidFill>
+                  <a:srgbClr val="1C7293"/>
+                </a:solidFill>
+                <a:latin typeface="Cambria" pitchFamily="34" charset="0"/>
+                <a:ea typeface="Cambria" pitchFamily="34" charset="-122"/>
+                <a:cs typeface="Cambria" pitchFamily="34" charset="-120"/>
+              </a:rPr>
+              <a:t>+0.08</a:t>
+            </a:r>
+            <a:endParaRPr lang="en-US" sz="3400" dirty="0"/>
+          </a:p>
+        </p:txBody>
+      </p:sp>
+      <p:sp>
+        <p:nvSpPr>
+          <p:cNvPr id="8" name="Text 6"/>
+          <p:cNvSpPr txBox="1"/>
+          <p:nvPr/>
+        </p:nvSpPr>
+        <p:spPr>
+          <a:xfrm>
+            <a:off x="3547872" y="2377440"/>
+            <a:ext cx="2423160" cy="777240"/>
+          </a:xfrm>
+          <a:prstGeom prst="rect">
+            <a:avLst/>
+          </a:prstGeom>
+          <a:noFill/>
+          <a:ln/>
+        </p:spPr>
+        <p:txBody>
+          <a:bodyPr wrap="square" lIns="0" tIns="0" rIns="0" bIns="0" rtlCol="0" anchor="ctr"/>
+          <a:lstStyle/>
+          <a:p>
+            <a:pPr algn="ctr" indent="0" marL="0">
+              <a:buNone/>
+            </a:pPr>
+            <a:r>
+              <a:rPr lang="en-US" sz="1250" dirty="0">
+                <a:solidFill>
+                  <a:srgbClr val="6B7B84"/>
+                </a:solidFill>
+                <a:latin typeface="Calibri" pitchFamily="34" charset="0"/>
+                <a:ea typeface="Calibri" pitchFamily="34" charset="-122"/>
+                <a:cs typeface="Calibri" pitchFamily="34" charset="-120"/>
+              </a:rPr>
+              <a:t>aug − scratch</a:t>
+            </a:r>
+            <a:endParaRPr lang="en-US" sz="1250" dirty="0"/>
+          </a:p>
+          <a:p>
+            <a:pPr algn="ctr" indent="0" marL="0">
+              <a:buNone/>
+            </a:pPr>
+            <a:r>
+              <a:rPr lang="en-US" sz="1250" dirty="0">
+                <a:solidFill>
+                  <a:srgbClr val="6B7B84"/>
+                </a:solidFill>
+                <a:latin typeface="Calibri" pitchFamily="34" charset="0"/>
+                <a:ea typeface="Calibri" pitchFamily="34" charset="-122"/>
+                <a:cs typeface="Calibri" pitchFamily="34" charset="-120"/>
+              </a:rPr>
+              <a:t>(64 pts, p &lt; 0.01, 5/5)</a:t>
+            </a:r>
+            <a:endParaRPr lang="en-US" sz="1250" dirty="0"/>
+          </a:p>
+        </p:txBody>
+      </p:sp>
+      <p:sp>
+        <p:nvSpPr>
+          <p:cNvPr id="9" name="Shape 7"/>
+          <p:cNvSpPr/>
+          <p:nvPr/>
+        </p:nvSpPr>
+        <p:spPr>
+          <a:xfrm>
+            <a:off x="6272784" y="1508760"/>
+            <a:ext cx="2697480" cy="1737360"/>
+          </a:xfrm>
+          <a:prstGeom prst="roundRect">
+            <a:avLst>
+              <a:gd name="adj" fmla="val 4737"/>
+            </a:avLst>
+          </a:prstGeom>
+          <a:solidFill>
+            <a:srgbClr val="EAF3F3"/>
+          </a:solidFill>
+          <a:ln/>
+          <a:effectLst>
+            <a:outerShdw sx="100000" sy="100000" kx="0" ky="0" algn="bl" rotWithShape="0" blurRad="88900" dist="25400" dir="5400000">
+              <a:srgbClr val="9AAEB5">
+                <a:alpha val="35000"/>
+              </a:srgbClr>
+            </a:outerShdw>
+          </a:effectLst>
+        </p:spPr>
+      </p:sp>
+      <p:sp>
+        <p:nvSpPr>
+          <p:cNvPr id="10" name="Text 8"/>
+          <p:cNvSpPr txBox="1"/>
+          <p:nvPr/>
+        </p:nvSpPr>
+        <p:spPr>
+          <a:xfrm>
+            <a:off x="6272784" y="1645920"/>
+            <a:ext cx="2697480" cy="731520"/>
+          </a:xfrm>
+          <a:prstGeom prst="rect">
+            <a:avLst/>
+          </a:prstGeom>
+          <a:noFill/>
+          <a:ln/>
+        </p:spPr>
+        <p:txBody>
+          <a:bodyPr wrap="square" lIns="0" tIns="0" rIns="0" bIns="0" rtlCol="0" anchor="ctr"/>
+          <a:lstStyle/>
+          <a:p>
+            <a:pPr algn="ctr" indent="0" marL="0">
+              <a:buNone/>
+            </a:pPr>
+            <a:r>
+              <a:rPr lang="en-US" sz="3400" b="1" dirty="0">
+                <a:solidFill>
+                  <a:srgbClr val="E76F51"/>
+                </a:solidFill>
+                <a:latin typeface="Cambria" pitchFamily="34" charset="0"/>
+                <a:ea typeface="Cambria" pitchFamily="34" charset="-122"/>
+                <a:cs typeface="Cambria" pitchFamily="34" charset="-120"/>
+              </a:rPr>
+              <a:t>≈ 0</a:t>
+            </a:r>
+            <a:endParaRPr lang="en-US" sz="3400" dirty="0"/>
+          </a:p>
+        </p:txBody>
+      </p:sp>
+      <p:sp>
+        <p:nvSpPr>
+          <p:cNvPr id="11" name="Text 9"/>
+          <p:cNvSpPr txBox="1"/>
+          <p:nvPr/>
+        </p:nvSpPr>
+        <p:spPr>
+          <a:xfrm>
+            <a:off x="6409944" y="2377440"/>
+            <a:ext cx="2423160" cy="777240"/>
+          </a:xfrm>
+          <a:prstGeom prst="rect">
+            <a:avLst/>
+          </a:prstGeom>
+          <a:noFill/>
+          <a:ln/>
+        </p:spPr>
+        <p:txBody>
+          <a:bodyPr wrap="square" lIns="0" tIns="0" rIns="0" bIns="0" rtlCol="0" anchor="ctr"/>
+          <a:lstStyle/>
+          <a:p>
+            <a:pPr algn="ctr" indent="0" marL="0">
+              <a:buNone/>
+            </a:pPr>
+            <a:r>
+              <a:rPr lang="en-US" sz="1250" dirty="0">
+                <a:solidFill>
+                  <a:srgbClr val="6B7B84"/>
+                </a:solidFill>
+                <a:latin typeface="Calibri" pitchFamily="34" charset="0"/>
+                <a:ea typeface="Calibri" pitchFamily="34" charset="-122"/>
+                <a:cs typeface="Calibri" pitchFamily="34" charset="-120"/>
+              </a:rPr>
+              <a:t>KD robuste − aug</a:t>
+            </a:r>
+            <a:endParaRPr lang="en-US" sz="1250" dirty="0"/>
+          </a:p>
+          <a:p>
+            <a:pPr algn="ctr" indent="0" marL="0">
+              <a:buNone/>
+            </a:pPr>
+            <a:r>
+              <a:rPr lang="en-US" sz="1250" dirty="0">
+                <a:solidFill>
+                  <a:srgbClr val="6B7B84"/>
+                </a:solidFill>
+                <a:latin typeface="Calibri" pitchFamily="34" charset="0"/>
+                <a:ea typeface="Calibri" pitchFamily="34" charset="-122"/>
+                <a:cs typeface="Calibri" pitchFamily="34" charset="-120"/>
+              </a:rPr>
+              <a:t>(|Δ| ≤ 0.004, p ≥ 0.69)</a:t>
+            </a:r>
+            <a:endParaRPr lang="en-US" sz="1250" dirty="0"/>
+          </a:p>
+        </p:txBody>
+      </p:sp>
+      <p:sp>
+        <p:nvSpPr>
+          <p:cNvPr id="12" name="Shape 10"/>
+          <p:cNvSpPr/>
+          <p:nvPr/>
+        </p:nvSpPr>
+        <p:spPr>
+          <a:xfrm>
+            <a:off x="9134856" y="1508760"/>
+            <a:ext cx="2697480" cy="1737360"/>
+          </a:xfrm>
+          <a:prstGeom prst="roundRect">
+            <a:avLst>
+              <a:gd name="adj" fmla="val 4737"/>
+            </a:avLst>
+          </a:prstGeom>
+          <a:solidFill>
+            <a:srgbClr val="F2F6F7"/>
+          </a:solidFill>
+          <a:ln/>
+          <a:effectLst>
+            <a:outerShdw sx="100000" sy="100000" kx="0" ky="0" algn="bl" rotWithShape="0" blurRad="88900" dist="25400" dir="5400000">
+              <a:srgbClr val="9AAEB5">
+                <a:alpha val="35000"/>
+              </a:srgbClr>
+            </a:outerShdw>
+          </a:effectLst>
+        </p:spPr>
+      </p:sp>
+      <p:sp>
+        <p:nvSpPr>
+          <p:cNvPr id="13" name="Text 11"/>
+          <p:cNvSpPr txBox="1"/>
+          <p:nvPr/>
+        </p:nvSpPr>
+        <p:spPr>
+          <a:xfrm>
+            <a:off x="9134856" y="1645920"/>
+            <a:ext cx="2697480" cy="731520"/>
+          </a:xfrm>
+          <a:prstGeom prst="rect">
+            <a:avLst/>
+          </a:prstGeom>
+          <a:noFill/>
+          <a:ln/>
+        </p:spPr>
+        <p:txBody>
+          <a:bodyPr wrap="square" lIns="0" tIns="0" rIns="0" bIns="0" rtlCol="0" anchor="ctr"/>
+          <a:lstStyle/>
+          <a:p>
+            <a:pPr algn="ctr" indent="0" marL="0">
+              <a:buNone/>
+            </a:pPr>
+            <a:r>
+              <a:rPr lang="en-US" sz="3400" b="1" dirty="0">
+                <a:solidFill>
+                  <a:srgbClr val="E76F51"/>
+                </a:solidFill>
+                <a:latin typeface="Cambria" pitchFamily="34" charset="0"/>
+                <a:ea typeface="Cambria" pitchFamily="34" charset="-122"/>
+                <a:cs typeface="Cambria" pitchFamily="34" charset="-120"/>
+              </a:rPr>
+              <a:t>≈ 0</a:t>
+            </a:r>
+            <a:endParaRPr lang="en-US" sz="3400" dirty="0"/>
+          </a:p>
+        </p:txBody>
+      </p:sp>
+      <p:sp>
+        <p:nvSpPr>
+          <p:cNvPr id="14" name="Text 12"/>
+          <p:cNvSpPr txBox="1"/>
+          <p:nvPr/>
+        </p:nvSpPr>
+        <p:spPr>
+          <a:xfrm>
+            <a:off x="9272016" y="2377440"/>
+            <a:ext cx="2423160" cy="777240"/>
+          </a:xfrm>
+          <a:prstGeom prst="rect">
+            <a:avLst/>
+          </a:prstGeom>
+          <a:noFill/>
+          <a:ln/>
+        </p:spPr>
+        <p:txBody>
+          <a:bodyPr wrap="square" lIns="0" tIns="0" rIns="0" bIns="0" rtlCol="0" anchor="ctr"/>
+          <a:lstStyle/>
+          <a:p>
+            <a:pPr algn="ctr" indent="0" marL="0">
+              <a:buNone/>
+            </a:pPr>
+            <a:r>
+              <a:rPr lang="en-US" sz="1250" dirty="0">
+                <a:solidFill>
+                  <a:srgbClr val="6B7B84"/>
+                </a:solidFill>
+                <a:latin typeface="Calibri" pitchFamily="34" charset="0"/>
+                <a:ea typeface="Calibri" pitchFamily="34" charset="-122"/>
+                <a:cs typeface="Calibri" pitchFamily="34" charset="-120"/>
+              </a:rPr>
+              <a:t>+ features − KD robuste</a:t>
+            </a:r>
+            <a:endParaRPr lang="en-US" sz="1250" dirty="0"/>
+          </a:p>
+          <a:p>
+            <a:pPr algn="ctr" indent="0" marL="0">
+              <a:buNone/>
+            </a:pPr>
+            <a:r>
+              <a:rPr lang="en-US" sz="1250" dirty="0">
+                <a:solidFill>
+                  <a:srgbClr val="6B7B84"/>
+                </a:solidFill>
+                <a:latin typeface="Calibri" pitchFamily="34" charset="0"/>
+                <a:ea typeface="Calibri" pitchFamily="34" charset="-122"/>
+                <a:cs typeface="Calibri" pitchFamily="34" charset="-120"/>
+              </a:rPr>
+              <a:t>(non significatif)</a:t>
+            </a:r>
+            <a:endParaRPr lang="en-US" sz="1250" dirty="0"/>
+          </a:p>
+        </p:txBody>
+      </p:sp>
+      <p:sp>
+        <p:nvSpPr>
+          <p:cNvPr id="15" name="Text 13"/>
+          <p:cNvSpPr txBox="1"/>
+          <p:nvPr/>
+        </p:nvSpPr>
+        <p:spPr>
+          <a:xfrm>
+            <a:off x="548640" y="3611880"/>
+            <a:ext cx="10058400" cy="365760"/>
+          </a:xfrm>
+          <a:prstGeom prst="rect">
+            <a:avLst/>
+          </a:prstGeom>
+          <a:noFill/>
+          <a:ln/>
+        </p:spPr>
+        <p:txBody>
+          <a:bodyPr wrap="square" lIns="0" tIns="0" rIns="0" bIns="0" rtlCol="0" anchor="ctr"/>
+          <a:lstStyle/>
+          <a:p>
+            <a:pPr indent="0" marL="0">
+              <a:buNone/>
+            </a:pPr>
+            <a:r>
+              <a:rPr lang="en-US" sz="1800" b="1" dirty="0">
+                <a:solidFill>
+                  <a:srgbClr val="0B3C5D"/>
+                </a:solidFill>
+                <a:latin typeface="Cambria" pitchFamily="34" charset="0"/>
+                <a:ea typeface="Cambria" pitchFamily="34" charset="-122"/>
+                <a:cs typeface="Cambria" pitchFamily="34" charset="-120"/>
+              </a:rPr>
+              <a:t>Lecture</a:t>
+            </a:r>
+            <a:endParaRPr lang="en-US" sz="1800" dirty="0"/>
+          </a:p>
+        </p:txBody>
+      </p:sp>
+      <p:sp>
+        <p:nvSpPr>
+          <p:cNvPr id="16" name="Text 14"/>
+          <p:cNvSpPr txBox="1"/>
+          <p:nvPr/>
+        </p:nvSpPr>
+        <p:spPr>
+          <a:xfrm>
+            <a:off x="640080" y="4069080"/>
+            <a:ext cx="10972800" cy="2011680"/>
+          </a:xfrm>
+          <a:prstGeom prst="rect">
+            <a:avLst/>
+          </a:prstGeom>
+          <a:noFill/>
+          <a:ln/>
+        </p:spPr>
+        <p:txBody>
+          <a:bodyPr wrap="square" lIns="0" tIns="0" rIns="0" bIns="0" rtlCol="0" anchor="ctr"/>
+          <a:lstStyle/>
+          <a:p>
+            <a:pPr marL="228600" indent="-228600">
+              <a:spcAft>
+                <a:spcPts val="700"/>
+              </a:spcAft>
+              <a:buSzPct val="100000"/>
+              <a:buChar char="•"/>
+            </a:pPr>
+            <a:r>
+              <a:rPr lang="en-US" sz="1550" dirty="0">
+                <a:solidFill>
+                  <a:srgbClr val="16323D"/>
+                </a:solidFill>
+                <a:latin typeface="Calibri" pitchFamily="34" charset="0"/>
+                <a:ea typeface="Calibri" pitchFamily="34" charset="-122"/>
+                <a:cs typeface="Calibri" pitchFamily="34" charset="-120"/>
+              </a:rPr>
+              <a:t>Lu seul, « KD robuste vs scratch » ressemble à un succès net de la distillation</a:t>
+            </a:r>
+            <a:endParaRPr lang="en-US" sz="1550" dirty="0"/>
+          </a:p>
+          <a:p>
+            <a:pPr marL="228600" indent="-228600">
+              <a:spcAft>
+                <a:spcPts val="700"/>
+              </a:spcAft>
+              <a:buSzPct val="100000"/>
+              <a:buChar char="•"/>
+            </a:pPr>
+            <a:r>
+              <a:rPr lang="en-US" sz="1550" dirty="0">
+                <a:solidFill>
+                  <a:srgbClr val="16323D"/>
+                </a:solidFill>
+                <a:latin typeface="Calibri" pitchFamily="34" charset="0"/>
+                <a:ea typeface="Calibri" pitchFamily="34" charset="-122"/>
+                <a:cs typeface="Calibri" pitchFamily="34" charset="-120"/>
+              </a:rPr>
+              <a:t>Le témoin montre que tout le gain vient de l'entraînement sur nuages parcimonieux, pas des cibles douces du teacher</a:t>
+            </a:r>
+            <a:endParaRPr lang="en-US" sz="1550" dirty="0"/>
+          </a:p>
+          <a:p>
+            <a:pPr marL="228600" indent="-228600">
+              <a:spcAft>
+                <a:spcPts val="700"/>
+              </a:spcAft>
+              <a:buSzPct val="100000"/>
+              <a:buChar char="•"/>
+            </a:pPr>
+            <a:r>
+              <a:rPr lang="en-US" sz="1550" dirty="0">
+                <a:solidFill>
+                  <a:srgbClr val="16323D"/>
+                </a:solidFill>
+                <a:latin typeface="Calibri" pitchFamily="34" charset="0"/>
+                <a:ea typeface="Calibri" pitchFamily="34" charset="-122"/>
+                <a:cs typeface="Calibri" pitchFamily="34" charset="-120"/>
+              </a:rPr>
+              <a:t>Sans ce témoin, on aurait publié un faux positif</a:t>
+            </a:r>
+            <a:endParaRPr lang="en-US" sz="1550" dirty="0"/>
+          </a:p>
+        </p:txBody>
+      </p:sp>
+    </p:spTree>
+  </p:cSld>
+  <p:clrMapOvr>
+    <a:masterClrMapping/>
+  </p:clrMapOvr>
+</p:sld>
+</file>
+
+<file path=ppt/slides/slide11.xml><?xml version="1.0" encoding="utf-8"?>
+<p:sld xmlns:a="http://schemas.openxmlformats.org/drawingml/2006/main" xmlns:r="http://schemas.openxmlformats.org/officeDocument/2006/relationships" xmlns:p="http://schemas.openxmlformats.org/presentationml/2006/main">
+  <p:cSld name="Slide 11">
+    <p:bg>
+      <p:bgPr>
+        <a:solidFill>
+          <a:srgbClr val="FFFFFF"/>
+        </a:solidFill>
+      </p:bgPr>
+    </p:bg>
+    <p:spTree>
+      <p:nvGrpSpPr>
+        <p:cNvPr id="1" name=""/>
+        <p:cNvGrpSpPr/>
+        <p:nvPr/>
+      </p:nvGrpSpPr>
+      <p:grpSpPr>
+        <a:xfrm>
+          <a:off x="0" y="0"/>
+          <a:ext cx="0" cy="0"/>
+          <a:chOff x="0" y="0"/>
+          <a:chExt cx="0" cy="0"/>
+        </a:xfrm>
+      </p:grpSpPr>
+      <p:sp>
+        <p:nvSpPr>
+          <p:cNvPr id="2" name="Text 0"/>
+          <p:cNvSpPr txBox="1"/>
+          <p:nvPr/>
+        </p:nvSpPr>
+        <p:spPr>
+          <a:xfrm>
+            <a:off x="548640" y="384048"/>
+            <a:ext cx="11064240" cy="822960"/>
+          </a:xfrm>
+          <a:prstGeom prst="rect">
+            <a:avLst/>
+          </a:prstGeom>
+          <a:noFill/>
+          <a:ln/>
+        </p:spPr>
+        <p:txBody>
+          <a:bodyPr wrap="square" lIns="0" tIns="0" rIns="0" bIns="0" rtlCol="0" anchor="ctr"/>
+          <a:lstStyle/>
+          <a:p>
+            <a:pPr indent="0" marL="0">
+              <a:buNone/>
+            </a:pPr>
+            <a:r>
+              <a:rPr lang="en-US" sz="3200" b="1" dirty="0">
+                <a:solidFill>
+                  <a:srgbClr val="0B3C5D"/>
+                </a:solidFill>
+                <a:latin typeface="Cambria" pitchFamily="34" charset="0"/>
+                <a:ea typeface="Cambria" pitchFamily="34" charset="-122"/>
+                <a:cs typeface="Cambria" pitchFamily="34" charset="-120"/>
+              </a:rPr>
+              <a:t>Et avec un teacher robuste ?</a:t>
+            </a:r>
+            <a:endParaRPr lang="en-US" sz="3200" dirty="0"/>
+          </a:p>
+        </p:txBody>
+      </p:sp>
+      <p:graphicFrame>
+        <p:nvGraphicFramePr>
+          <p:cNvPr id="3" name="Chart 0" descr=""/>
+          <p:cNvGraphicFramePr/>
+          <p:nvPr/>
+        </p:nvGraphicFramePr>
+        <p:xfrm>
+          <a:off x="548640" y="1417320"/>
+          <a:ext cx="7406640" cy="4846320"/>
+        </p:xfrm>
+        <a:graphic xmlns:a="http://schemas.openxmlformats.org/drawingml/2006/main">
+          <a:graphicData uri="http://schemas.openxmlformats.org/drawingml/2006/chart">
+            <c:chart xmlns:c="http://schemas.openxmlformats.org/drawingml/2006/chart" r:id="rId1"/>
+          </a:graphicData>
+        </a:graphic>
+      </p:graphicFrame>
+      <p:sp>
+        <p:nvSpPr>
+          <p:cNvPr id="4" name="Shape 1"/>
+          <p:cNvSpPr/>
+          <p:nvPr/>
+        </p:nvSpPr>
+        <p:spPr>
+          <a:xfrm>
+            <a:off x="8183880" y="1554480"/>
+            <a:ext cx="3429000" cy="4572000"/>
+          </a:xfrm>
+          <a:prstGeom prst="roundRect">
+            <a:avLst>
+              <a:gd name="adj" fmla="val 2400"/>
+            </a:avLst>
+          </a:prstGeom>
+          <a:solidFill>
+            <a:srgbClr val="08293A"/>
+          </a:solidFill>
+          <a:ln/>
+          <a:effectLst>
+            <a:outerShdw sx="100000" sy="100000" kx="0" ky="0" algn="bl" rotWithShape="0" blurRad="88900" dist="25400" dir="5400000">
+              <a:srgbClr val="9AAEB5">
+                <a:alpha val="35000"/>
+              </a:srgbClr>
+            </a:outerShdw>
+          </a:effectLst>
+        </p:spPr>
+      </p:sp>
+      <p:sp>
+        <p:nvSpPr>
+          <p:cNvPr id="5" name="Text 2"/>
+          <p:cNvSpPr txBox="1"/>
+          <p:nvPr/>
+        </p:nvSpPr>
+        <p:spPr>
+          <a:xfrm>
+            <a:off x="8412480" y="1783080"/>
+            <a:ext cx="3017520" cy="365760"/>
+          </a:xfrm>
+          <a:prstGeom prst="rect">
+            <a:avLst/>
+          </a:prstGeom>
+          <a:noFill/>
+          <a:ln/>
+        </p:spPr>
+        <p:txBody>
+          <a:bodyPr wrap="square" lIns="0" tIns="0" rIns="0" bIns="0" rtlCol="0" anchor="ctr"/>
+          <a:lstStyle/>
+          <a:p>
+            <a:pPr indent="0" marL="0">
+              <a:buNone/>
+            </a:pPr>
+            <a:r>
+              <a:rPr lang="en-US" sz="1700" b="1" dirty="0">
+                <a:solidFill>
+                  <a:srgbClr val="2EC4B6"/>
+                </a:solidFill>
+                <a:latin typeface="Cambria" pitchFamily="34" charset="0"/>
+                <a:ea typeface="Cambria" pitchFamily="34" charset="-122"/>
+                <a:cs typeface="Cambria" pitchFamily="34" charset="-120"/>
+              </a:rPr>
+              <a:t>À retenir</a:t>
+            </a:r>
+            <a:endParaRPr lang="en-US" sz="1700" dirty="0"/>
+          </a:p>
+        </p:txBody>
+      </p:sp>
+      <p:sp>
+        <p:nvSpPr>
+          <p:cNvPr id="6" name="Text 3"/>
+          <p:cNvSpPr txBox="1"/>
+          <p:nvPr/>
+        </p:nvSpPr>
+        <p:spPr>
+          <a:xfrm>
+            <a:off x="8503920" y="2286000"/>
+            <a:ext cx="2971800" cy="3657600"/>
+          </a:xfrm>
+          <a:prstGeom prst="rect">
+            <a:avLst/>
+          </a:prstGeom>
+          <a:noFill/>
+          <a:ln/>
+        </p:spPr>
+        <p:txBody>
+          <a:bodyPr wrap="square" lIns="0" tIns="0" rIns="0" bIns="0" rtlCol="0" anchor="ctr"/>
+          <a:lstStyle/>
+          <a:p>
+            <a:pPr marL="203200" indent="-203200">
+              <a:lnSpc>
+                <a:spcPct val="105000"/>
+              </a:lnSpc>
+              <a:spcAft>
+                <a:spcPts val="1100"/>
+              </a:spcAft>
+              <a:buSzPct val="100000"/>
+              <a:buChar char="•"/>
+            </a:pPr>
+            <a:r>
+              <a:rPr lang="en-US" sz="1300" dirty="0">
+                <a:solidFill>
+                  <a:srgbClr val="E6F2F3"/>
+                </a:solidFill>
+                <a:latin typeface="Calibri" pitchFamily="34" charset="0"/>
+                <a:ea typeface="Calibri" pitchFamily="34" charset="-122"/>
+                <a:cs typeface="Calibri" pitchFamily="34" charset="-120"/>
+              </a:rPr>
+              <a:t>Le teacher entraîné avec sous-échantillonnage reste sous le student aug (0/5 seeds gagnées à 64 pts).</a:t>
+            </a:r>
+            <a:endParaRPr lang="en-US" sz="1300" dirty="0"/>
+          </a:p>
+          <a:p>
+            <a:pPr marL="203200" indent="-203200">
+              <a:lnSpc>
+                <a:spcPct val="105000"/>
+              </a:lnSpc>
+              <a:spcAft>
+                <a:spcPts val="1100"/>
+              </a:spcAft>
+              <a:buSzPct val="100000"/>
+              <a:buChar char="•"/>
+            </a:pPr>
+            <a:r>
+              <a:rPr lang="en-US" sz="1300" dirty="0">
+                <a:solidFill>
+                  <a:srgbClr val="E6F2F3"/>
+                </a:solidFill>
+                <a:latin typeface="Calibri" pitchFamily="34" charset="0"/>
+                <a:ea typeface="Calibri" pitchFamily="34" charset="-122"/>
+                <a:cs typeface="Calibri" pitchFamily="34" charset="-120"/>
+              </a:rPr>
+              <a:t>KD depuis lui − aug ≈ 0 (p ≥ 0.45).</a:t>
+            </a:r>
+            <a:endParaRPr lang="en-US" sz="1300" dirty="0"/>
+          </a:p>
+          <a:p>
+            <a:pPr marL="203200" indent="-203200">
+              <a:lnSpc>
+                <a:spcPct val="105000"/>
+              </a:lnSpc>
+              <a:spcAft>
+                <a:spcPts val="1100"/>
+              </a:spcAft>
+              <a:buSzPct val="100000"/>
+              <a:buChar char="•"/>
+            </a:pPr>
+            <a:r>
+              <a:rPr lang="en-US" sz="1300" dirty="0">
+                <a:solidFill>
+                  <a:srgbClr val="E6F2F3"/>
+                </a:solidFill>
+                <a:latin typeface="Calibri" pitchFamily="34" charset="0"/>
+                <a:ea typeface="Calibri" pitchFamily="34" charset="-122"/>
+                <a:cs typeface="Calibri" pitchFamily="34" charset="-120"/>
+              </a:rPr>
+              <a:t>Plus de poids au teacher (α = 0.3) dégrade le student (−0.022 à 16 pts, p = 0.02).</a:t>
+            </a:r>
+            <a:endParaRPr lang="en-US" sz="1300" dirty="0"/>
+          </a:p>
+        </p:txBody>
+      </p:sp>
+    </p:spTree>
+  </p:cSld>
+  <p:clrMapOvr>
+    <a:masterClrMapping/>
+  </p:clrMapOvr>
+</p:sld>
+</file>
+
+<file path=ppt/slides/slide12.xml><?xml version="1.0" encoding="utf-8"?>
+<p:sld xmlns:a="http://schemas.openxmlformats.org/drawingml/2006/main" xmlns:r="http://schemas.openxmlformats.org/officeDocument/2006/relationships" xmlns:p="http://schemas.openxmlformats.org/presentationml/2006/main">
+  <p:cSld name="Slide 12">
+    <p:bg>
+      <p:bgPr>
+        <a:solidFill>
+          <a:srgbClr val="FFFFFF"/>
+        </a:solidFill>
+      </p:bgPr>
+    </p:bg>
+    <p:spTree>
+      <p:nvGrpSpPr>
+        <p:cNvPr id="1" name=""/>
+        <p:cNvGrpSpPr/>
+        <p:nvPr/>
+      </p:nvGrpSpPr>
+      <p:grpSpPr>
+        <a:xfrm>
+          <a:off x="0" y="0"/>
+          <a:ext cx="0" cy="0"/>
+          <a:chOff x="0" y="0"/>
+          <a:chExt cx="0" cy="0"/>
+        </a:xfrm>
+      </p:grpSpPr>
+      <p:sp>
+        <p:nvSpPr>
+          <p:cNvPr id="2" name="Text 0"/>
+          <p:cNvSpPr txBox="1"/>
+          <p:nvPr/>
+        </p:nvSpPr>
+        <p:spPr>
+          <a:xfrm>
+            <a:off x="548640" y="384048"/>
+            <a:ext cx="11064240" cy="822960"/>
+          </a:xfrm>
+          <a:prstGeom prst="rect">
+            <a:avLst/>
+          </a:prstGeom>
+          <a:noFill/>
+          <a:ln/>
+        </p:spPr>
+        <p:txBody>
+          <a:bodyPr wrap="square" lIns="0" tIns="0" rIns="0" bIns="0" rtlCol="0" anchor="ctr"/>
+          <a:lstStyle/>
+          <a:p>
+            <a:pPr indent="0" marL="0">
+              <a:buNone/>
+            </a:pPr>
+            <a:r>
+              <a:rPr lang="en-US" sz="3200" b="1" dirty="0">
+                <a:solidFill>
+                  <a:srgbClr val="0B3C5D"/>
+                </a:solidFill>
+                <a:latin typeface="Cambria" pitchFamily="34" charset="0"/>
+                <a:ea typeface="Cambria" pitchFamily="34" charset="-122"/>
+                <a:cs typeface="Cambria" pitchFamily="34" charset="-120"/>
+              </a:rPr>
+              <a:t>Analyse critique</a:t>
+            </a:r>
+            <a:endParaRPr lang="en-US" sz="3200" dirty="0"/>
+          </a:p>
+        </p:txBody>
+      </p:sp>
+      <p:sp>
+        <p:nvSpPr>
+          <p:cNvPr id="3" name="Shape 1"/>
+          <p:cNvSpPr/>
+          <p:nvPr/>
+        </p:nvSpPr>
+        <p:spPr>
+          <a:xfrm>
+            <a:off x="548640" y="1508760"/>
+            <a:ext cx="11064240" cy="1325880"/>
+          </a:xfrm>
+          <a:prstGeom prst="roundRect">
+            <a:avLst>
+              <a:gd name="adj" fmla="val 6207"/>
+            </a:avLst>
+          </a:prstGeom>
+          <a:solidFill>
+            <a:srgbClr val="EAF3F3"/>
+          </a:solidFill>
+          <a:ln/>
+          <a:effectLst>
+            <a:outerShdw sx="100000" sy="100000" kx="0" ky="0" algn="bl" rotWithShape="0" blurRad="88900" dist="25400" dir="5400000">
+              <a:srgbClr val="9AAEB5">
+                <a:alpha val="35000"/>
+              </a:srgbClr>
+            </a:outerShdw>
+          </a:effectLst>
+        </p:spPr>
+      </p:sp>
+      <p:sp>
+        <p:nvSpPr>
+          <p:cNvPr id="4" name="Text 2"/>
+          <p:cNvSpPr txBox="1"/>
+          <p:nvPr/>
+        </p:nvSpPr>
+        <p:spPr>
+          <a:xfrm>
+            <a:off x="868680" y="1764792"/>
+            <a:ext cx="822960" cy="822960"/>
+          </a:xfrm>
+          <a:prstGeom prst="rect">
+            <a:avLst/>
+          </a:prstGeom>
+          <a:noFill/>
+          <a:ln/>
+        </p:spPr>
+        <p:txBody>
+          <a:bodyPr wrap="square" lIns="0" tIns="0" rIns="0" bIns="0" rtlCol="0" anchor="ctr"/>
+          <a:lstStyle/>
+          <a:p>
+            <a:pPr algn="ctr" indent="0" marL="0">
+              <a:buNone/>
+            </a:pPr>
+            <a:r>
+              <a:rPr lang="en-US" sz="3000" b="1" dirty="0">
+                <a:solidFill>
+                  <a:srgbClr val="E76F51"/>
+                </a:solidFill>
+                <a:latin typeface="Cambria" pitchFamily="34" charset="0"/>
+                <a:ea typeface="Cambria" pitchFamily="34" charset="-122"/>
+                <a:cs typeface="Cambria" pitchFamily="34" charset="-120"/>
+              </a:rPr>
+              <a:t>1</a:t>
+            </a:r>
+            <a:endParaRPr lang="en-US" sz="3000" dirty="0"/>
+          </a:p>
+        </p:txBody>
+      </p:sp>
+      <p:sp>
+        <p:nvSpPr>
+          <p:cNvPr id="5" name="Text 3"/>
+          <p:cNvSpPr txBox="1"/>
+          <p:nvPr/>
+        </p:nvSpPr>
+        <p:spPr>
+          <a:xfrm>
+            <a:off x="1828800" y="1664208"/>
+            <a:ext cx="9509760" cy="457200"/>
+          </a:xfrm>
+          <a:prstGeom prst="rect">
+            <a:avLst/>
+          </a:prstGeom>
+          <a:noFill/>
+          <a:ln/>
+        </p:spPr>
+        <p:txBody>
+          <a:bodyPr wrap="square" lIns="0" tIns="0" rIns="0" bIns="0" rtlCol="0" anchor="ctr"/>
+          <a:lstStyle/>
+          <a:p>
+            <a:pPr indent="0" marL="0">
+              <a:buNone/>
+            </a:pPr>
+            <a:r>
+              <a:rPr lang="en-US" sz="1800" b="1" dirty="0">
+                <a:solidFill>
+                  <a:srgbClr val="16323D"/>
+                </a:solidFill>
+                <a:latin typeface="Cambria" pitchFamily="34" charset="0"/>
+                <a:ea typeface="Cambria" pitchFamily="34" charset="-122"/>
+                <a:cs typeface="Cambria" pitchFamily="34" charset="-120"/>
+              </a:rPr>
+              <a:t>H1 est réfutée</a:t>
+            </a:r>
+            <a:endParaRPr lang="en-US" sz="1800" dirty="0"/>
+          </a:p>
+        </p:txBody>
+      </p:sp>
+      <p:sp>
+        <p:nvSpPr>
+          <p:cNvPr id="6" name="Text 4"/>
+          <p:cNvSpPr txBox="1"/>
+          <p:nvPr/>
+        </p:nvSpPr>
+        <p:spPr>
+          <a:xfrm>
+            <a:off x="1828800" y="2103120"/>
+            <a:ext cx="9601200" cy="658368"/>
+          </a:xfrm>
+          <a:prstGeom prst="rect">
+            <a:avLst/>
+          </a:prstGeom>
+          <a:noFill/>
+          <a:ln/>
+        </p:spPr>
+        <p:txBody>
+          <a:bodyPr wrap="square" lIns="0" tIns="0" rIns="0" bIns="0" rtlCol="0" anchor="ctr"/>
+          <a:lstStyle/>
+          <a:p>
+            <a:pPr indent="0" marL="0">
+              <a:lnSpc>
+                <a:spcPct val="103000"/>
+              </a:lnSpc>
+              <a:buNone/>
+            </a:pPr>
+            <a:r>
+              <a:rPr lang="en-US" sz="1400" dirty="0">
+                <a:solidFill>
+                  <a:srgbClr val="33474F"/>
+                </a:solidFill>
+                <a:latin typeface="Calibri" pitchFamily="34" charset="0"/>
+                <a:ea typeface="Calibri" pitchFamily="34" charset="-122"/>
+                <a:cs typeface="Calibri" pitchFamily="34" charset="-120"/>
+              </a:rPr>
+              <a:t>Aucune variante de KD (logits, features, teacher dense ou robuste, deux α) ne bat le simple sous-échantillonnage à l'entraînement.</a:t>
+            </a:r>
+            <a:endParaRPr lang="en-US" sz="1400" dirty="0"/>
+          </a:p>
+        </p:txBody>
+      </p:sp>
+      <p:sp>
+        <p:nvSpPr>
+          <p:cNvPr id="7" name="Shape 5"/>
+          <p:cNvSpPr/>
+          <p:nvPr/>
+        </p:nvSpPr>
+        <p:spPr>
+          <a:xfrm>
+            <a:off x="548640" y="2990088"/>
+            <a:ext cx="11064240" cy="1325880"/>
+          </a:xfrm>
+          <a:prstGeom prst="roundRect">
+            <a:avLst>
+              <a:gd name="adj" fmla="val 6207"/>
+            </a:avLst>
+          </a:prstGeom>
+          <a:solidFill>
+            <a:srgbClr val="F2F6F7"/>
+          </a:solidFill>
+          <a:ln/>
+          <a:effectLst>
+            <a:outerShdw sx="100000" sy="100000" kx="0" ky="0" algn="bl" rotWithShape="0" blurRad="88900" dist="25400" dir="5400000">
+              <a:srgbClr val="9AAEB5">
+                <a:alpha val="35000"/>
+              </a:srgbClr>
+            </a:outerShdw>
+          </a:effectLst>
+        </p:spPr>
+      </p:sp>
+      <p:sp>
+        <p:nvSpPr>
+          <p:cNvPr id="8" name="Text 6"/>
+          <p:cNvSpPr txBox="1"/>
+          <p:nvPr/>
+        </p:nvSpPr>
+        <p:spPr>
+          <a:xfrm>
+            <a:off x="868680" y="3246120"/>
+            <a:ext cx="822960" cy="822960"/>
+          </a:xfrm>
+          <a:prstGeom prst="rect">
+            <a:avLst/>
+          </a:prstGeom>
+          <a:noFill/>
+          <a:ln/>
+        </p:spPr>
+        <p:txBody>
+          <a:bodyPr wrap="square" lIns="0" tIns="0" rIns="0" bIns="0" rtlCol="0" anchor="ctr"/>
+          <a:lstStyle/>
+          <a:p>
+            <a:pPr algn="ctr" indent="0" marL="0">
+              <a:buNone/>
+            </a:pPr>
+            <a:r>
+              <a:rPr lang="en-US" sz="3000" b="1" dirty="0">
+                <a:solidFill>
+                  <a:srgbClr val="1C7293"/>
+                </a:solidFill>
+                <a:latin typeface="Cambria" pitchFamily="34" charset="0"/>
+                <a:ea typeface="Cambria" pitchFamily="34" charset="-122"/>
+                <a:cs typeface="Cambria" pitchFamily="34" charset="-120"/>
+              </a:rPr>
+              <a:t>2</a:t>
+            </a:r>
+            <a:endParaRPr lang="en-US" sz="3000" dirty="0"/>
+          </a:p>
+        </p:txBody>
+      </p:sp>
+      <p:sp>
+        <p:nvSpPr>
+          <p:cNvPr id="9" name="Text 7"/>
+          <p:cNvSpPr txBox="1"/>
+          <p:nvPr/>
+        </p:nvSpPr>
+        <p:spPr>
+          <a:xfrm>
+            <a:off x="1828800" y="3145536"/>
+            <a:ext cx="9509760" cy="457200"/>
+          </a:xfrm>
+          <a:prstGeom prst="rect">
+            <a:avLst/>
+          </a:prstGeom>
+          <a:noFill/>
+          <a:ln/>
+        </p:spPr>
+        <p:txBody>
+          <a:bodyPr wrap="square" lIns="0" tIns="0" rIns="0" bIns="0" rtlCol="0" anchor="ctr"/>
+          <a:lstStyle/>
+          <a:p>
+            <a:pPr indent="0" marL="0">
+              <a:buNone/>
+            </a:pPr>
+            <a:r>
+              <a:rPr lang="en-US" sz="1800" b="1" dirty="0">
+                <a:solidFill>
+                  <a:srgbClr val="16323D"/>
+                </a:solidFill>
+                <a:latin typeface="Cambria" pitchFamily="34" charset="0"/>
+                <a:ea typeface="Cambria" pitchFamily="34" charset="-122"/>
+                <a:cs typeface="Cambria" pitchFamily="34" charset="-120"/>
+              </a:rPr>
+              <a:t>Pourquoi : le teacher n'en sait jamais plus</a:t>
+            </a:r>
+            <a:endParaRPr lang="en-US" sz="1800" dirty="0"/>
+          </a:p>
+        </p:txBody>
+      </p:sp>
+      <p:sp>
+        <p:nvSpPr>
+          <p:cNvPr id="10" name="Text 8"/>
+          <p:cNvSpPr txBox="1"/>
+          <p:nvPr/>
+        </p:nvSpPr>
+        <p:spPr>
+          <a:xfrm>
+            <a:off x="1828800" y="3584448"/>
+            <a:ext cx="9601200" cy="658368"/>
+          </a:xfrm>
+          <a:prstGeom prst="rect">
+            <a:avLst/>
+          </a:prstGeom>
+          <a:noFill/>
+          <a:ln/>
+        </p:spPr>
+        <p:txBody>
+          <a:bodyPr wrap="square" lIns="0" tIns="0" rIns="0" bIns="0" rtlCol="0" anchor="ctr"/>
+          <a:lstStyle/>
+          <a:p>
+            <a:pPr indent="0" marL="0">
+              <a:lnSpc>
+                <a:spcPct val="103000"/>
+              </a:lnSpc>
+              <a:buNone/>
+            </a:pPr>
+            <a:r>
+              <a:rPr lang="en-US" sz="1400" dirty="0">
+                <a:solidFill>
+                  <a:srgbClr val="33474F"/>
+                </a:solidFill>
+                <a:latin typeface="Calibri" pitchFamily="34" charset="0"/>
+                <a:ea typeface="Calibri" pitchFamily="34" charset="-122"/>
+                <a:cs typeface="Calibri" pitchFamily="34" charset="-120"/>
+              </a:rPr>
+              <a:t>Petit dataset (1158 nodules) → la capacité du teacher sur-apprend ; il n'a rien à transférer au-delà de ce que le student apprend seul.</a:t>
+            </a:r>
+            <a:endParaRPr lang="en-US" sz="1400" dirty="0"/>
+          </a:p>
+        </p:txBody>
+      </p:sp>
+      <p:sp>
+        <p:nvSpPr>
+          <p:cNvPr id="11" name="Shape 9"/>
+          <p:cNvSpPr/>
+          <p:nvPr/>
+        </p:nvSpPr>
+        <p:spPr>
+          <a:xfrm>
+            <a:off x="548640" y="4471416"/>
+            <a:ext cx="11064240" cy="1325880"/>
+          </a:xfrm>
+          <a:prstGeom prst="roundRect">
+            <a:avLst>
+              <a:gd name="adj" fmla="val 6207"/>
+            </a:avLst>
+          </a:prstGeom>
+          <a:solidFill>
+            <a:srgbClr val="EAF3F3"/>
+          </a:solidFill>
+          <a:ln/>
+          <a:effectLst>
+            <a:outerShdw sx="100000" sy="100000" kx="0" ky="0" algn="bl" rotWithShape="0" blurRad="88900" dist="25400" dir="5400000">
+              <a:srgbClr val="9AAEB5">
+                <a:alpha val="35000"/>
+              </a:srgbClr>
+            </a:outerShdw>
+          </a:effectLst>
+        </p:spPr>
+      </p:sp>
+      <p:sp>
+        <p:nvSpPr>
+          <p:cNvPr id="12" name="Text 10"/>
+          <p:cNvSpPr txBox="1"/>
+          <p:nvPr/>
+        </p:nvSpPr>
+        <p:spPr>
+          <a:xfrm>
+            <a:off x="868680" y="4727448"/>
+            <a:ext cx="822960" cy="822960"/>
+          </a:xfrm>
+          <a:prstGeom prst="rect">
+            <a:avLst/>
+          </a:prstGeom>
+          <a:noFill/>
+          <a:ln/>
+        </p:spPr>
+        <p:txBody>
+          <a:bodyPr wrap="square" lIns="0" tIns="0" rIns="0" bIns="0" rtlCol="0" anchor="ctr"/>
+          <a:lstStyle/>
+          <a:p>
+            <a:pPr algn="ctr" indent="0" marL="0">
+              <a:buNone/>
+            </a:pPr>
+            <a:r>
+              <a:rPr lang="en-US" sz="3000" b="1" dirty="0">
+                <a:solidFill>
+                  <a:srgbClr val="0B3C5D"/>
+                </a:solidFill>
+                <a:latin typeface="Cambria" pitchFamily="34" charset="0"/>
+                <a:ea typeface="Cambria" pitchFamily="34" charset="-122"/>
+                <a:cs typeface="Cambria" pitchFamily="34" charset="-120"/>
+              </a:rPr>
+              <a:t>3</a:t>
+            </a:r>
+            <a:endParaRPr lang="en-US" sz="3000" dirty="0"/>
+          </a:p>
+        </p:txBody>
+      </p:sp>
+      <p:sp>
+        <p:nvSpPr>
+          <p:cNvPr id="13" name="Text 11"/>
+          <p:cNvSpPr txBox="1"/>
+          <p:nvPr/>
+        </p:nvSpPr>
+        <p:spPr>
+          <a:xfrm>
+            <a:off x="1828800" y="4626864"/>
+            <a:ext cx="9509760" cy="457200"/>
+          </a:xfrm>
+          <a:prstGeom prst="rect">
+            <a:avLst/>
+          </a:prstGeom>
+          <a:noFill/>
+          <a:ln/>
+        </p:spPr>
+        <p:txBody>
+          <a:bodyPr wrap="square" lIns="0" tIns="0" rIns="0" bIns="0" rtlCol="0" anchor="ctr"/>
+          <a:lstStyle/>
+          <a:p>
+            <a:pPr indent="0" marL="0">
+              <a:buNone/>
+            </a:pPr>
+            <a:r>
+              <a:rPr lang="en-US" sz="1800" b="1" dirty="0">
+                <a:solidFill>
+                  <a:srgbClr val="16323D"/>
+                </a:solidFill>
+                <a:latin typeface="Cambria" pitchFamily="34" charset="0"/>
+                <a:ea typeface="Cambria" pitchFamily="34" charset="-122"/>
+                <a:cs typeface="Cambria" pitchFamily="34" charset="-120"/>
+              </a:rPr>
+              <a:t>Le seuil dépend de la densité</a:t>
+            </a:r>
+            <a:endParaRPr lang="en-US" sz="1800" dirty="0"/>
+          </a:p>
+        </p:txBody>
+      </p:sp>
+      <p:sp>
+        <p:nvSpPr>
+          <p:cNvPr id="14" name="Text 12"/>
+          <p:cNvSpPr txBox="1"/>
+          <p:nvPr/>
+        </p:nvSpPr>
+        <p:spPr>
+          <a:xfrm>
+            <a:off x="1828800" y="5065776"/>
+            <a:ext cx="9601200" cy="658368"/>
+          </a:xfrm>
+          <a:prstGeom prst="rect">
+            <a:avLst/>
+          </a:prstGeom>
+          <a:noFill/>
+          <a:ln/>
+        </p:spPr>
+        <p:txBody>
+          <a:bodyPr wrap="square" lIns="0" tIns="0" rIns="0" bIns="0" rtlCol="0" anchor="ctr"/>
+          <a:lstStyle/>
+          <a:p>
+            <a:pPr indent="0" marL="0">
+              <a:lnSpc>
+                <a:spcPct val="103000"/>
+              </a:lnSpc>
+              <a:buNone/>
+            </a:pPr>
+            <a:r>
+              <a:rPr lang="en-US" sz="1400" dirty="0">
+                <a:solidFill>
+                  <a:srgbClr val="33474F"/>
+                </a:solidFill>
+                <a:latin typeface="Calibri" pitchFamily="34" charset="0"/>
+                <a:ea typeface="Calibri" pitchFamily="34" charset="-122"/>
+                <a:cs typeface="Calibri" pitchFamily="34" charset="-120"/>
+              </a:rPr>
+              <a:t>L'AUC survit, mais la balanced accuracy tombe à 0.5 en basse densité (tout « bénin ») pour les modèles denses, et inversement → calibrer le seuil par N.</a:t>
+            </a:r>
+            <a:endParaRPr lang="en-US" sz="1400" dirty="0"/>
+          </a:p>
+        </p:txBody>
+      </p:sp>
+    </p:spTree>
+  </p:cSld>
+  <p:clrMapOvr>
+    <a:masterClrMapping/>
+  </p:clrMapOvr>
+</p:sld>
+</file>
+
+<file path=ppt/slides/slide13.xml><?xml version="1.0" encoding="utf-8"?>
+<p:sld xmlns:a="http://schemas.openxmlformats.org/drawingml/2006/main" xmlns:r="http://schemas.openxmlformats.org/officeDocument/2006/relationships" xmlns:p="http://schemas.openxmlformats.org/presentationml/2006/main">
+  <p:cSld name="Slide 13">
+    <p:bg>
+      <p:bgPr>
+        <a:solidFill>
+          <a:srgbClr val="FFFFFF"/>
+        </a:solidFill>
+      </p:bgPr>
+    </p:bg>
+    <p:spTree>
+      <p:nvGrpSpPr>
+        <p:cNvPr id="1" name=""/>
+        <p:cNvGrpSpPr/>
+        <p:nvPr/>
+      </p:nvGrpSpPr>
+      <p:grpSpPr>
+        <a:xfrm>
+          <a:off x="0" y="0"/>
+          <a:ext cx="0" cy="0"/>
+          <a:chOff x="0" y="0"/>
+          <a:chExt cx="0" cy="0"/>
+        </a:xfrm>
+      </p:grpSpPr>
+      <p:sp>
+        <p:nvSpPr>
+          <p:cNvPr id="2" name="Text 0"/>
+          <p:cNvSpPr txBox="1"/>
+          <p:nvPr/>
+        </p:nvSpPr>
+        <p:spPr>
+          <a:xfrm>
+            <a:off x="548640" y="384048"/>
+            <a:ext cx="11064240" cy="822960"/>
+          </a:xfrm>
+          <a:prstGeom prst="rect">
+            <a:avLst/>
+          </a:prstGeom>
+          <a:noFill/>
+          <a:ln/>
+        </p:spPr>
+        <p:txBody>
+          <a:bodyPr wrap="square" lIns="0" tIns="0" rIns="0" bIns="0" rtlCol="0" anchor="ctr"/>
+          <a:lstStyle/>
+          <a:p>
+            <a:pPr indent="0" marL="0">
+              <a:buNone/>
+            </a:pPr>
+            <a:r>
+              <a:rPr lang="en-US" sz="3200" b="1" dirty="0">
+                <a:solidFill>
+                  <a:srgbClr val="0B3C5D"/>
+                </a:solidFill>
+                <a:latin typeface="Cambria" pitchFamily="34" charset="0"/>
+                <a:ea typeface="Cambria" pitchFamily="34" charset="-122"/>
+                <a:cs typeface="Cambria" pitchFamily="34" charset="-120"/>
+              </a:rPr>
+              <a:t>Limites &amp; perspectives</a:t>
+            </a:r>
+            <a:endParaRPr lang="en-US" sz="3200" dirty="0"/>
+          </a:p>
+        </p:txBody>
+      </p:sp>
+      <p:sp>
+        <p:nvSpPr>
+          <p:cNvPr id="3" name="Shape 1"/>
+          <p:cNvSpPr/>
+          <p:nvPr/>
+        </p:nvSpPr>
+        <p:spPr>
+          <a:xfrm>
+            <a:off x="548640" y="1554480"/>
+            <a:ext cx="5394960" cy="1874520"/>
+          </a:xfrm>
+          <a:prstGeom prst="roundRect">
+            <a:avLst>
+              <a:gd name="adj" fmla="val 4390"/>
+            </a:avLst>
+          </a:prstGeom>
+          <a:solidFill>
+            <a:srgbClr val="F2F6F7"/>
+          </a:solidFill>
+          <a:ln/>
+          <a:effectLst>
+            <a:outerShdw sx="100000" sy="100000" kx="0" ky="0" algn="bl" rotWithShape="0" blurRad="88900" dist="25400" dir="5400000">
+              <a:srgbClr val="9AAEB5">
+                <a:alpha val="35000"/>
+              </a:srgbClr>
+            </a:outerShdw>
+          </a:effectLst>
+        </p:spPr>
+      </p:sp>
+      <p:sp>
+        <p:nvSpPr>
+          <p:cNvPr id="4" name="Shape 2"/>
+          <p:cNvSpPr/>
+          <p:nvPr/>
+        </p:nvSpPr>
+        <p:spPr>
+          <a:xfrm>
+            <a:off x="822960" y="1828800"/>
+            <a:ext cx="566928" cy="566928"/>
+          </a:xfrm>
+          <a:prstGeom prst="ellipse">
+            <a:avLst/>
+          </a:prstGeom>
+          <a:solidFill>
+            <a:srgbClr val="E76F51"/>
+          </a:solidFill>
+          <a:ln/>
+        </p:spPr>
+      </p:sp>
+      <p:sp>
+        <p:nvSpPr>
+          <p:cNvPr id="5" name="Text 3"/>
+          <p:cNvSpPr txBox="1"/>
+          <p:nvPr/>
+        </p:nvSpPr>
+        <p:spPr>
+          <a:xfrm>
+            <a:off x="822960" y="1828800"/>
+            <a:ext cx="566928" cy="566928"/>
+          </a:xfrm>
+          <a:prstGeom prst="rect">
+            <a:avLst/>
+          </a:prstGeom>
+          <a:noFill/>
+          <a:ln/>
+        </p:spPr>
+        <p:txBody>
+          <a:bodyPr wrap="square" lIns="0" tIns="0" rIns="0" bIns="0" rtlCol="0" anchor="ctr"/>
+          <a:lstStyle/>
+          <a:p>
+            <a:pPr algn="ctr" indent="0" marL="0">
+              <a:buNone/>
+            </a:pPr>
+            <a:r>
+              <a:rPr lang="en-US" sz="1800" b="1" dirty="0">
+                <a:solidFill>
+                  <a:srgbClr val="FFFFFF"/>
+                </a:solidFill>
+                <a:latin typeface="Cambria" pitchFamily="34" charset="0"/>
+                <a:ea typeface="Cambria" pitchFamily="34" charset="-122"/>
+                <a:cs typeface="Cambria" pitchFamily="34" charset="-120"/>
+              </a:rPr>
+              <a:t>1</a:t>
+            </a:r>
+            <a:endParaRPr lang="en-US" sz="1800" dirty="0"/>
+          </a:p>
+        </p:txBody>
+      </p:sp>
+      <p:sp>
+        <p:nvSpPr>
+          <p:cNvPr id="6" name="Text 4"/>
+          <p:cNvSpPr txBox="1"/>
+          <p:nvPr/>
+        </p:nvSpPr>
+        <p:spPr>
+          <a:xfrm>
+            <a:off x="1554480" y="1847088"/>
+            <a:ext cx="4206240" cy="548640"/>
+          </a:xfrm>
+          <a:prstGeom prst="rect">
+            <a:avLst/>
+          </a:prstGeom>
+          <a:noFill/>
+          <a:ln/>
+        </p:spPr>
+        <p:txBody>
+          <a:bodyPr wrap="square" lIns="0" tIns="0" rIns="0" bIns="0" rtlCol="0" anchor="ctr"/>
+          <a:lstStyle/>
+          <a:p>
+            <a:pPr indent="0" marL="0">
+              <a:buNone/>
+            </a:pPr>
+            <a:r>
+              <a:rPr lang="en-US" sz="1650" b="1" dirty="0">
+                <a:solidFill>
+                  <a:srgbClr val="0B3C5D"/>
+                </a:solidFill>
+                <a:latin typeface="Cambria" pitchFamily="34" charset="0"/>
+                <a:ea typeface="Cambria" pitchFamily="34" charset="-122"/>
+                <a:cs typeface="Cambria" pitchFamily="34" charset="-120"/>
+              </a:rPr>
+              <a:t>Taille du nodule effacée</a:t>
+            </a:r>
+            <a:endParaRPr lang="en-US" sz="1650" dirty="0"/>
+          </a:p>
+        </p:txBody>
+      </p:sp>
+      <p:sp>
+        <p:nvSpPr>
+          <p:cNvPr id="7" name="Text 5"/>
+          <p:cNvSpPr txBox="1"/>
+          <p:nvPr/>
+        </p:nvSpPr>
+        <p:spPr>
+          <a:xfrm>
+            <a:off x="868680" y="2514600"/>
+            <a:ext cx="4754880" cy="822960"/>
+          </a:xfrm>
+          <a:prstGeom prst="rect">
+            <a:avLst/>
+          </a:prstGeom>
+          <a:noFill/>
+          <a:ln/>
+        </p:spPr>
+        <p:txBody>
+          <a:bodyPr wrap="square" lIns="0" tIns="0" rIns="0" bIns="0" rtlCol="0" anchor="ctr"/>
+          <a:lstStyle/>
+          <a:p>
+            <a:pPr indent="0" marL="0">
+              <a:lnSpc>
+                <a:spcPct val="105000"/>
+              </a:lnSpc>
+              <a:buNone/>
+            </a:pPr>
+            <a:r>
+              <a:rPr lang="en-US" sz="1350" dirty="0">
+                <a:solidFill>
+                  <a:srgbClr val="16323D"/>
+                </a:solidFill>
+                <a:latin typeface="Calibri" pitchFamily="34" charset="0"/>
+                <a:ea typeface="Calibri" pitchFamily="34" charset="-122"/>
+                <a:cs typeface="Calibri" pitchFamily="34" charset="-120"/>
+              </a:rPr>
+              <a:t>la normalisation à la boule unité supprime la taille (indice clé de malignité) → AUC plafonnée ~0.8</a:t>
+            </a:r>
+            <a:endParaRPr lang="en-US" sz="1350" dirty="0"/>
+          </a:p>
+        </p:txBody>
+      </p:sp>
+      <p:sp>
+        <p:nvSpPr>
+          <p:cNvPr id="8" name="Shape 6"/>
+          <p:cNvSpPr/>
+          <p:nvPr/>
+        </p:nvSpPr>
+        <p:spPr>
+          <a:xfrm>
+            <a:off x="6217920" y="1554480"/>
+            <a:ext cx="5394960" cy="1874520"/>
+          </a:xfrm>
+          <a:prstGeom prst="roundRect">
+            <a:avLst>
+              <a:gd name="adj" fmla="val 4390"/>
+            </a:avLst>
+          </a:prstGeom>
+          <a:solidFill>
+            <a:srgbClr val="F2F6F7"/>
+          </a:solidFill>
+          <a:ln/>
+          <a:effectLst>
+            <a:outerShdw sx="100000" sy="100000" kx="0" ky="0" algn="bl" rotWithShape="0" blurRad="88900" dist="25400" dir="5400000">
+              <a:srgbClr val="9AAEB5">
+                <a:alpha val="35000"/>
+              </a:srgbClr>
+            </a:outerShdw>
+          </a:effectLst>
+        </p:spPr>
+      </p:sp>
+      <p:sp>
+        <p:nvSpPr>
+          <p:cNvPr id="9" name="Shape 7"/>
+          <p:cNvSpPr/>
+          <p:nvPr/>
+        </p:nvSpPr>
+        <p:spPr>
+          <a:xfrm>
+            <a:off x="6492240" y="1828800"/>
+            <a:ext cx="566928" cy="566928"/>
+          </a:xfrm>
+          <a:prstGeom prst="ellipse">
+            <a:avLst/>
+          </a:prstGeom>
+          <a:solidFill>
+            <a:srgbClr val="E76F51"/>
+          </a:solidFill>
+          <a:ln/>
+        </p:spPr>
+      </p:sp>
+      <p:sp>
+        <p:nvSpPr>
+          <p:cNvPr id="10" name="Text 8"/>
+          <p:cNvSpPr txBox="1"/>
+          <p:nvPr/>
+        </p:nvSpPr>
+        <p:spPr>
+          <a:xfrm>
+            <a:off x="6492240" y="1828800"/>
+            <a:ext cx="566928" cy="566928"/>
+          </a:xfrm>
+          <a:prstGeom prst="rect">
+            <a:avLst/>
+          </a:prstGeom>
+          <a:noFill/>
+          <a:ln/>
+        </p:spPr>
+        <p:txBody>
+          <a:bodyPr wrap="square" lIns="0" tIns="0" rIns="0" bIns="0" rtlCol="0" anchor="ctr"/>
+          <a:lstStyle/>
+          <a:p>
+            <a:pPr algn="ctr" indent="0" marL="0">
+              <a:buNone/>
+            </a:pPr>
+            <a:r>
+              <a:rPr lang="en-US" sz="1800" b="1" dirty="0">
+                <a:solidFill>
+                  <a:srgbClr val="FFFFFF"/>
+                </a:solidFill>
+                <a:latin typeface="Cambria" pitchFamily="34" charset="0"/>
+                <a:ea typeface="Cambria" pitchFamily="34" charset="-122"/>
+                <a:cs typeface="Cambria" pitchFamily="34" charset="-120"/>
+              </a:rPr>
+              <a:t>2</a:t>
+            </a:r>
+            <a:endParaRPr lang="en-US" sz="1800" dirty="0"/>
+          </a:p>
+        </p:txBody>
+      </p:sp>
+      <p:sp>
+        <p:nvSpPr>
+          <p:cNvPr id="11" name="Text 9"/>
+          <p:cNvSpPr txBox="1"/>
+          <p:nvPr/>
+        </p:nvSpPr>
+        <p:spPr>
+          <a:xfrm>
+            <a:off x="7223760" y="1847088"/>
+            <a:ext cx="4206240" cy="548640"/>
+          </a:xfrm>
+          <a:prstGeom prst="rect">
+            <a:avLst/>
+          </a:prstGeom>
+          <a:noFill/>
+          <a:ln/>
+        </p:spPr>
+        <p:txBody>
+          <a:bodyPr wrap="square" lIns="0" tIns="0" rIns="0" bIns="0" rtlCol="0" anchor="ctr"/>
+          <a:lstStyle/>
+          <a:p>
+            <a:pPr indent="0" marL="0">
+              <a:buNone/>
+            </a:pPr>
+            <a:r>
+              <a:rPr lang="en-US" sz="1650" b="1" dirty="0">
+                <a:solidFill>
+                  <a:srgbClr val="0B3C5D"/>
+                </a:solidFill>
+                <a:latin typeface="Cambria" pitchFamily="34" charset="0"/>
+                <a:ea typeface="Cambria" pitchFamily="34" charset="-122"/>
+                <a:cs typeface="Cambria" pitchFamily="34" charset="-120"/>
+              </a:rPr>
+              <a:t>Puissance statistique</a:t>
+            </a:r>
+            <a:endParaRPr lang="en-US" sz="1650" dirty="0"/>
+          </a:p>
+        </p:txBody>
+      </p:sp>
+      <p:sp>
+        <p:nvSpPr>
+          <p:cNvPr id="12" name="Text 10"/>
+          <p:cNvSpPr txBox="1"/>
+          <p:nvPr/>
+        </p:nvSpPr>
+        <p:spPr>
+          <a:xfrm>
+            <a:off x="6537960" y="2514600"/>
+            <a:ext cx="4754880" cy="822960"/>
+          </a:xfrm>
+          <a:prstGeom prst="rect">
+            <a:avLst/>
+          </a:prstGeom>
+          <a:noFill/>
+          <a:ln/>
+        </p:spPr>
+        <p:txBody>
+          <a:bodyPr wrap="square" lIns="0" tIns="0" rIns="0" bIns="0" rtlCol="0" anchor="ctr"/>
+          <a:lstStyle/>
+          <a:p>
+            <a:pPr indent="0" marL="0">
+              <a:lnSpc>
+                <a:spcPct val="105000"/>
+              </a:lnSpc>
+              <a:buNone/>
+            </a:pPr>
+            <a:r>
+              <a:rPr lang="en-US" sz="1350" dirty="0">
+                <a:solidFill>
+                  <a:srgbClr val="16323D"/>
+                </a:solidFill>
+                <a:latin typeface="Calibri" pitchFamily="34" charset="0"/>
+                <a:ea typeface="Calibri" pitchFamily="34" charset="-122"/>
+                <a:cs typeface="Calibri" pitchFamily="34" charset="-120"/>
+              </a:rPr>
+              <a:t>310 nodules test, 5 seeds : un effet KD de ±0.01 resterait indétectable</a:t>
+            </a:r>
+            <a:endParaRPr lang="en-US" sz="1350" dirty="0"/>
+          </a:p>
+        </p:txBody>
+      </p:sp>
+      <p:sp>
+        <p:nvSpPr>
+          <p:cNvPr id="13" name="Shape 11"/>
+          <p:cNvSpPr/>
+          <p:nvPr/>
+        </p:nvSpPr>
+        <p:spPr>
+          <a:xfrm>
+            <a:off x="548640" y="3703320"/>
+            <a:ext cx="5394960" cy="1874520"/>
+          </a:xfrm>
+          <a:prstGeom prst="roundRect">
+            <a:avLst>
+              <a:gd name="adj" fmla="val 4390"/>
+            </a:avLst>
+          </a:prstGeom>
+          <a:solidFill>
+            <a:srgbClr val="EAF3F3"/>
+          </a:solidFill>
+          <a:ln/>
+          <a:effectLst>
+            <a:outerShdw sx="100000" sy="100000" kx="0" ky="0" algn="bl" rotWithShape="0" blurRad="88900" dist="25400" dir="5400000">
+              <a:srgbClr val="9AAEB5">
+                <a:alpha val="35000"/>
+              </a:srgbClr>
+            </a:outerShdw>
+          </a:effectLst>
+        </p:spPr>
+      </p:sp>
+      <p:sp>
+        <p:nvSpPr>
+          <p:cNvPr id="14" name="Shape 12"/>
+          <p:cNvSpPr/>
+          <p:nvPr/>
+        </p:nvSpPr>
+        <p:spPr>
+          <a:xfrm>
+            <a:off x="822960" y="3977640"/>
+            <a:ext cx="566928" cy="566928"/>
+          </a:xfrm>
+          <a:prstGeom prst="ellipse">
+            <a:avLst/>
+          </a:prstGeom>
+          <a:solidFill>
+            <a:srgbClr val="1C7293"/>
+          </a:solidFill>
+          <a:ln/>
+        </p:spPr>
+      </p:sp>
+      <p:sp>
+        <p:nvSpPr>
+          <p:cNvPr id="15" name="Text 13"/>
+          <p:cNvSpPr txBox="1"/>
+          <p:nvPr/>
+        </p:nvSpPr>
+        <p:spPr>
+          <a:xfrm>
+            <a:off x="822960" y="3977640"/>
+            <a:ext cx="566928" cy="566928"/>
+          </a:xfrm>
+          <a:prstGeom prst="rect">
+            <a:avLst/>
+          </a:prstGeom>
+          <a:noFill/>
+          <a:ln/>
+        </p:spPr>
+        <p:txBody>
+          <a:bodyPr wrap="square" lIns="0" tIns="0" rIns="0" bIns="0" rtlCol="0" anchor="ctr"/>
+          <a:lstStyle/>
+          <a:p>
+            <a:pPr algn="ctr" indent="0" marL="0">
+              <a:buNone/>
+            </a:pPr>
+            <a:r>
+              <a:rPr lang="en-US" sz="1800" b="1" dirty="0">
+                <a:solidFill>
+                  <a:srgbClr val="FFFFFF"/>
+                </a:solidFill>
+                <a:latin typeface="Cambria" pitchFamily="34" charset="0"/>
+                <a:ea typeface="Cambria" pitchFamily="34" charset="-122"/>
+                <a:cs typeface="Cambria" pitchFamily="34" charset="-120"/>
+              </a:rPr>
+              <a:t>3</a:t>
+            </a:r>
+            <a:endParaRPr lang="en-US" sz="1800" dirty="0"/>
+          </a:p>
+        </p:txBody>
+      </p:sp>
+      <p:sp>
+        <p:nvSpPr>
+          <p:cNvPr id="16" name="Text 14"/>
+          <p:cNvSpPr txBox="1"/>
+          <p:nvPr/>
+        </p:nvSpPr>
+        <p:spPr>
+          <a:xfrm>
+            <a:off x="1554480" y="3995928"/>
+            <a:ext cx="4206240" cy="548640"/>
+          </a:xfrm>
+          <a:prstGeom prst="rect">
+            <a:avLst/>
+          </a:prstGeom>
+          <a:noFill/>
+          <a:ln/>
+        </p:spPr>
+        <p:txBody>
+          <a:bodyPr wrap="square" lIns="0" tIns="0" rIns="0" bIns="0" rtlCol="0" anchor="ctr"/>
+          <a:lstStyle/>
+          <a:p>
+            <a:pPr indent="0" marL="0">
+              <a:buNone/>
+            </a:pPr>
+            <a:r>
+              <a:rPr lang="en-US" sz="1650" b="1" dirty="0">
+                <a:solidFill>
+                  <a:srgbClr val="0B3C5D"/>
+                </a:solidFill>
+                <a:latin typeface="Cambria" pitchFamily="34" charset="0"/>
+                <a:ea typeface="Cambria" pitchFamily="34" charset="-122"/>
+                <a:cs typeface="Cambria" pitchFamily="34" charset="-120"/>
+              </a:rPr>
+              <a:t>Un teacher vraiment supérieur</a:t>
+            </a:r>
+            <a:endParaRPr lang="en-US" sz="1650" dirty="0"/>
+          </a:p>
+        </p:txBody>
+      </p:sp>
+      <p:sp>
+        <p:nvSpPr>
+          <p:cNvPr id="17" name="Text 15"/>
+          <p:cNvSpPr txBox="1"/>
+          <p:nvPr/>
+        </p:nvSpPr>
+        <p:spPr>
+          <a:xfrm>
+            <a:off x="868680" y="4663440"/>
+            <a:ext cx="4754880" cy="822960"/>
+          </a:xfrm>
+          <a:prstGeom prst="rect">
+            <a:avLst/>
+          </a:prstGeom>
+          <a:noFill/>
+          <a:ln/>
+        </p:spPr>
+        <p:txBody>
+          <a:bodyPr wrap="square" lIns="0" tIns="0" rIns="0" bIns="0" rtlCol="0" anchor="ctr"/>
+          <a:lstStyle/>
+          <a:p>
+            <a:pPr indent="0" marL="0">
+              <a:lnSpc>
+                <a:spcPct val="105000"/>
+              </a:lnSpc>
+              <a:buNone/>
+            </a:pPr>
+            <a:r>
+              <a:rPr lang="en-US" sz="1350" dirty="0">
+                <a:solidFill>
+                  <a:srgbClr val="16323D"/>
+                </a:solidFill>
+                <a:latin typeface="Calibri" pitchFamily="34" charset="0"/>
+                <a:ea typeface="Calibri" pitchFamily="34" charset="-122"/>
+                <a:cs typeface="Calibri" pitchFamily="34" charset="-120"/>
+              </a:rPr>
+              <a:t>CNN 3D sur voxels distillé vers le student nuage de points (KD cross-modale)</a:t>
+            </a:r>
+            <a:endParaRPr lang="en-US" sz="1350" dirty="0"/>
+          </a:p>
+        </p:txBody>
+      </p:sp>
+      <p:sp>
+        <p:nvSpPr>
+          <p:cNvPr id="18" name="Shape 16"/>
+          <p:cNvSpPr/>
+          <p:nvPr/>
+        </p:nvSpPr>
+        <p:spPr>
+          <a:xfrm>
+            <a:off x="6217920" y="3703320"/>
+            <a:ext cx="5394960" cy="1874520"/>
+          </a:xfrm>
+          <a:prstGeom prst="roundRect">
+            <a:avLst>
+              <a:gd name="adj" fmla="val 4390"/>
+            </a:avLst>
+          </a:prstGeom>
+          <a:solidFill>
+            <a:srgbClr val="EAF3F3"/>
+          </a:solidFill>
+          <a:ln/>
+          <a:effectLst>
+            <a:outerShdw sx="100000" sy="100000" kx="0" ky="0" algn="bl" rotWithShape="0" blurRad="88900" dist="25400" dir="5400000">
+              <a:srgbClr val="9AAEB5">
+                <a:alpha val="35000"/>
+              </a:srgbClr>
+            </a:outerShdw>
+          </a:effectLst>
+        </p:spPr>
+      </p:sp>
+      <p:sp>
+        <p:nvSpPr>
+          <p:cNvPr id="19" name="Shape 17"/>
+          <p:cNvSpPr/>
+          <p:nvPr/>
+        </p:nvSpPr>
+        <p:spPr>
+          <a:xfrm>
+            <a:off x="6492240" y="3977640"/>
+            <a:ext cx="566928" cy="566928"/>
+          </a:xfrm>
+          <a:prstGeom prst="ellipse">
+            <a:avLst/>
+          </a:prstGeom>
+          <a:solidFill>
+            <a:srgbClr val="1C7293"/>
+          </a:solidFill>
+          <a:ln/>
+        </p:spPr>
+      </p:sp>
+      <p:sp>
+        <p:nvSpPr>
+          <p:cNvPr id="20" name="Text 18"/>
+          <p:cNvSpPr txBox="1"/>
+          <p:nvPr/>
+        </p:nvSpPr>
+        <p:spPr>
+          <a:xfrm>
+            <a:off x="6492240" y="3977640"/>
+            <a:ext cx="566928" cy="566928"/>
+          </a:xfrm>
+          <a:prstGeom prst="rect">
+            <a:avLst/>
+          </a:prstGeom>
+          <a:noFill/>
+          <a:ln/>
+        </p:spPr>
+        <p:txBody>
+          <a:bodyPr wrap="square" lIns="0" tIns="0" rIns="0" bIns="0" rtlCol="0" anchor="ctr"/>
+          <a:lstStyle/>
+          <a:p>
+            <a:pPr algn="ctr" indent="0" marL="0">
+              <a:buNone/>
+            </a:pPr>
+            <a:r>
+              <a:rPr lang="en-US" sz="1800" b="1" dirty="0">
+                <a:solidFill>
+                  <a:srgbClr val="FFFFFF"/>
+                </a:solidFill>
+                <a:latin typeface="Cambria" pitchFamily="34" charset="0"/>
+                <a:ea typeface="Cambria" pitchFamily="34" charset="-122"/>
+                <a:cs typeface="Cambria" pitchFamily="34" charset="-120"/>
+              </a:rPr>
+              <a:t>4</a:t>
+            </a:r>
+            <a:endParaRPr lang="en-US" sz="1800" dirty="0"/>
+          </a:p>
+        </p:txBody>
+      </p:sp>
+      <p:sp>
+        <p:nvSpPr>
+          <p:cNvPr id="21" name="Text 19"/>
+          <p:cNvSpPr txBox="1"/>
+          <p:nvPr/>
+        </p:nvSpPr>
+        <p:spPr>
+          <a:xfrm>
+            <a:off x="7223760" y="3995928"/>
+            <a:ext cx="4206240" cy="548640"/>
+          </a:xfrm>
+          <a:prstGeom prst="rect">
+            <a:avLst/>
+          </a:prstGeom>
+          <a:noFill/>
+          <a:ln/>
+        </p:spPr>
+        <p:txBody>
+          <a:bodyPr wrap="square" lIns="0" tIns="0" rIns="0" bIns="0" rtlCol="0" anchor="ctr"/>
+          <a:lstStyle/>
+          <a:p>
+            <a:pPr indent="0" marL="0">
+              <a:buNone/>
+            </a:pPr>
+            <a:r>
+              <a:rPr lang="en-US" sz="1650" b="1" dirty="0">
+                <a:solidFill>
+                  <a:srgbClr val="0B3C5D"/>
+                </a:solidFill>
+                <a:latin typeface="Cambria" pitchFamily="34" charset="0"/>
+                <a:ea typeface="Cambria" pitchFamily="34" charset="-122"/>
+                <a:cs typeface="Cambria" pitchFamily="34" charset="-120"/>
+              </a:rPr>
+              <a:t>Seuil &amp; sous-échantillonnage</a:t>
+            </a:r>
+            <a:endParaRPr lang="en-US" sz="1650" dirty="0"/>
+          </a:p>
+        </p:txBody>
+      </p:sp>
+      <p:sp>
+        <p:nvSpPr>
+          <p:cNvPr id="22" name="Text 20"/>
+          <p:cNvSpPr txBox="1"/>
+          <p:nvPr/>
+        </p:nvSpPr>
+        <p:spPr>
+          <a:xfrm>
+            <a:off x="6537960" y="4663440"/>
+            <a:ext cx="4754880" cy="822960"/>
+          </a:xfrm>
+          <a:prstGeom prst="rect">
+            <a:avLst/>
+          </a:prstGeom>
+          <a:noFill/>
+          <a:ln/>
+        </p:spPr>
+        <p:txBody>
+          <a:bodyPr wrap="square" lIns="0" tIns="0" rIns="0" bIns="0" rtlCol="0" anchor="ctr"/>
+          <a:lstStyle/>
+          <a:p>
+            <a:pPr indent="0" marL="0">
+              <a:lnSpc>
+                <a:spcPct val="105000"/>
+              </a:lnSpc>
+              <a:buNone/>
+            </a:pPr>
+            <a:r>
+              <a:rPr lang="en-US" sz="1350" dirty="0">
+                <a:solidFill>
+                  <a:srgbClr val="16323D"/>
+                </a:solidFill>
+                <a:latin typeface="Calibri" pitchFamily="34" charset="0"/>
+                <a:ea typeface="Calibri" pitchFamily="34" charset="-122"/>
+                <a:cs typeface="Calibri" pitchFamily="34" charset="-120"/>
+              </a:rPr>
+              <a:t>seuil calibré par densité ; sous-échantillonnage structuré (trous locaux, coupes)</a:t>
+            </a:r>
+            <a:endParaRPr lang="en-US" sz="1350" dirty="0"/>
+          </a:p>
+        </p:txBody>
+      </p:sp>
+    </p:spTree>
+  </p:cSld>
+  <p:clrMapOvr>
+    <a:masterClrMapping/>
+  </p:clrMapOvr>
+</p:sld>
+</file>
+
+<file path=ppt/slides/slide14.xml><?xml version="1.0" encoding="utf-8"?>
+<p:sld xmlns:a="http://schemas.openxmlformats.org/drawingml/2006/main" xmlns:r="http://schemas.openxmlformats.org/officeDocument/2006/relationships" xmlns:p="http://schemas.openxmlformats.org/presentationml/2006/main">
+  <p:cSld name="Slide 14">
     <p:bg>
       <p:bgPr>
         <a:solidFill>
@@ -2963,15 +7044,15 @@
         </p:nvSpPr>
         <p:spPr>
           <a:xfrm>
-            <a:off x="2453492" y="4873903"/>
-            <a:ext cx="158451" cy="158451"/>
+            <a:off x="2746623" y="4499576"/>
+            <a:ext cx="85350" cy="85350"/>
           </a:xfrm>
           <a:prstGeom prst="ellipse">
             <a:avLst/>
           </a:prstGeom>
           <a:solidFill>
             <a:srgbClr val="1C7293">
-              <a:alpha val="56287"/>
+              <a:alpha val="34449"/>
             </a:srgbClr>
           </a:solidFill>
           <a:ln/>
@@ -2985,15 +7066,15 @@
         </p:nvSpPr>
         <p:spPr>
           <a:xfrm>
-            <a:off x="2942762" y="5048397"/>
-            <a:ext cx="79139" cy="79139"/>
+            <a:off x="2038339" y="4382735"/>
+            <a:ext cx="182266" cy="182266"/>
           </a:xfrm>
           <a:prstGeom prst="ellipse">
             <a:avLst/>
           </a:prstGeom>
           <a:solidFill>
             <a:srgbClr val="1C7293">
-              <a:alpha val="73376"/>
+              <a:alpha val="49318"/>
             </a:srgbClr>
           </a:solidFill>
           <a:ln/>
@@ -3007,15 +7088,15 @@
         </p:nvSpPr>
         <p:spPr>
           <a:xfrm>
-            <a:off x="2060245" y="4507843"/>
-            <a:ext cx="126615" cy="126615"/>
+            <a:off x="2004885" y="6007315"/>
+            <a:ext cx="219450" cy="219450"/>
           </a:xfrm>
           <a:prstGeom prst="ellipse">
             <a:avLst/>
           </a:prstGeom>
           <a:solidFill>
             <a:srgbClr val="1C7293">
-              <a:alpha val="32147"/>
+              <a:alpha val="67240"/>
             </a:srgbClr>
           </a:solidFill>
           <a:ln/>
@@ -3029,15 +7110,15 @@
         </p:nvSpPr>
         <p:spPr>
           <a:xfrm>
-            <a:off x="2950461" y="4484625"/>
-            <a:ext cx="133765" cy="133765"/>
+            <a:off x="1242539" y="4999459"/>
+            <a:ext cx="145399" cy="145399"/>
           </a:xfrm>
           <a:prstGeom prst="ellipse">
             <a:avLst/>
           </a:prstGeom>
           <a:solidFill>
             <a:srgbClr val="1C7293">
-              <a:alpha val="30806"/>
+              <a:alpha val="38138"/>
             </a:srgbClr>
           </a:solidFill>
           <a:ln/>
@@ -3051,15 +7132,15 @@
         </p:nvSpPr>
         <p:spPr>
           <a:xfrm>
-            <a:off x="2991038" y="4011906"/>
-            <a:ext cx="87390" cy="87390"/>
+            <a:off x="1961038" y="4937840"/>
+            <a:ext cx="212612" cy="212612"/>
           </a:xfrm>
           <a:prstGeom prst="ellipse">
             <a:avLst/>
           </a:prstGeom>
           <a:solidFill>
             <a:srgbClr val="1C7293">
-              <a:alpha val="34231"/>
+              <a:alpha val="41604"/>
             </a:srgbClr>
           </a:solidFill>
           <a:ln/>
@@ -3073,15 +7154,15 @@
         </p:nvSpPr>
         <p:spPr>
           <a:xfrm>
-            <a:off x="1619460" y="5393590"/>
-            <a:ext cx="198691" cy="198691"/>
+            <a:off x="2753656" y="5934016"/>
+            <a:ext cx="38572" cy="38572"/>
           </a:xfrm>
           <a:prstGeom prst="ellipse">
             <a:avLst/>
           </a:prstGeom>
           <a:solidFill>
             <a:srgbClr val="1C7293">
-              <a:alpha val="68774"/>
+              <a:alpha val="45178"/>
             </a:srgbClr>
           </a:solidFill>
           <a:ln/>
@@ -3095,15 +7176,15 @@
         </p:nvSpPr>
         <p:spPr>
           <a:xfrm>
-            <a:off x="2163861" y="5720159"/>
-            <a:ext cx="200148" cy="200148"/>
+            <a:off x="2960091" y="5635725"/>
+            <a:ext cx="103928" cy="103928"/>
           </a:xfrm>
           <a:prstGeom prst="ellipse">
             <a:avLst/>
           </a:prstGeom>
           <a:solidFill>
             <a:srgbClr val="1C7293">
-              <a:alpha val="51458"/>
+              <a:alpha val="36135"/>
             </a:srgbClr>
           </a:solidFill>
           <a:ln/>
@@ -3117,15 +7198,15 @@
         </p:nvSpPr>
         <p:spPr>
           <a:xfrm>
-            <a:off x="1834334" y="5563241"/>
-            <a:ext cx="49605" cy="49605"/>
+            <a:off x="2186640" y="5512589"/>
+            <a:ext cx="110011" cy="110011"/>
           </a:xfrm>
           <a:prstGeom prst="ellipse">
             <a:avLst/>
           </a:prstGeom>
           <a:solidFill>
             <a:srgbClr val="1C7293">
-              <a:alpha val="53714"/>
+              <a:alpha val="75632"/>
             </a:srgbClr>
           </a:solidFill>
           <a:ln/>
@@ -3139,15 +7220,15 @@
         </p:nvSpPr>
         <p:spPr>
           <a:xfrm>
-            <a:off x="694061" y="5055120"/>
-            <a:ext cx="173254" cy="173254"/>
+            <a:off x="1474177" y="6283372"/>
+            <a:ext cx="110649" cy="110649"/>
           </a:xfrm>
           <a:prstGeom prst="ellipse">
             <a:avLst/>
           </a:prstGeom>
           <a:solidFill>
             <a:srgbClr val="1C7293">
-              <a:alpha val="77179"/>
+              <a:alpha val="43834"/>
             </a:srgbClr>
           </a:solidFill>
           <a:ln/>
@@ -3161,15 +7242,15 @@
         </p:nvSpPr>
         <p:spPr>
           <a:xfrm>
-            <a:off x="520376" y="5617590"/>
-            <a:ext cx="139277" cy="139277"/>
+            <a:off x="2851437" y="6473432"/>
+            <a:ext cx="226419" cy="226419"/>
           </a:xfrm>
           <a:prstGeom prst="ellipse">
             <a:avLst/>
           </a:prstGeom>
           <a:solidFill>
             <a:srgbClr val="1C7293">
-              <a:alpha val="34662"/>
+              <a:alpha val="34863"/>
             </a:srgbClr>
           </a:solidFill>
           <a:ln/>
@@ -3183,15 +7264,15 @@
         </p:nvSpPr>
         <p:spPr>
           <a:xfrm>
-            <a:off x="1620444" y="6480879"/>
-            <a:ext cx="176896" cy="176896"/>
+            <a:off x="2195476" y="4957725"/>
+            <a:ext cx="99982" cy="99982"/>
           </a:xfrm>
           <a:prstGeom prst="ellipse">
             <a:avLst/>
           </a:prstGeom>
           <a:solidFill>
             <a:srgbClr val="1C7293">
-              <a:alpha val="32496"/>
+              <a:alpha val="63970"/>
             </a:srgbClr>
           </a:solidFill>
           <a:ln/>
@@ -3205,15 +7286,15 @@
         </p:nvSpPr>
         <p:spPr>
           <a:xfrm>
-            <a:off x="541447" y="4449658"/>
-            <a:ext cx="55193" cy="55193"/>
+            <a:off x="781912" y="5262270"/>
+            <a:ext cx="56152" cy="56152"/>
           </a:xfrm>
           <a:prstGeom prst="ellipse">
             <a:avLst/>
           </a:prstGeom>
           <a:solidFill>
             <a:srgbClr val="1C7293">
-              <a:alpha val="78706"/>
+              <a:alpha val="74486"/>
             </a:srgbClr>
           </a:solidFill>
           <a:ln/>
@@ -3227,15 +7308,15 @@
         </p:nvSpPr>
         <p:spPr>
           <a:xfrm>
-            <a:off x="1768312" y="4137729"/>
-            <a:ext cx="92151" cy="92151"/>
+            <a:off x="2189259" y="4644831"/>
+            <a:ext cx="209981" cy="209981"/>
           </a:xfrm>
           <a:prstGeom prst="ellipse">
             <a:avLst/>
           </a:prstGeom>
           <a:solidFill>
             <a:srgbClr val="1C7293">
-              <a:alpha val="57584"/>
+              <a:alpha val="65191"/>
             </a:srgbClr>
           </a:solidFill>
           <a:ln/>
@@ -3249,15 +7330,15 @@
         </p:nvSpPr>
         <p:spPr>
           <a:xfrm>
-            <a:off x="394306" y="4738776"/>
-            <a:ext cx="65102" cy="65102"/>
+            <a:off x="1821599" y="4612310"/>
+            <a:ext cx="37597" cy="37597"/>
           </a:xfrm>
           <a:prstGeom prst="ellipse">
             <a:avLst/>
           </a:prstGeom>
           <a:solidFill>
             <a:srgbClr val="1C7293">
-              <a:alpha val="78789"/>
+              <a:alpha val="31163"/>
             </a:srgbClr>
           </a:solidFill>
           <a:ln/>
@@ -3271,15 +7352,15 @@
         </p:nvSpPr>
         <p:spPr>
           <a:xfrm>
-            <a:off x="721365" y="4377864"/>
-            <a:ext cx="50623" cy="50623"/>
+            <a:off x="1559967" y="4654646"/>
+            <a:ext cx="44610" cy="44610"/>
           </a:xfrm>
           <a:prstGeom prst="ellipse">
             <a:avLst/>
           </a:prstGeom>
           <a:solidFill>
             <a:srgbClr val="1C7293">
-              <a:alpha val="72132"/>
+              <a:alpha val="61680"/>
             </a:srgbClr>
           </a:solidFill>
           <a:ln/>
@@ -3293,15 +7374,15 @@
         </p:nvSpPr>
         <p:spPr>
           <a:xfrm>
-            <a:off x="1550364" y="5711940"/>
-            <a:ext cx="217450" cy="217450"/>
+            <a:off x="657873" y="6511102"/>
+            <a:ext cx="120194" cy="120194"/>
           </a:xfrm>
           <a:prstGeom prst="ellipse">
             <a:avLst/>
           </a:prstGeom>
           <a:solidFill>
             <a:srgbClr val="1C7293">
-              <a:alpha val="63741"/>
+              <a:alpha val="47671"/>
             </a:srgbClr>
           </a:solidFill>
           <a:ln/>
@@ -3315,15 +7396,15 @@
         </p:nvSpPr>
         <p:spPr>
           <a:xfrm>
-            <a:off x="2217925" y="6463373"/>
-            <a:ext cx="236486" cy="236486"/>
+            <a:off x="914920" y="5382540"/>
+            <a:ext cx="37249" cy="37249"/>
           </a:xfrm>
           <a:prstGeom prst="ellipse">
             <a:avLst/>
           </a:prstGeom>
           <a:solidFill>
             <a:srgbClr val="1C7293">
-              <a:alpha val="35728"/>
+              <a:alpha val="54173"/>
             </a:srgbClr>
           </a:solidFill>
           <a:ln/>
@@ -3337,15 +7418,15 @@
         </p:nvSpPr>
         <p:spPr>
           <a:xfrm>
-            <a:off x="288786" y="5871902"/>
-            <a:ext cx="111683" cy="111683"/>
+            <a:off x="347525" y="4404583"/>
+            <a:ext cx="69735" cy="69735"/>
           </a:xfrm>
           <a:prstGeom prst="ellipse">
             <a:avLst/>
           </a:prstGeom>
           <a:solidFill>
             <a:srgbClr val="1C7293">
-              <a:alpha val="56762"/>
+              <a:alpha val="67150"/>
             </a:srgbClr>
           </a:solidFill>
           <a:ln/>
@@ -3359,15 +7440,15 @@
         </p:nvSpPr>
         <p:spPr>
           <a:xfrm>
-            <a:off x="814109" y="4327759"/>
-            <a:ext cx="81235" cy="81235"/>
+            <a:off x="2435262" y="5059730"/>
+            <a:ext cx="148683" cy="148683"/>
           </a:xfrm>
           <a:prstGeom prst="ellipse">
             <a:avLst/>
           </a:prstGeom>
           <a:solidFill>
             <a:srgbClr val="1C7293">
-              <a:alpha val="43954"/>
+              <a:alpha val="34134"/>
             </a:srgbClr>
           </a:solidFill>
           <a:ln/>
@@ -3381,15 +7462,15 @@
         </p:nvSpPr>
         <p:spPr>
           <a:xfrm>
-            <a:off x="2655685" y="4263123"/>
-            <a:ext cx="138393" cy="138393"/>
+            <a:off x="2373478" y="4499785"/>
+            <a:ext cx="173186" cy="173186"/>
           </a:xfrm>
           <a:prstGeom prst="ellipse">
             <a:avLst/>
           </a:prstGeom>
           <a:solidFill>
             <a:srgbClr val="1C7293">
-              <a:alpha val="52955"/>
+              <a:alpha val="75623"/>
             </a:srgbClr>
           </a:solidFill>
           <a:ln/>
@@ -3403,15 +7484,15 @@
         </p:nvSpPr>
         <p:spPr>
           <a:xfrm>
-            <a:off x="1462634" y="6515842"/>
-            <a:ext cx="227463" cy="227463"/>
+            <a:off x="2911764" y="4647384"/>
+            <a:ext cx="135629" cy="135629"/>
           </a:xfrm>
           <a:prstGeom prst="ellipse">
             <a:avLst/>
           </a:prstGeom>
           <a:solidFill>
             <a:srgbClr val="1C7293">
-              <a:alpha val="32749"/>
+              <a:alpha val="43436"/>
             </a:srgbClr>
           </a:solidFill>
           <a:ln/>
@@ -3425,15 +7506,15 @@
         </p:nvSpPr>
         <p:spPr>
           <a:xfrm>
-            <a:off x="2370649" y="4140521"/>
-            <a:ext cx="71540" cy="71540"/>
+            <a:off x="1559684" y="4651687"/>
+            <a:ext cx="147884" cy="147884"/>
           </a:xfrm>
           <a:prstGeom prst="ellipse">
             <a:avLst/>
           </a:prstGeom>
           <a:solidFill>
             <a:srgbClr val="1C7293">
-              <a:alpha val="35259"/>
+              <a:alpha val="67886"/>
             </a:srgbClr>
           </a:solidFill>
           <a:ln/>
@@ -3518,7 +7599,7 @@
                 <a:ea typeface="Calibri" pitchFamily="34" charset="-122"/>
                 <a:cs typeface="Calibri" pitchFamily="34" charset="-120"/>
               </a:rPr>
-              <a:t>Infrastructure complète + baselines établies : données → nuages de points, teacher, student, protocole de robustesse.</a:t>
+              <a:t>Le sous-échantillonnage dégrade nettement la classification (AUC ~0.77 → ~0.59 pour les modèles denses).</a:t>
             </a:r>
             <a:endParaRPr lang="en-US" sz="1700" dirty="0"/>
           </a:p>
@@ -3542,7 +7623,7 @@
                 <a:ea typeface="Calibri" pitchFamily="34" charset="-122"/>
                 <a:cs typeface="Calibri" pitchFamily="34" charset="-120"/>
               </a:rPr>
-              <a:t>Le sous-échantillonnage dégrade nettement la classification (AUC 0.80 → 0.57) — mesurable et reproductible.</a:t>
+              <a:t>Entraîner sur des nuages parcimonieux le corrige : +0.03 → +0.08 AUC, à toutes les densités.</a:t>
             </a:r>
             <a:endParaRPr lang="en-US" sz="1700" dirty="0"/>
           </a:p>
@@ -3566,7 +7647,7 @@
                 <a:ea typeface="Calibri" pitchFamily="34" charset="-122"/>
                 <a:cs typeface="Calibri" pitchFamily="34" charset="-120"/>
               </a:rPr>
-              <a:t>H1 recadrée honnêtement : la KD doit transférer la robustesse basse-densité, pas la précision.</a:t>
+              <a:t>La distillation n'ajoute rien au-delà de cette augmentation : H1 réfutée, avec le bon témoin.</a:t>
             </a:r>
             <a:endParaRPr lang="en-US" sz="1700" dirty="0"/>
           </a:p>
@@ -3590,7 +7671,7 @@
                 <a:ea typeface="Calibri" pitchFamily="34" charset="-122"/>
                 <a:cs typeface="Calibri" pitchFamily="34" charset="-120"/>
               </a:rPr>
-              <a:t>Prochaine étape : implémenter la KD (logit / robuste / features) et comparer les courbes.</a:t>
+              <a:t>Leçon : une KD n'aide que si le teacher sait quelque chose que le student ne peut pas apprendre seul.</a:t>
             </a:r>
             <a:endParaRPr lang="en-US" sz="1700" dirty="0"/>
           </a:p>
@@ -3629,7 +7710,7 @@
                 <a:ea typeface="Calibri" pitchFamily="34" charset="-122"/>
                 <a:cs typeface="Calibri" pitchFamily="34" charset="-120"/>
               </a:rPr>
-              <a:t>Code reproductible : src/ · run_half.py · notebooks/01_pointclouds_robustness.ipynb</a:t>
+              <a:t>Code reproductible : src/ · prepare_data.py · run_seeds.py · run_kd.py · run_robust_teacher.py · notebook</a:t>
             </a:r>
             <a:endParaRPr lang="en-US" sz="1300" dirty="0"/>
           </a:p>
@@ -5626,15 +9707,15 @@
         </p:nvSpPr>
         <p:spPr>
           <a:xfrm>
-            <a:off x="6473121" y="5530060"/>
-            <a:ext cx="144776" cy="144776"/>
+            <a:off x="5418395" y="4973813"/>
+            <a:ext cx="101685" cy="101685"/>
           </a:xfrm>
           <a:prstGeom prst="ellipse">
             <a:avLst/>
           </a:prstGeom>
           <a:solidFill>
             <a:srgbClr val="1C7293">
-              <a:alpha val="37566"/>
+              <a:alpha val="54287"/>
             </a:srgbClr>
           </a:solidFill>
           <a:ln/>
@@ -5648,15 +9729,15 @@
         </p:nvSpPr>
         <p:spPr>
           <a:xfrm>
-            <a:off x="5951473" y="5519260"/>
-            <a:ext cx="61787" cy="61787"/>
+            <a:off x="5743796" y="5701513"/>
+            <a:ext cx="58574" cy="58574"/>
           </a:xfrm>
           <a:prstGeom prst="ellipse">
             <a:avLst/>
           </a:prstGeom>
           <a:solidFill>
             <a:srgbClr val="1C7293">
-              <a:alpha val="73489"/>
+              <a:alpha val="39443"/>
             </a:srgbClr>
           </a:solidFill>
           <a:ln/>
@@ -5670,15 +9751,15 @@
         </p:nvSpPr>
         <p:spPr>
           <a:xfrm>
-            <a:off x="6064001" y="4683931"/>
-            <a:ext cx="84027" cy="84027"/>
+            <a:off x="6013728" y="5875703"/>
+            <a:ext cx="96236" cy="96236"/>
           </a:xfrm>
           <a:prstGeom prst="ellipse">
             <a:avLst/>
           </a:prstGeom>
           <a:solidFill>
             <a:srgbClr val="1C7293">
-              <a:alpha val="63291"/>
+              <a:alpha val="75987"/>
             </a:srgbClr>
           </a:solidFill>
           <a:ln/>
@@ -5692,15 +9773,15 @@
         </p:nvSpPr>
         <p:spPr>
           <a:xfrm>
-            <a:off x="5153026" y="5977228"/>
-            <a:ext cx="38973" cy="38973"/>
+            <a:off x="5549634" y="5566243"/>
+            <a:ext cx="53919" cy="53919"/>
           </a:xfrm>
           <a:prstGeom prst="ellipse">
             <a:avLst/>
           </a:prstGeom>
           <a:solidFill>
             <a:srgbClr val="1C7293">
-              <a:alpha val="54780"/>
+              <a:alpha val="45695"/>
             </a:srgbClr>
           </a:solidFill>
           <a:ln/>
@@ -5714,15 +9795,15 @@
         </p:nvSpPr>
         <p:spPr>
           <a:xfrm>
-            <a:off x="5761720" y="5283832"/>
-            <a:ext cx="79678" cy="79678"/>
+            <a:off x="6065882" y="6210871"/>
+            <a:ext cx="147561" cy="147561"/>
           </a:xfrm>
           <a:prstGeom prst="ellipse">
             <a:avLst/>
           </a:prstGeom>
           <a:solidFill>
             <a:srgbClr val="1C7293">
-              <a:alpha val="32655"/>
+              <a:alpha val="75984"/>
             </a:srgbClr>
           </a:solidFill>
           <a:ln/>
@@ -5736,15 +9817,15 @@
         </p:nvSpPr>
         <p:spPr>
           <a:xfrm>
-            <a:off x="6744424" y="5033687"/>
-            <a:ext cx="73452" cy="73452"/>
+            <a:off x="6003451" y="5230183"/>
+            <a:ext cx="37510" cy="37510"/>
           </a:xfrm>
           <a:prstGeom prst="ellipse">
             <a:avLst/>
           </a:prstGeom>
           <a:solidFill>
             <a:srgbClr val="1C7293">
-              <a:alpha val="41730"/>
+              <a:alpha val="50808"/>
             </a:srgbClr>
           </a:solidFill>
           <a:ln/>
@@ -5758,15 +9839,15 @@
         </p:nvSpPr>
         <p:spPr>
           <a:xfrm>
-            <a:off x="5703526" y="5304496"/>
-            <a:ext cx="122739" cy="122739"/>
+            <a:off x="5838321" y="4964254"/>
+            <a:ext cx="39830" cy="39830"/>
           </a:xfrm>
           <a:prstGeom prst="ellipse">
             <a:avLst/>
           </a:prstGeom>
           <a:solidFill>
             <a:srgbClr val="1C7293">
-              <a:alpha val="51804"/>
+              <a:alpha val="40725"/>
             </a:srgbClr>
           </a:solidFill>
           <a:ln/>
@@ -5780,15 +9861,15 @@
         </p:nvSpPr>
         <p:spPr>
           <a:xfrm>
-            <a:off x="6391347" y="4951343"/>
-            <a:ext cx="123629" cy="123629"/>
+            <a:off x="5207481" y="5926672"/>
+            <a:ext cx="71915" cy="71915"/>
           </a:xfrm>
           <a:prstGeom prst="ellipse">
             <a:avLst/>
           </a:prstGeom>
           <a:solidFill>
             <a:srgbClr val="1C7293">
-              <a:alpha val="67697"/>
+              <a:alpha val="30024"/>
             </a:srgbClr>
           </a:solidFill>
           <a:ln/>
@@ -5802,15 +9883,15 @@
         </p:nvSpPr>
         <p:spPr>
           <a:xfrm>
-            <a:off x="6007111" y="5027040"/>
-            <a:ext cx="159966" cy="159966"/>
+            <a:off x="5290952" y="4755655"/>
+            <a:ext cx="84453" cy="84453"/>
           </a:xfrm>
           <a:prstGeom prst="ellipse">
             <a:avLst/>
           </a:prstGeom>
           <a:solidFill>
             <a:srgbClr val="1C7293">
-              <a:alpha val="53896"/>
+              <a:alpha val="43199"/>
             </a:srgbClr>
           </a:solidFill>
           <a:ln/>
@@ -5824,15 +9905,15 @@
         </p:nvSpPr>
         <p:spPr>
           <a:xfrm>
-            <a:off x="5132975" y="4796504"/>
-            <a:ext cx="117995" cy="117995"/>
+            <a:off x="5196978" y="5998023"/>
+            <a:ext cx="162439" cy="162439"/>
           </a:xfrm>
           <a:prstGeom prst="ellipse">
             <a:avLst/>
           </a:prstGeom>
           <a:solidFill>
             <a:srgbClr val="1C7293">
-              <a:alpha val="58827"/>
+              <a:alpha val="31188"/>
             </a:srgbClr>
           </a:solidFill>
           <a:ln/>
@@ -5846,15 +9927,15 @@
         </p:nvSpPr>
         <p:spPr>
           <a:xfrm>
-            <a:off x="5780907" y="6208507"/>
-            <a:ext cx="67435" cy="67435"/>
+            <a:off x="6401607" y="4640560"/>
+            <a:ext cx="128875" cy="128875"/>
           </a:xfrm>
           <a:prstGeom prst="ellipse">
             <a:avLst/>
           </a:prstGeom>
           <a:solidFill>
             <a:srgbClr val="1C7293">
-              <a:alpha val="72626"/>
+              <a:alpha val="46465"/>
             </a:srgbClr>
           </a:solidFill>
           <a:ln/>
@@ -5868,15 +9949,15 @@
         </p:nvSpPr>
         <p:spPr>
           <a:xfrm>
-            <a:off x="5344330" y="5814804"/>
-            <a:ext cx="146387" cy="146387"/>
+            <a:off x="6106214" y="5338405"/>
+            <a:ext cx="111151" cy="111151"/>
           </a:xfrm>
           <a:prstGeom prst="ellipse">
             <a:avLst/>
           </a:prstGeom>
           <a:solidFill>
             <a:srgbClr val="1C7293">
-              <a:alpha val="34251"/>
+              <a:alpha val="51895"/>
             </a:srgbClr>
           </a:solidFill>
           <a:ln/>
@@ -5890,15 +9971,15 @@
         </p:nvSpPr>
         <p:spPr>
           <a:xfrm>
-            <a:off x="6437985" y="4968190"/>
-            <a:ext cx="152763" cy="152763"/>
+            <a:off x="5844581" y="5850574"/>
+            <a:ext cx="92979" cy="92979"/>
           </a:xfrm>
           <a:prstGeom prst="ellipse">
             <a:avLst/>
           </a:prstGeom>
           <a:solidFill>
             <a:srgbClr val="1C7293">
-              <a:alpha val="30866"/>
+              <a:alpha val="48640"/>
             </a:srgbClr>
           </a:solidFill>
           <a:ln/>
@@ -5912,15 +9993,15 @@
         </p:nvSpPr>
         <p:spPr>
           <a:xfrm>
-            <a:off x="6433667" y="4993986"/>
-            <a:ext cx="60500" cy="60500"/>
+            <a:off x="5685376" y="4937559"/>
+            <a:ext cx="46229" cy="46229"/>
           </a:xfrm>
           <a:prstGeom prst="ellipse">
             <a:avLst/>
           </a:prstGeom>
           <a:solidFill>
             <a:srgbClr val="1C7293">
-              <a:alpha val="79497"/>
+              <a:alpha val="75807"/>
             </a:srgbClr>
           </a:solidFill>
           <a:ln/>
@@ -5934,15 +10015,15 @@
         </p:nvSpPr>
         <p:spPr>
           <a:xfrm>
-            <a:off x="6233331" y="4624765"/>
-            <a:ext cx="160321" cy="160321"/>
+            <a:off x="6892227" y="5672522"/>
+            <a:ext cx="156251" cy="156251"/>
           </a:xfrm>
           <a:prstGeom prst="ellipse">
             <a:avLst/>
           </a:prstGeom>
           <a:solidFill>
             <a:srgbClr val="1C7293">
-              <a:alpha val="44011"/>
+              <a:alpha val="64935"/>
             </a:srgbClr>
           </a:solidFill>
           <a:ln/>
@@ -5956,15 +10037,15 @@
         </p:nvSpPr>
         <p:spPr>
           <a:xfrm>
-            <a:off x="6524378" y="5060970"/>
-            <a:ext cx="88480" cy="88480"/>
+            <a:off x="6504263" y="4643554"/>
+            <a:ext cx="52784" cy="52784"/>
           </a:xfrm>
           <a:prstGeom prst="ellipse">
             <a:avLst/>
           </a:prstGeom>
           <a:solidFill>
             <a:srgbClr val="1C7293">
-              <a:alpha val="53337"/>
+              <a:alpha val="73762"/>
             </a:srgbClr>
           </a:solidFill>
           <a:ln/>
@@ -5978,15 +10059,15 @@
         </p:nvSpPr>
         <p:spPr>
           <a:xfrm>
-            <a:off x="6747286" y="5853309"/>
-            <a:ext cx="112059" cy="112059"/>
+            <a:off x="5359705" y="5172509"/>
+            <a:ext cx="119676" cy="119676"/>
           </a:xfrm>
           <a:prstGeom prst="ellipse">
             <a:avLst/>
           </a:prstGeom>
           <a:solidFill>
             <a:srgbClr val="1C7293">
-              <a:alpha val="69651"/>
+              <a:alpha val="52942"/>
             </a:srgbClr>
           </a:solidFill>
           <a:ln/>
@@ -6000,15 +10081,15 @@
         </p:nvSpPr>
         <p:spPr>
           <a:xfrm>
-            <a:off x="6622686" y="5585484"/>
-            <a:ext cx="63933" cy="63933"/>
+            <a:off x="6101122" y="4842356"/>
+            <a:ext cx="102475" cy="102475"/>
           </a:xfrm>
           <a:prstGeom prst="ellipse">
             <a:avLst/>
           </a:prstGeom>
           <a:solidFill>
             <a:srgbClr val="1C7293">
-              <a:alpha val="52007"/>
+              <a:alpha val="74072"/>
             </a:srgbClr>
           </a:solidFill>
           <a:ln/>
@@ -6022,15 +10103,15 @@
         </p:nvSpPr>
         <p:spPr>
           <a:xfrm>
-            <a:off x="5682646" y="4979454"/>
-            <a:ext cx="90618" cy="90618"/>
+            <a:off x="5169567" y="4712067"/>
+            <a:ext cx="40370" cy="40370"/>
           </a:xfrm>
           <a:prstGeom prst="ellipse">
             <a:avLst/>
           </a:prstGeom>
           <a:solidFill>
             <a:srgbClr val="1C7293">
-              <a:alpha val="78764"/>
+              <a:alpha val="51278"/>
             </a:srgbClr>
           </a:solidFill>
           <a:ln/>
@@ -6044,15 +10125,15 @@
         </p:nvSpPr>
         <p:spPr>
           <a:xfrm>
-            <a:off x="5284521" y="4705242"/>
-            <a:ext cx="131296" cy="131296"/>
+            <a:off x="5667278" y="6089093"/>
+            <a:ext cx="141457" cy="141457"/>
           </a:xfrm>
           <a:prstGeom prst="ellipse">
             <a:avLst/>
           </a:prstGeom>
           <a:solidFill>
             <a:srgbClr val="1C7293">
-              <a:alpha val="41218"/>
+              <a:alpha val="61844"/>
             </a:srgbClr>
           </a:solidFill>
           <a:ln/>
@@ -6066,15 +10147,15 @@
         </p:nvSpPr>
         <p:spPr>
           <a:xfrm>
-            <a:off x="6465667" y="5095011"/>
-            <a:ext cx="140841" cy="140841"/>
+            <a:off x="5849055" y="5760871"/>
+            <a:ext cx="60741" cy="60741"/>
           </a:xfrm>
           <a:prstGeom prst="ellipse">
             <a:avLst/>
           </a:prstGeom>
           <a:solidFill>
             <a:srgbClr val="1C7293">
-              <a:alpha val="49017"/>
+              <a:alpha val="38339"/>
             </a:srgbClr>
           </a:solidFill>
           <a:ln/>
@@ -6088,15 +10169,15 @@
         </p:nvSpPr>
         <p:spPr>
           <a:xfrm>
-            <a:off x="6077328" y="4611028"/>
-            <a:ext cx="73755" cy="73755"/>
+            <a:off x="6719043" y="4583652"/>
+            <a:ext cx="125950" cy="125950"/>
           </a:xfrm>
           <a:prstGeom prst="ellipse">
             <a:avLst/>
           </a:prstGeom>
           <a:solidFill>
             <a:srgbClr val="1C7293">
-              <a:alpha val="68774"/>
+              <a:alpha val="60414"/>
             </a:srgbClr>
           </a:solidFill>
           <a:ln/>
@@ -6110,15 +10191,15 @@
         </p:nvSpPr>
         <p:spPr>
           <a:xfrm>
-            <a:off x="5306256" y="4939719"/>
-            <a:ext cx="160383" cy="160383"/>
+            <a:off x="6390102" y="4634657"/>
+            <a:ext cx="135173" cy="135173"/>
           </a:xfrm>
           <a:prstGeom prst="ellipse">
             <a:avLst/>
           </a:prstGeom>
           <a:solidFill>
             <a:srgbClr val="1C7293">
-              <a:alpha val="43593"/>
+              <a:alpha val="75009"/>
             </a:srgbClr>
           </a:solidFill>
           <a:ln/>
@@ -6132,15 +10213,15 @@
         </p:nvSpPr>
         <p:spPr>
           <a:xfrm>
-            <a:off x="6200493" y="5125800"/>
-            <a:ext cx="91487" cy="91487"/>
+            <a:off x="6016635" y="5455105"/>
+            <a:ext cx="74578" cy="74578"/>
           </a:xfrm>
           <a:prstGeom prst="ellipse">
             <a:avLst/>
           </a:prstGeom>
           <a:solidFill>
             <a:srgbClr val="1C7293">
-              <a:alpha val="39425"/>
+              <a:alpha val="36434"/>
             </a:srgbClr>
           </a:solidFill>
           <a:ln/>
@@ -6852,7 +10933,7 @@
               <a:buNone/>
             </a:pPr>
             <a:r>
-              <a:rPr lang="en-US" sz="1550" dirty="0">
+              <a:rPr lang="en-US" sz="1500" dirty="0">
                 <a:solidFill>
                   <a:srgbClr val="16323D"/>
                 </a:solidFill>
@@ -6860,9 +10941,9 @@
                 <a:ea typeface="Calibri" pitchFamily="34" charset="-122"/>
                 <a:cs typeface="Calibri" pitchFamily="34" charset="-120"/>
               </a:rPr>
-              <a:t>Entraîner sur les nuages denses (1024 points, légère augmentation par jitter)</a:t>
-            </a:r>
-            <a:endParaRPr lang="en-US" sz="1550" dirty="0"/>
+              <a:t>Test : garder N points aléatoires, N ∈ {1024, 512, … , 16} ; AUC moyennée sur 5 tirages</a:t>
+            </a:r>
+            <a:endParaRPr lang="en-US" sz="1500" dirty="0"/>
           </a:p>
         </p:txBody>
       </p:sp>
@@ -6950,7 +11031,7 @@
               <a:buNone/>
             </a:pPr>
             <a:r>
-              <a:rPr lang="en-US" sz="1550" dirty="0">
+              <a:rPr lang="en-US" sz="1500" dirty="0">
                 <a:solidFill>
                   <a:srgbClr val="16323D"/>
                 </a:solidFill>
@@ -6958,9 +11039,9 @@
                 <a:ea typeface="Calibri" pitchFamily="34" charset="-122"/>
                 <a:cs typeface="Calibri" pitchFamily="34" charset="-120"/>
               </a:rPr>
-              <a:t>Au test : garder un sous-ensemble aléatoire de N points du même nuage</a:t>
-            </a:r>
-            <a:endParaRPr lang="en-US" sz="1550" dirty="0"/>
+              <a:t>Chaque configuration entraînée sur 5 seeds → moyenne ± écart-type, IC 95 % bootstrap</a:t>
+            </a:r>
+            <a:endParaRPr lang="en-US" sz="1500" dirty="0"/>
           </a:p>
         </p:txBody>
       </p:sp>
@@ -7048,7 +11129,7 @@
               <a:buNone/>
             </a:pPr>
             <a:r>
-              <a:rPr lang="en-US" sz="1550" dirty="0">
+              <a:rPr lang="en-US" sz="1500" dirty="0">
                 <a:solidFill>
                   <a:srgbClr val="16323D"/>
                 </a:solidFill>
@@ -7056,9 +11137,9 @@
                 <a:ea typeface="Calibri" pitchFamily="34" charset="-122"/>
                 <a:cs typeface="Calibri" pitchFamily="34" charset="-120"/>
               </a:rPr>
-              <a:t>N ∈ {1024, 512, 256, 128, 64, 32, 16} — on retire de plus en plus de points</a:t>
-            </a:r>
-            <a:endParaRPr lang="en-US" sz="1550" dirty="0"/>
+              <a:t>Comparaisons appariées (même seed = même teacher) : Δ AUC, t-test, seeds gagnées</a:t>
+            </a:r>
+            <a:endParaRPr lang="en-US" sz="1500" dirty="0"/>
           </a:p>
         </p:txBody>
       </p:sp>
@@ -7146,7 +11227,7 @@
               <a:buNone/>
             </a:pPr>
             <a:r>
-              <a:rPr lang="en-US" sz="1550" dirty="0">
+              <a:rPr lang="en-US" sz="1500" dirty="0">
                 <a:solidFill>
                   <a:srgbClr val="16323D"/>
                 </a:solidFill>
@@ -7154,9 +11235,9 @@
                 <a:ea typeface="Calibri" pitchFamily="34" charset="-122"/>
                 <a:cs typeface="Calibri" pitchFamily="34" charset="-120"/>
               </a:rPr>
-              <a:t>Mesurer l'AUC à chaque N → la courbe de robustesse</a:t>
-            </a:r>
-            <a:endParaRPr lang="en-US" sz="1550" dirty="0"/>
+              <a:t>(T, α) choisis sur la validation uniquement ; même règle de sélection pour toutes les variantes</a:t>
+            </a:r>
+            <a:endParaRPr lang="en-US" sz="1500" dirty="0"/>
           </a:p>
         </p:txBody>
       </p:sp>
@@ -7197,15 +11278,15 @@
         </p:nvSpPr>
         <p:spPr>
           <a:xfrm>
-            <a:off x="9018161" y="2697608"/>
-            <a:ext cx="107361" cy="107361"/>
+            <a:off x="9250725" y="2222618"/>
+            <a:ext cx="48134" cy="48134"/>
           </a:xfrm>
           <a:prstGeom prst="ellipse">
             <a:avLst/>
           </a:prstGeom>
           <a:solidFill>
             <a:srgbClr val="1C7293">
-              <a:alpha val="64545"/>
+              <a:alpha val="51396"/>
             </a:srgbClr>
           </a:solidFill>
           <a:ln/>
@@ -7219,15 +11300,15 @@
         </p:nvSpPr>
         <p:spPr>
           <a:xfrm>
-            <a:off x="9332491" y="2747491"/>
-            <a:ext cx="65689" cy="65689"/>
+            <a:off x="9052953" y="2586616"/>
+            <a:ext cx="86139" cy="86139"/>
           </a:xfrm>
           <a:prstGeom prst="ellipse">
             <a:avLst/>
           </a:prstGeom>
           <a:solidFill>
             <a:srgbClr val="1C7293">
-              <a:alpha val="54032"/>
+              <a:alpha val="48586"/>
             </a:srgbClr>
           </a:solidFill>
           <a:ln/>
@@ -7241,15 +11322,15 @@
         </p:nvSpPr>
         <p:spPr>
           <a:xfrm>
-            <a:off x="8600584" y="2794960"/>
-            <a:ext cx="47680" cy="47680"/>
+            <a:off x="9218247" y="2680789"/>
+            <a:ext cx="84765" cy="84765"/>
           </a:xfrm>
           <a:prstGeom prst="ellipse">
             <a:avLst/>
           </a:prstGeom>
           <a:solidFill>
             <a:srgbClr val="1C7293">
-              <a:alpha val="30992"/>
+              <a:alpha val="67978"/>
             </a:srgbClr>
           </a:solidFill>
           <a:ln/>
@@ -7263,15 +11344,15 @@
         </p:nvSpPr>
         <p:spPr>
           <a:xfrm>
-            <a:off x="9148816" y="2659390"/>
-            <a:ext cx="49475" cy="49475"/>
+            <a:off x="8705113" y="2688843"/>
+            <a:ext cx="84698" cy="84698"/>
           </a:xfrm>
           <a:prstGeom prst="ellipse">
             <a:avLst/>
           </a:prstGeom>
           <a:solidFill>
             <a:srgbClr val="1C7293">
-              <a:alpha val="48549"/>
+              <a:alpha val="50496"/>
             </a:srgbClr>
           </a:solidFill>
           <a:ln/>
@@ -7285,15 +11366,15 @@
         </p:nvSpPr>
         <p:spPr>
           <a:xfrm>
-            <a:off x="9018924" y="2609698"/>
-            <a:ext cx="110818" cy="110818"/>
+            <a:off x="9264459" y="2916377"/>
+            <a:ext cx="104373" cy="104373"/>
           </a:xfrm>
           <a:prstGeom prst="ellipse">
             <a:avLst/>
           </a:prstGeom>
           <a:solidFill>
             <a:srgbClr val="1C7293">
-              <a:alpha val="35785"/>
+              <a:alpha val="43557"/>
             </a:srgbClr>
           </a:solidFill>
           <a:ln/>
@@ -7307,15 +11388,15 @@
         </p:nvSpPr>
         <p:spPr>
           <a:xfrm>
-            <a:off x="9321211" y="2508568"/>
-            <a:ext cx="69577" cy="69577"/>
+            <a:off x="9035851" y="2417292"/>
+            <a:ext cx="60484" cy="60484"/>
           </a:xfrm>
           <a:prstGeom prst="ellipse">
             <a:avLst/>
           </a:prstGeom>
           <a:solidFill>
             <a:srgbClr val="1C7293">
-              <a:alpha val="48561"/>
+              <a:alpha val="67831"/>
             </a:srgbClr>
           </a:solidFill>
           <a:ln/>
@@ -7329,15 +11410,15 @@
         </p:nvSpPr>
         <p:spPr>
           <a:xfrm>
-            <a:off x="8683775" y="2310835"/>
-            <a:ext cx="101403" cy="101403"/>
+            <a:off x="9306742" y="2259930"/>
+            <a:ext cx="74952" cy="74952"/>
           </a:xfrm>
           <a:prstGeom prst="ellipse">
             <a:avLst/>
           </a:prstGeom>
           <a:solidFill>
             <a:srgbClr val="1C7293">
-              <a:alpha val="34643"/>
+              <a:alpha val="43899"/>
             </a:srgbClr>
           </a:solidFill>
           <a:ln/>
@@ -7351,15 +11432,15 @@
         </p:nvSpPr>
         <p:spPr>
           <a:xfrm>
-            <a:off x="9345543" y="2164386"/>
-            <a:ext cx="99155" cy="99155"/>
+            <a:off x="9222850" y="2273629"/>
+            <a:ext cx="62361" cy="62361"/>
           </a:xfrm>
           <a:prstGeom prst="ellipse">
             <a:avLst/>
           </a:prstGeom>
           <a:solidFill>
             <a:srgbClr val="1C7293">
-              <a:alpha val="67731"/>
+              <a:alpha val="55018"/>
             </a:srgbClr>
           </a:solidFill>
           <a:ln/>
@@ -7373,15 +11454,15 @@
         </p:nvSpPr>
         <p:spPr>
           <a:xfrm>
-            <a:off x="9108060" y="2529795"/>
-            <a:ext cx="90092" cy="90092"/>
+            <a:off x="8959929" y="2337492"/>
+            <a:ext cx="60062" cy="60062"/>
           </a:xfrm>
           <a:prstGeom prst="ellipse">
             <a:avLst/>
           </a:prstGeom>
           <a:solidFill>
             <a:srgbClr val="1C7293">
-              <a:alpha val="32014"/>
+              <a:alpha val="43709"/>
             </a:srgbClr>
           </a:solidFill>
           <a:ln/>
@@ -7395,15 +11476,15 @@
         </p:nvSpPr>
         <p:spPr>
           <a:xfrm>
-            <a:off x="8654962" y="2676890"/>
-            <a:ext cx="98287" cy="98287"/>
+            <a:off x="9049916" y="2579688"/>
+            <a:ext cx="54898" cy="54898"/>
           </a:xfrm>
           <a:prstGeom prst="ellipse">
             <a:avLst/>
           </a:prstGeom>
           <a:solidFill>
             <a:srgbClr val="1C7293">
-              <a:alpha val="74957"/>
+              <a:alpha val="41272"/>
             </a:srgbClr>
           </a:solidFill>
           <a:ln/>
@@ -7417,15 +11498,15 @@
         </p:nvSpPr>
         <p:spPr>
           <a:xfrm>
-            <a:off x="8691056" y="2298375"/>
-            <a:ext cx="99276" cy="99276"/>
+            <a:off x="9286484" y="2164174"/>
+            <a:ext cx="64771" cy="64771"/>
           </a:xfrm>
           <a:prstGeom prst="ellipse">
             <a:avLst/>
           </a:prstGeom>
           <a:solidFill>
             <a:srgbClr val="1C7293">
-              <a:alpha val="35937"/>
+              <a:alpha val="52822"/>
             </a:srgbClr>
           </a:solidFill>
           <a:ln/>
@@ -7439,15 +11520,15 @@
         </p:nvSpPr>
         <p:spPr>
           <a:xfrm>
-            <a:off x="9296866" y="2705880"/>
-            <a:ext cx="116433" cy="116433"/>
+            <a:off x="8654384" y="2313007"/>
+            <a:ext cx="70815" cy="70815"/>
           </a:xfrm>
           <a:prstGeom prst="ellipse">
             <a:avLst/>
           </a:prstGeom>
           <a:solidFill>
             <a:srgbClr val="1C7293">
-              <a:alpha val="41921"/>
+              <a:alpha val="67128"/>
             </a:srgbClr>
           </a:solidFill>
           <a:ln/>
@@ -7461,15 +11542,15 @@
         </p:nvSpPr>
         <p:spPr>
           <a:xfrm>
-            <a:off x="8729652" y="2220296"/>
-            <a:ext cx="58219" cy="58219"/>
+            <a:off x="8797105" y="2898696"/>
+            <a:ext cx="60068" cy="60068"/>
           </a:xfrm>
           <a:prstGeom prst="ellipse">
             <a:avLst/>
           </a:prstGeom>
           <a:solidFill>
             <a:srgbClr val="1C7293">
-              <a:alpha val="69347"/>
+              <a:alpha val="45933"/>
             </a:srgbClr>
           </a:solidFill>
           <a:ln/>
@@ -7483,15 +11564,15 @@
         </p:nvSpPr>
         <p:spPr>
           <a:xfrm>
-            <a:off x="9077503" y="2221694"/>
-            <a:ext cx="74846" cy="74846"/>
+            <a:off x="9210520" y="2368970"/>
+            <a:ext cx="52574" cy="52574"/>
           </a:xfrm>
           <a:prstGeom prst="ellipse">
             <a:avLst/>
           </a:prstGeom>
           <a:solidFill>
             <a:srgbClr val="1C7293">
-              <a:alpha val="46478"/>
+              <a:alpha val="79344"/>
             </a:srgbClr>
           </a:solidFill>
           <a:ln/>
@@ -7505,15 +11586,15 @@
         </p:nvSpPr>
         <p:spPr>
           <a:xfrm>
-            <a:off x="9295989" y="2760904"/>
-            <a:ext cx="88362" cy="88362"/>
+            <a:off x="8780901" y="2437692"/>
+            <a:ext cx="37972" cy="37972"/>
           </a:xfrm>
           <a:prstGeom prst="ellipse">
             <a:avLst/>
           </a:prstGeom>
           <a:solidFill>
             <a:srgbClr val="1C7293">
-              <a:alpha val="46670"/>
+              <a:alpha val="70415"/>
             </a:srgbClr>
           </a:solidFill>
           <a:ln/>
@@ -7527,15 +11608,15 @@
         </p:nvSpPr>
         <p:spPr>
           <a:xfrm>
-            <a:off x="9155780" y="2799134"/>
-            <a:ext cx="71696" cy="71696"/>
+            <a:off x="9131595" y="2586461"/>
+            <a:ext cx="98086" cy="98086"/>
           </a:xfrm>
           <a:prstGeom prst="ellipse">
             <a:avLst/>
           </a:prstGeom>
           <a:solidFill>
             <a:srgbClr val="1C7293">
-              <a:alpha val="34837"/>
+              <a:alpha val="63501"/>
             </a:srgbClr>
           </a:solidFill>
           <a:ln/>
@@ -7549,15 +11630,15 @@
         </p:nvSpPr>
         <p:spPr>
           <a:xfrm>
-            <a:off x="8884284" y="2187544"/>
-            <a:ext cx="71701" cy="71701"/>
+            <a:off x="9288635" y="2319141"/>
+            <a:ext cx="74628" cy="74628"/>
           </a:xfrm>
           <a:prstGeom prst="ellipse">
             <a:avLst/>
           </a:prstGeom>
           <a:solidFill>
             <a:srgbClr val="1C7293">
-              <a:alpha val="79740"/>
+              <a:alpha val="32060"/>
             </a:srgbClr>
           </a:solidFill>
           <a:ln/>
@@ -7571,15 +11652,15 @@
         </p:nvSpPr>
         <p:spPr>
           <a:xfrm>
-            <a:off x="8780220" y="2895097"/>
-            <a:ext cx="91355" cy="91355"/>
+            <a:off x="8783819" y="2333565"/>
+            <a:ext cx="39127" cy="39127"/>
           </a:xfrm>
           <a:prstGeom prst="ellipse">
             <a:avLst/>
           </a:prstGeom>
           <a:solidFill>
             <a:srgbClr val="1C7293">
-              <a:alpha val="70331"/>
+              <a:alpha val="43939"/>
             </a:srgbClr>
           </a:solidFill>
           <a:ln/>
@@ -7593,15 +11674,15 @@
         </p:nvSpPr>
         <p:spPr>
           <a:xfrm>
-            <a:off x="8666182" y="2183678"/>
-            <a:ext cx="87831" cy="87831"/>
+            <a:off x="8620847" y="2398719"/>
+            <a:ext cx="88566" cy="88566"/>
           </a:xfrm>
           <a:prstGeom prst="ellipse">
             <a:avLst/>
           </a:prstGeom>
           <a:solidFill>
             <a:srgbClr val="1C7293">
-              <a:alpha val="79652"/>
+              <a:alpha val="44416"/>
             </a:srgbClr>
           </a:solidFill>
           <a:ln/>
@@ -7615,15 +11696,15 @@
         </p:nvSpPr>
         <p:spPr>
           <a:xfrm>
-            <a:off x="8697653" y="2640774"/>
-            <a:ext cx="45982" cy="45982"/>
+            <a:off x="8778065" y="2728965"/>
+            <a:ext cx="73106" cy="73106"/>
           </a:xfrm>
           <a:prstGeom prst="ellipse">
             <a:avLst/>
           </a:prstGeom>
           <a:solidFill>
             <a:srgbClr val="1C7293">
-              <a:alpha val="65765"/>
+              <a:alpha val="67763"/>
             </a:srgbClr>
           </a:solidFill>
           <a:ln/>
@@ -7637,15 +11718,15 @@
         </p:nvSpPr>
         <p:spPr>
           <a:xfrm>
-            <a:off x="9141251" y="2569078"/>
-            <a:ext cx="109860" cy="109860"/>
+            <a:off x="8780269" y="2771250"/>
+            <a:ext cx="57072" cy="57072"/>
           </a:xfrm>
           <a:prstGeom prst="ellipse">
             <a:avLst/>
           </a:prstGeom>
           <a:solidFill>
             <a:srgbClr val="1C7293">
-              <a:alpha val="38672"/>
+              <a:alpha val="70745"/>
             </a:srgbClr>
           </a:solidFill>
           <a:ln/>
@@ -7659,15 +11740,15 @@
         </p:nvSpPr>
         <p:spPr>
           <a:xfrm>
-            <a:off x="9025887" y="2813051"/>
-            <a:ext cx="36965" cy="36965"/>
+            <a:off x="9281784" y="2823825"/>
+            <a:ext cx="61174" cy="61174"/>
           </a:xfrm>
           <a:prstGeom prst="ellipse">
             <a:avLst/>
           </a:prstGeom>
           <a:solidFill>
             <a:srgbClr val="1C7293">
-              <a:alpha val="47967"/>
+              <a:alpha val="55583"/>
             </a:srgbClr>
           </a:solidFill>
           <a:ln/>
@@ -7681,15 +11762,15 @@
         </p:nvSpPr>
         <p:spPr>
           <a:xfrm>
-            <a:off x="9031563" y="2765293"/>
-            <a:ext cx="45258" cy="45258"/>
+            <a:off x="8985469" y="2361123"/>
+            <a:ext cx="97151" cy="97151"/>
           </a:xfrm>
           <a:prstGeom prst="ellipse">
             <a:avLst/>
           </a:prstGeom>
           <a:solidFill>
             <a:srgbClr val="1C7293">
-              <a:alpha val="75982"/>
+              <a:alpha val="37166"/>
             </a:srgbClr>
           </a:solidFill>
           <a:ln/>
@@ -7703,15 +11784,15 @@
         </p:nvSpPr>
         <p:spPr>
           <a:xfrm>
-            <a:off x="8588794" y="2791786"/>
-            <a:ext cx="113420" cy="113420"/>
+            <a:off x="9278442" y="2692735"/>
+            <a:ext cx="44197" cy="44197"/>
           </a:xfrm>
           <a:prstGeom prst="ellipse">
             <a:avLst/>
           </a:prstGeom>
           <a:solidFill>
             <a:srgbClr val="1C7293">
-              <a:alpha val="64621"/>
+              <a:alpha val="70989"/>
             </a:srgbClr>
           </a:solidFill>
           <a:ln/>
@@ -7725,15 +11806,15 @@
         </p:nvSpPr>
         <p:spPr>
           <a:xfrm>
-            <a:off x="8796560" y="2356629"/>
-            <a:ext cx="37081" cy="37081"/>
+            <a:off x="9369199" y="2484170"/>
+            <a:ext cx="78813" cy="78813"/>
           </a:xfrm>
           <a:prstGeom prst="ellipse">
             <a:avLst/>
           </a:prstGeom>
           <a:solidFill>
             <a:srgbClr val="1C7293">
-              <a:alpha val="44664"/>
+              <a:alpha val="64218"/>
             </a:srgbClr>
           </a:solidFill>
           <a:ln/>
@@ -7747,15 +11828,15 @@
         </p:nvSpPr>
         <p:spPr>
           <a:xfrm>
-            <a:off x="9205570" y="2476152"/>
-            <a:ext cx="74028" cy="74028"/>
+            <a:off x="9030868" y="2861124"/>
+            <a:ext cx="109002" cy="109002"/>
           </a:xfrm>
           <a:prstGeom prst="ellipse">
             <a:avLst/>
           </a:prstGeom>
           <a:solidFill>
             <a:srgbClr val="1C7293">
-              <a:alpha val="33364"/>
+              <a:alpha val="79241"/>
             </a:srgbClr>
           </a:solidFill>
           <a:ln/>
@@ -7769,15 +11850,15 @@
         </p:nvSpPr>
         <p:spPr>
           <a:xfrm>
-            <a:off x="8738734" y="2456349"/>
-            <a:ext cx="48823" cy="48823"/>
+            <a:off x="9360271" y="2660379"/>
+            <a:ext cx="48300" cy="48300"/>
           </a:xfrm>
           <a:prstGeom prst="ellipse">
             <a:avLst/>
           </a:prstGeom>
           <a:solidFill>
             <a:srgbClr val="1C7293">
-              <a:alpha val="34013"/>
+              <a:alpha val="62365"/>
             </a:srgbClr>
           </a:solidFill>
           <a:ln/>
@@ -7791,15 +11872,15 @@
         </p:nvSpPr>
         <p:spPr>
           <a:xfrm>
-            <a:off x="8693415" y="2486413"/>
-            <a:ext cx="77342" cy="77342"/>
+            <a:off x="9341234" y="2134503"/>
+            <a:ext cx="44204" cy="44204"/>
           </a:xfrm>
           <a:prstGeom prst="ellipse">
             <a:avLst/>
           </a:prstGeom>
           <a:solidFill>
             <a:srgbClr val="1C7293">
-              <a:alpha val="59718"/>
+              <a:alpha val="70673"/>
             </a:srgbClr>
           </a:solidFill>
           <a:ln/>
@@ -7813,15 +11894,15 @@
         </p:nvSpPr>
         <p:spPr>
           <a:xfrm>
-            <a:off x="9235014" y="2214720"/>
-            <a:ext cx="108976" cy="108976"/>
+            <a:off x="8588451" y="2837540"/>
+            <a:ext cx="48957" cy="48957"/>
           </a:xfrm>
           <a:prstGeom prst="ellipse">
             <a:avLst/>
           </a:prstGeom>
           <a:solidFill>
             <a:srgbClr val="1C7293">
-              <a:alpha val="64435"/>
+              <a:alpha val="63630"/>
             </a:srgbClr>
           </a:solidFill>
           <a:ln/>
@@ -7835,15 +11916,15 @@
         </p:nvSpPr>
         <p:spPr>
           <a:xfrm>
-            <a:off x="8714875" y="2914805"/>
-            <a:ext cx="107097" cy="107097"/>
+            <a:off x="9162563" y="2370767"/>
+            <a:ext cx="106202" cy="106202"/>
           </a:xfrm>
           <a:prstGeom prst="ellipse">
             <a:avLst/>
           </a:prstGeom>
           <a:solidFill>
             <a:srgbClr val="1C7293">
-              <a:alpha val="38813"/>
+              <a:alpha val="37871"/>
             </a:srgbClr>
           </a:solidFill>
           <a:ln/>
@@ -7857,15 +11938,15 @@
         </p:nvSpPr>
         <p:spPr>
           <a:xfrm>
-            <a:off x="8702479" y="2293412"/>
-            <a:ext cx="84585" cy="84585"/>
+            <a:off x="8826019" y="2303064"/>
+            <a:ext cx="89214" cy="89214"/>
           </a:xfrm>
           <a:prstGeom prst="ellipse">
             <a:avLst/>
           </a:prstGeom>
           <a:solidFill>
             <a:srgbClr val="1C7293">
-              <a:alpha val="54083"/>
+              <a:alpha val="46039"/>
             </a:srgbClr>
           </a:solidFill>
           <a:ln/>
@@ -7879,15 +11960,15 @@
         </p:nvSpPr>
         <p:spPr>
           <a:xfrm>
-            <a:off x="9008657" y="2228742"/>
-            <a:ext cx="87691" cy="87691"/>
+            <a:off x="9184340" y="2864006"/>
+            <a:ext cx="59358" cy="59358"/>
           </a:xfrm>
           <a:prstGeom prst="ellipse">
             <a:avLst/>
           </a:prstGeom>
           <a:solidFill>
             <a:srgbClr val="1C7293">
-              <a:alpha val="38403"/>
+              <a:alpha val="78289"/>
             </a:srgbClr>
           </a:solidFill>
           <a:ln/>
@@ -7901,15 +11982,15 @@
         </p:nvSpPr>
         <p:spPr>
           <a:xfrm>
-            <a:off x="9282992" y="2778864"/>
-            <a:ext cx="78514" cy="78514"/>
+            <a:off x="8665172" y="2622367"/>
+            <a:ext cx="107769" cy="107769"/>
           </a:xfrm>
           <a:prstGeom prst="ellipse">
             <a:avLst/>
           </a:prstGeom>
           <a:solidFill>
             <a:srgbClr val="1C7293">
-              <a:alpha val="73742"/>
+              <a:alpha val="76043"/>
             </a:srgbClr>
           </a:solidFill>
           <a:ln/>
@@ -7923,15 +12004,15 @@
         </p:nvSpPr>
         <p:spPr>
           <a:xfrm>
-            <a:off x="9112880" y="2548786"/>
-            <a:ext cx="108275" cy="108275"/>
+            <a:off x="9034665" y="2863426"/>
+            <a:ext cx="94629" cy="94629"/>
           </a:xfrm>
           <a:prstGeom prst="ellipse">
             <a:avLst/>
           </a:prstGeom>
           <a:solidFill>
             <a:srgbClr val="1C7293">
-              <a:alpha val="79205"/>
+              <a:alpha val="75783"/>
             </a:srgbClr>
           </a:solidFill>
           <a:ln/>
@@ -7945,15 +12026,15 @@
         </p:nvSpPr>
         <p:spPr>
           <a:xfrm>
-            <a:off x="8650539" y="2518083"/>
-            <a:ext cx="106684" cy="106684"/>
+            <a:off x="9165839" y="2922617"/>
+            <a:ext cx="93659" cy="93659"/>
           </a:xfrm>
           <a:prstGeom prst="ellipse">
             <a:avLst/>
           </a:prstGeom>
           <a:solidFill>
             <a:srgbClr val="1C7293">
-              <a:alpha val="50499"/>
+              <a:alpha val="51479"/>
             </a:srgbClr>
           </a:solidFill>
           <a:ln/>
@@ -7967,15 +12048,15 @@
         </p:nvSpPr>
         <p:spPr>
           <a:xfrm>
-            <a:off x="9189804" y="2547317"/>
-            <a:ext cx="39358" cy="39358"/>
+            <a:off x="9044587" y="2297003"/>
+            <a:ext cx="83969" cy="83969"/>
           </a:xfrm>
           <a:prstGeom prst="ellipse">
             <a:avLst/>
           </a:prstGeom>
           <a:solidFill>
             <a:srgbClr val="1C7293">
-              <a:alpha val="40163"/>
+              <a:alpha val="43669"/>
             </a:srgbClr>
           </a:solidFill>
           <a:ln/>
@@ -7989,15 +12070,15 @@
         </p:nvSpPr>
         <p:spPr>
           <a:xfrm>
-            <a:off x="9168107" y="2589035"/>
-            <a:ext cx="109884" cy="109884"/>
+            <a:off x="9254962" y="2812379"/>
+            <a:ext cx="50027" cy="50027"/>
           </a:xfrm>
           <a:prstGeom prst="ellipse">
             <a:avLst/>
           </a:prstGeom>
           <a:solidFill>
             <a:srgbClr val="1C7293">
-              <a:alpha val="34634"/>
+              <a:alpha val="66462"/>
             </a:srgbClr>
           </a:solidFill>
           <a:ln/>
@@ -8011,15 +12092,15 @@
         </p:nvSpPr>
         <p:spPr>
           <a:xfrm>
-            <a:off x="9247322" y="2501250"/>
-            <a:ext cx="104077" cy="104077"/>
+            <a:off x="8659972" y="2369239"/>
+            <a:ext cx="118394" cy="118394"/>
           </a:xfrm>
           <a:prstGeom prst="ellipse">
             <a:avLst/>
           </a:prstGeom>
           <a:solidFill>
             <a:srgbClr val="1C7293">
-              <a:alpha val="76251"/>
+              <a:alpha val="43685"/>
             </a:srgbClr>
           </a:solidFill>
           <a:ln/>
@@ -8033,15 +12114,15 @@
         </p:nvSpPr>
         <p:spPr>
           <a:xfrm>
-            <a:off x="8602349" y="2807771"/>
-            <a:ext cx="59265" cy="59265"/>
+            <a:off x="8674159" y="2123983"/>
+            <a:ext cx="101081" cy="101081"/>
           </a:xfrm>
           <a:prstGeom prst="ellipse">
             <a:avLst/>
           </a:prstGeom>
           <a:solidFill>
             <a:srgbClr val="1C7293">
-              <a:alpha val="73857"/>
+              <a:alpha val="77502"/>
             </a:srgbClr>
           </a:solidFill>
           <a:ln/>
@@ -8055,15 +12136,15 @@
         </p:nvSpPr>
         <p:spPr>
           <a:xfrm>
-            <a:off x="8686937" y="2437856"/>
-            <a:ext cx="43659" cy="43659"/>
+            <a:off x="9235945" y="2183922"/>
+            <a:ext cx="109262" cy="109262"/>
           </a:xfrm>
           <a:prstGeom prst="ellipse">
             <a:avLst/>
           </a:prstGeom>
           <a:solidFill>
             <a:srgbClr val="1C7293">
-              <a:alpha val="53480"/>
+              <a:alpha val="37252"/>
             </a:srgbClr>
           </a:solidFill>
           <a:ln/>
@@ -8145,15 +12226,15 @@
         </p:nvSpPr>
         <p:spPr>
           <a:xfrm>
-            <a:off x="9978048" y="2458941"/>
-            <a:ext cx="115355" cy="115355"/>
+            <a:off x="10500263" y="2691956"/>
+            <a:ext cx="51653" cy="51653"/>
           </a:xfrm>
           <a:prstGeom prst="ellipse">
             <a:avLst/>
           </a:prstGeom>
           <a:solidFill>
             <a:srgbClr val="1C7293">
-              <a:alpha val="79597"/>
+              <a:alpha val="77761"/>
             </a:srgbClr>
           </a:solidFill>
           <a:ln/>
@@ -8167,15 +12248,15 @@
         </p:nvSpPr>
         <p:spPr>
           <a:xfrm>
-            <a:off x="10185631" y="2298200"/>
-            <a:ext cx="88582" cy="88582"/>
+            <a:off x="10179938" y="2454812"/>
+            <a:ext cx="104980" cy="104980"/>
           </a:xfrm>
           <a:prstGeom prst="ellipse">
             <a:avLst/>
           </a:prstGeom>
           <a:solidFill>
             <a:srgbClr val="1C7293">
-              <a:alpha val="65280"/>
+              <a:alpha val="77042"/>
             </a:srgbClr>
           </a:solidFill>
           <a:ln/>
@@ -8189,15 +12270,15 @@
         </p:nvSpPr>
         <p:spPr>
           <a:xfrm>
-            <a:off x="10477480" y="2265682"/>
-            <a:ext cx="56709" cy="56709"/>
+            <a:off x="9793782" y="2351539"/>
+            <a:ext cx="40578" cy="40578"/>
           </a:xfrm>
           <a:prstGeom prst="ellipse">
             <a:avLst/>
           </a:prstGeom>
           <a:solidFill>
             <a:srgbClr val="1C7293">
-              <a:alpha val="47262"/>
+              <a:alpha val="74307"/>
             </a:srgbClr>
           </a:solidFill>
           <a:ln/>
@@ -8211,15 +12292,15 @@
         </p:nvSpPr>
         <p:spPr>
           <a:xfrm>
-            <a:off x="10129604" y="2753540"/>
-            <a:ext cx="103721" cy="103721"/>
+            <a:off x="9780759" y="2634700"/>
+            <a:ext cx="96545" cy="96545"/>
           </a:xfrm>
           <a:prstGeom prst="ellipse">
             <a:avLst/>
           </a:prstGeom>
           <a:solidFill>
             <a:srgbClr val="1C7293">
-              <a:alpha val="76937"/>
+              <a:alpha val="71651"/>
             </a:srgbClr>
           </a:solidFill>
           <a:ln/>
@@ -8233,15 +12314,15 @@
         </p:nvSpPr>
         <p:spPr>
           <a:xfrm>
-            <a:off x="10056920" y="2564811"/>
-            <a:ext cx="70510" cy="70510"/>
+            <a:off x="10017442" y="2826121"/>
+            <a:ext cx="112198" cy="112198"/>
           </a:xfrm>
           <a:prstGeom prst="ellipse">
             <a:avLst/>
           </a:prstGeom>
           <a:solidFill>
             <a:srgbClr val="1C7293">
-              <a:alpha val="42346"/>
+              <a:alpha val="52562"/>
             </a:srgbClr>
           </a:solidFill>
           <a:ln/>
@@ -8255,15 +12336,15 @@
         </p:nvSpPr>
         <p:spPr>
           <a:xfrm>
-            <a:off x="10474914" y="2879678"/>
-            <a:ext cx="86728" cy="86728"/>
+            <a:off x="10418996" y="2688488"/>
+            <a:ext cx="83672" cy="83672"/>
           </a:xfrm>
           <a:prstGeom prst="ellipse">
             <a:avLst/>
           </a:prstGeom>
           <a:solidFill>
             <a:srgbClr val="1C7293">
-              <a:alpha val="64240"/>
+              <a:alpha val="75286"/>
             </a:srgbClr>
           </a:solidFill>
           <a:ln/>
@@ -8277,15 +12358,15 @@
         </p:nvSpPr>
         <p:spPr>
           <a:xfrm>
-            <a:off x="9815050" y="2325433"/>
-            <a:ext cx="59922" cy="59922"/>
+            <a:off x="10556795" y="2159224"/>
+            <a:ext cx="51729" cy="51729"/>
           </a:xfrm>
           <a:prstGeom prst="ellipse">
             <a:avLst/>
           </a:prstGeom>
           <a:solidFill>
             <a:srgbClr val="1C7293">
-              <a:alpha val="45562"/>
+              <a:alpha val="73975"/>
             </a:srgbClr>
           </a:solidFill>
           <a:ln/>
@@ -8299,15 +12380,15 @@
         </p:nvSpPr>
         <p:spPr>
           <a:xfrm>
-            <a:off x="10211722" y="2207669"/>
-            <a:ext cx="96658" cy="96658"/>
+            <a:off x="10402445" y="2426127"/>
+            <a:ext cx="88621" cy="88621"/>
           </a:xfrm>
           <a:prstGeom prst="ellipse">
             <a:avLst/>
           </a:prstGeom>
           <a:solidFill>
             <a:srgbClr val="1C7293">
-              <a:alpha val="39784"/>
+              <a:alpha val="36467"/>
             </a:srgbClr>
           </a:solidFill>
           <a:ln/>
@@ -8321,15 +12402,15 @@
         </p:nvSpPr>
         <p:spPr>
           <a:xfrm>
-            <a:off x="9787331" y="2182535"/>
-            <a:ext cx="87282" cy="87282"/>
+            <a:off x="10494472" y="2176176"/>
+            <a:ext cx="58023" cy="58023"/>
           </a:xfrm>
           <a:prstGeom prst="ellipse">
             <a:avLst/>
           </a:prstGeom>
           <a:solidFill>
             <a:srgbClr val="1C7293">
-              <a:alpha val="65070"/>
+              <a:alpha val="79848"/>
             </a:srgbClr>
           </a:solidFill>
           <a:ln/>
@@ -8343,15 +12424,15 @@
         </p:nvSpPr>
         <p:spPr>
           <a:xfrm>
-            <a:off x="10527090" y="2433787"/>
-            <a:ext cx="109296" cy="109296"/>
+            <a:off x="9881516" y="2313298"/>
+            <a:ext cx="62090" cy="62090"/>
           </a:xfrm>
           <a:prstGeom prst="ellipse">
             <a:avLst/>
           </a:prstGeom>
           <a:solidFill>
             <a:srgbClr val="1C7293">
-              <a:alpha val="40318"/>
+              <a:alpha val="31177"/>
             </a:srgbClr>
           </a:solidFill>
           <a:ln/>
@@ -8365,15 +12446,15 @@
         </p:nvSpPr>
         <p:spPr>
           <a:xfrm>
-            <a:off x="9917032" y="2269605"/>
-            <a:ext cx="68949" cy="68949"/>
+            <a:off x="9889774" y="2859548"/>
+            <a:ext cx="117131" cy="117131"/>
           </a:xfrm>
           <a:prstGeom prst="ellipse">
             <a:avLst/>
           </a:prstGeom>
           <a:solidFill>
             <a:srgbClr val="1C7293">
-              <a:alpha val="67078"/>
+              <a:alpha val="56454"/>
             </a:srgbClr>
           </a:solidFill>
           <a:ln/>
@@ -8387,15 +12468,15 @@
         </p:nvSpPr>
         <p:spPr>
           <a:xfrm>
-            <a:off x="10485088" y="2568974"/>
-            <a:ext cx="110966" cy="110966"/>
+            <a:off x="10400463" y="2469219"/>
+            <a:ext cx="64132" cy="64132"/>
           </a:xfrm>
           <a:prstGeom prst="ellipse">
             <a:avLst/>
           </a:prstGeom>
           <a:solidFill>
             <a:srgbClr val="1C7293">
-              <a:alpha val="60626"/>
+              <a:alpha val="50799"/>
             </a:srgbClr>
           </a:solidFill>
           <a:ln/>
@@ -8409,15 +12490,15 @@
         </p:nvSpPr>
         <p:spPr>
           <a:xfrm>
-            <a:off x="9791406" y="2534598"/>
-            <a:ext cx="58146" cy="58146"/>
+            <a:off x="10164420" y="2797347"/>
+            <a:ext cx="58967" cy="58967"/>
           </a:xfrm>
           <a:prstGeom prst="ellipse">
             <a:avLst/>
           </a:prstGeom>
           <a:solidFill>
             <a:srgbClr val="1C7293">
-              <a:alpha val="40186"/>
+              <a:alpha val="33282"/>
             </a:srgbClr>
           </a:solidFill>
           <a:ln/>
@@ -8431,15 +12512,15 @@
         </p:nvSpPr>
         <p:spPr>
           <a:xfrm>
-            <a:off x="9785432" y="2817914"/>
-            <a:ext cx="96109" cy="96109"/>
+            <a:off x="10288092" y="2909392"/>
+            <a:ext cx="98124" cy="98124"/>
           </a:xfrm>
           <a:prstGeom prst="ellipse">
             <a:avLst/>
           </a:prstGeom>
           <a:solidFill>
             <a:srgbClr val="1C7293">
-              <a:alpha val="59592"/>
+              <a:alpha val="53794"/>
             </a:srgbClr>
           </a:solidFill>
           <a:ln/>
@@ -8453,15 +12534,15 @@
         </p:nvSpPr>
         <p:spPr>
           <a:xfrm>
-            <a:off x="10439341" y="2784637"/>
-            <a:ext cx="45552" cy="45552"/>
+            <a:off x="9954466" y="2905937"/>
+            <a:ext cx="50304" cy="50304"/>
           </a:xfrm>
           <a:prstGeom prst="ellipse">
             <a:avLst/>
           </a:prstGeom>
           <a:solidFill>
             <a:srgbClr val="1C7293">
-              <a:alpha val="30008"/>
+              <a:alpha val="61791"/>
             </a:srgbClr>
           </a:solidFill>
           <a:ln/>
@@ -8475,15 +12556,15 @@
         </p:nvSpPr>
         <p:spPr>
           <a:xfrm>
-            <a:off x="10314410" y="2523353"/>
-            <a:ext cx="64853" cy="64853"/>
+            <a:off x="10323018" y="2716490"/>
+            <a:ext cx="78586" cy="78586"/>
           </a:xfrm>
           <a:prstGeom prst="ellipse">
             <a:avLst/>
           </a:prstGeom>
           <a:solidFill>
             <a:srgbClr val="1C7293">
-              <a:alpha val="40658"/>
+              <a:alpha val="67616"/>
             </a:srgbClr>
           </a:solidFill>
           <a:ln/>
@@ -8565,15 +12646,15 @@
         </p:nvSpPr>
         <p:spPr>
           <a:xfrm>
-            <a:off x="11101110" y="2403598"/>
-            <a:ext cx="67791" cy="67791"/>
+            <a:off x="11245246" y="2539817"/>
+            <a:ext cx="85100" cy="85100"/>
           </a:xfrm>
           <a:prstGeom prst="ellipse">
             <a:avLst/>
           </a:prstGeom>
           <a:solidFill>
             <a:srgbClr val="1C7293">
-              <a:alpha val="76986"/>
+              <a:alpha val="51159"/>
             </a:srgbClr>
           </a:solidFill>
           <a:ln/>
@@ -8587,15 +12668,15 @@
         </p:nvSpPr>
         <p:spPr>
           <a:xfrm>
-            <a:off x="11533701" y="2248276"/>
-            <a:ext cx="38617" cy="38617"/>
+            <a:off x="11274697" y="2740922"/>
+            <a:ext cx="117376" cy="117376"/>
           </a:xfrm>
           <a:prstGeom prst="ellipse">
             <a:avLst/>
           </a:prstGeom>
           <a:solidFill>
             <a:srgbClr val="1C7293">
-              <a:alpha val="47818"/>
+              <a:alpha val="52777"/>
             </a:srgbClr>
           </a:solidFill>
           <a:ln/>
@@ -8609,15 +12690,15 @@
         </p:nvSpPr>
         <p:spPr>
           <a:xfrm>
-            <a:off x="11273784" y="2395501"/>
-            <a:ext cx="68691" cy="68691"/>
+            <a:off x="11309539" y="2431835"/>
+            <a:ext cx="84872" cy="84872"/>
           </a:xfrm>
           <a:prstGeom prst="ellipse">
             <a:avLst/>
           </a:prstGeom>
           <a:solidFill>
             <a:srgbClr val="1C7293">
-              <a:alpha val="67710"/>
+              <a:alpha val="45006"/>
             </a:srgbClr>
           </a:solidFill>
           <a:ln/>
@@ -8631,15 +12712,15 @@
         </p:nvSpPr>
         <p:spPr>
           <a:xfrm>
-            <a:off x="11161749" y="2842340"/>
-            <a:ext cx="65172" cy="65172"/>
+            <a:off x="11659947" y="2157726"/>
+            <a:ext cx="74750" cy="74750"/>
           </a:xfrm>
           <a:prstGeom prst="ellipse">
             <a:avLst/>
           </a:prstGeom>
           <a:solidFill>
             <a:srgbClr val="1C7293">
-              <a:alpha val="52593"/>
+              <a:alpha val="52726"/>
             </a:srgbClr>
           </a:solidFill>
           <a:ln/>
@@ -8653,15 +12734,15 @@
         </p:nvSpPr>
         <p:spPr>
           <a:xfrm>
-            <a:off x="11743173" y="2120996"/>
-            <a:ext cx="37322" cy="37322"/>
+            <a:off x="11491929" y="2749021"/>
+            <a:ext cx="106535" cy="106535"/>
           </a:xfrm>
           <a:prstGeom prst="ellipse">
             <a:avLst/>
           </a:prstGeom>
           <a:solidFill>
             <a:srgbClr val="1C7293">
-              <a:alpha val="46576"/>
+              <a:alpha val="70219"/>
             </a:srgbClr>
           </a:solidFill>
           <a:ln/>
@@ -8742,6 +12823,45 @@
               <a:t>← de plus en plus parcimonieux</a:t>
             </a:r>
             <a:endParaRPr lang="en-US" sz="1200" dirty="0"/>
+          </a:p>
+        </p:txBody>
+      </p:sp>
+      <p:sp>
+        <p:nvSpPr>
+          <p:cNvPr id="83" name="Text 81"/>
+          <p:cNvSpPr txBox="1"/>
+          <p:nvPr/>
+        </p:nvSpPr>
+        <p:spPr>
+          <a:xfrm>
+            <a:off x="548640" y="5120640"/>
+            <a:ext cx="11064240" cy="548640"/>
+          </a:xfrm>
+          <a:prstGeom prst="rect">
+            <a:avLst/>
+          </a:prstGeom>
+          <a:noFill/>
+          <a:ln/>
+        </p:spPr>
+        <p:txBody>
+          <a:bodyPr wrap="square" lIns="0" tIns="0" rIns="0" bIns="0" rtlCol="0" anchor="ctr"/>
+          <a:lstStyle/>
+          <a:p>
+            <a:pPr indent="0" marL="0">
+              <a:buNone/>
+            </a:pPr>
+            <a:r>
+              <a:rPr lang="en-US" sz="1300" i="1" dirty="0">
+                <a:solidFill>
+                  <a:srgbClr val="6B7B84"/>
+                </a:solidFill>
+                <a:latin typeface="Calibri" pitchFamily="34" charset="0"/>
+                <a:ea typeface="Calibri" pitchFamily="34" charset="-122"/>
+                <a:cs typeface="Calibri" pitchFamily="34" charset="-120"/>
+              </a:rPr>
+              <a:t>Pourquoi : sur 310 nodules de test, l'écart-type entre seeds (≈ 0.02 AUC) est du même ordre que les effets recherchés.</a:t>
+            </a:r>
+            <a:endParaRPr lang="en-US" sz="1300" dirty="0"/>
           </a:p>
         </p:txBody>
       </p:sp>
@@ -8810,7 +12930,7 @@
                 <a:ea typeface="Cambria" pitchFamily="34" charset="-122"/>
                 <a:cs typeface="Cambria" pitchFamily="34" charset="-120"/>
               </a:rPr>
-              <a:t>Résultats — courbes de robustesse (AUC test)</a:t>
+              <a:t>Baselines sur 5 seeds — ce qui change</a:t>
             </a:r>
             <a:endParaRPr lang="en-US" sz="3200" dirty="0"/>
           </a:p>
@@ -8940,7 +13060,7 @@
                 <a:ea typeface="Calibri" pitchFamily="34" charset="-122"/>
                 <a:cs typeface="Calibri" pitchFamily="34" charset="-120"/>
               </a:rPr>
-              <a:t>Les deux modèles chutent : AUC 0.80 → 0.57 quand on passe de 1024 à 16 points.</a:t>
+              <a:t>1ʳᵉ moitié (1 seed) : student 0.810 vs teacher 0.791. Sur 5 seeds : 0.763 vs 0.765 → égalité.</a:t>
             </a:r>
             <a:endParaRPr lang="en-US" sz="1300" dirty="0"/>
           </a:p>
@@ -8964,7 +13084,7 @@
                 <a:ea typeface="Calibri" pitchFamily="34" charset="-122"/>
                 <a:cs typeface="Calibri" pitchFamily="34" charset="-120"/>
               </a:rPr>
-              <a:t>Le student (54k) égale le teacher (0.8M) à pleine densité.</a:t>
+              <a:t>Le student est ~3× plus instable (σ 0.028 vs 0.008).</a:t>
             </a:r>
             <a:endParaRPr lang="en-US" sz="1300" dirty="0"/>
           </a:p>
@@ -8988,7 +13108,7 @@
                 <a:ea typeface="Calibri" pitchFamily="34" charset="-122"/>
                 <a:cs typeface="Calibri" pitchFamily="34" charset="-120"/>
               </a:rPr>
-              <a:t>Mais le teacher reste meilleur en sparsité extrême (64 pts : 0.708 vs 0.677).</a:t>
+              <a:t>L'avantage du teacher n'existe qu'à ≤ 32 pts (16 pts : 0.605 vs 0.585) — un signal faible à transférer.</a:t>
             </a:r>
             <a:endParaRPr lang="en-US" sz="1300" dirty="0"/>
           </a:p>
@@ -9059,7 +13179,7 @@
                 <a:ea typeface="Cambria" pitchFamily="34" charset="-122"/>
                 <a:cs typeface="Cambria" pitchFamily="34" charset="-120"/>
               </a:rPr>
-              <a:t>Analyse critique</a:t>
+              <a:t>Distillation — 6 variantes, une seule boucle</a:t>
             </a:r>
             <a:endParaRPr lang="en-US" sz="3200" dirty="0"/>
           </a:p>
@@ -9073,12 +13193,12 @@
         </p:nvSpPr>
         <p:spPr>
           <a:xfrm>
-            <a:off x="548640" y="1508760"/>
-            <a:ext cx="11064240" cy="1325880"/>
+            <a:off x="548640" y="1554480"/>
+            <a:ext cx="3566160" cy="1920240"/>
           </a:xfrm>
           <a:prstGeom prst="roundRect">
             <a:avLst>
-              <a:gd name="adj" fmla="val 6207"/>
+              <a:gd name="adj" fmla="val 4286"/>
             </a:avLst>
           </a:prstGeom>
           <a:solidFill>
@@ -9096,14 +13216,34 @@
       </p:sp>
       <p:sp>
         <p:nvSpPr>
-          <p:cNvPr id="4" name="Text 2"/>
+          <p:cNvPr id="4" name="Shape 2"/>
+          <p:cNvSpPr/>
+          <p:nvPr/>
+        </p:nvSpPr>
+        <p:spPr>
+          <a:xfrm>
+            <a:off x="777240" y="1810512"/>
+            <a:ext cx="530352" cy="530352"/>
+          </a:xfrm>
+          <a:prstGeom prst="ellipse">
+            <a:avLst/>
+          </a:prstGeom>
+          <a:solidFill>
+            <a:srgbClr val="1C7293"/>
+          </a:solidFill>
+          <a:ln/>
+        </p:spPr>
+      </p:sp>
+      <p:sp>
+        <p:nvSpPr>
+          <p:cNvPr id="5" name="Text 3"/>
           <p:cNvSpPr txBox="1"/>
           <p:nvPr/>
         </p:nvSpPr>
         <p:spPr>
           <a:xfrm>
-            <a:off x="868680" y="1764792"/>
-            <a:ext cx="822960" cy="822960"/>
+            <a:off x="777240" y="1810512"/>
+            <a:ext cx="530352" cy="530352"/>
           </a:xfrm>
           <a:prstGeom prst="rect">
             <a:avLst/>
@@ -9119,9 +13259,9 @@
               <a:buNone/>
             </a:pPr>
             <a:r>
-              <a:rPr lang="en-US" sz="3000" b="1" dirty="0">
-                <a:solidFill>
-                  <a:srgbClr val="1C7293"/>
+              <a:rPr lang="en-US" sz="1800" b="1" dirty="0">
+                <a:solidFill>
+                  <a:srgbClr val="FFFFFF"/>
                 </a:solidFill>
                 <a:latin typeface="Cambria" pitchFamily="34" charset="0"/>
                 <a:ea typeface="Cambria" pitchFamily="34" charset="-122"/>
@@ -9129,20 +13269,20 @@
               </a:rPr>
               <a:t>1</a:t>
             </a:r>
-            <a:endParaRPr lang="en-US" sz="3000" dirty="0"/>
-          </a:p>
-        </p:txBody>
-      </p:sp>
-      <p:sp>
-        <p:nvSpPr>
-          <p:cNvPr id="5" name="Text 3"/>
+            <a:endParaRPr lang="en-US" sz="1800" dirty="0"/>
+          </a:p>
+        </p:txBody>
+      </p:sp>
+      <p:sp>
+        <p:nvSpPr>
+          <p:cNvPr id="6" name="Text 4"/>
           <p:cNvSpPr txBox="1"/>
           <p:nvPr/>
         </p:nvSpPr>
         <p:spPr>
           <a:xfrm>
-            <a:off x="1828800" y="1664208"/>
-            <a:ext cx="9509760" cy="457200"/>
+            <a:off x="1463040" y="1801368"/>
+            <a:ext cx="2560320" cy="548640"/>
           </a:xfrm>
           <a:prstGeom prst="rect">
             <a:avLst/>
@@ -9158,30 +13298,30 @@
               <a:buNone/>
             </a:pPr>
             <a:r>
-              <a:rPr lang="en-US" sz="1800" b="1" dirty="0">
-                <a:solidFill>
-                  <a:srgbClr val="16323D"/>
+              <a:rPr lang="en-US" sz="1550" b="1" dirty="0">
+                <a:solidFill>
+                  <a:srgbClr val="0B3C5D"/>
                 </a:solidFill>
                 <a:latin typeface="Cambria" pitchFamily="34" charset="0"/>
                 <a:ea typeface="Cambria" pitchFamily="34" charset="-122"/>
                 <a:cs typeface="Cambria" pitchFamily="34" charset="-120"/>
               </a:rPr>
-              <a:t>Le phénomène est réel</a:t>
-            </a:r>
-            <a:endParaRPr lang="en-US" sz="1800" dirty="0"/>
-          </a:p>
-        </p:txBody>
-      </p:sp>
-      <p:sp>
-        <p:nvSpPr>
-          <p:cNvPr id="6" name="Text 4"/>
+              <a:t>scratch</a:t>
+            </a:r>
+            <a:endParaRPr lang="en-US" sz="1550" dirty="0"/>
+          </a:p>
+        </p:txBody>
+      </p:sp>
+      <p:sp>
+        <p:nvSpPr>
+          <p:cNvPr id="7" name="Text 5"/>
           <p:cNvSpPr txBox="1"/>
           <p:nvPr/>
         </p:nvSpPr>
         <p:spPr>
           <a:xfrm>
-            <a:off x="1828800" y="2103120"/>
-            <a:ext cx="9601200" cy="658368"/>
+            <a:off x="822960" y="2468880"/>
+            <a:ext cx="3108960" cy="914400"/>
           </a:xfrm>
           <a:prstGeom prst="rect">
             <a:avLst/>
@@ -9195,39 +13335,39 @@
           <a:p>
             <a:pPr indent="0" marL="0">
               <a:lnSpc>
-                <a:spcPct val="103000"/>
+                <a:spcPct val="105000"/>
               </a:lnSpc>
               <a:buNone/>
             </a:pPr>
             <a:r>
-              <a:rPr lang="en-US" sz="1400" dirty="0">
-                <a:solidFill>
-                  <a:srgbClr val="33474F"/>
+              <a:rPr lang="en-US" sz="1250" dirty="0">
+                <a:solidFill>
+                  <a:srgbClr val="16323D"/>
                 </a:solidFill>
                 <a:latin typeface="Calibri" pitchFamily="34" charset="0"/>
                 <a:ea typeface="Calibri" pitchFamily="34" charset="-122"/>
                 <a:cs typeface="Calibri" pitchFamily="34" charset="-120"/>
               </a:rPr>
-              <a:t>L'AUC chute de ~0.80 (1024 pts) à ~0.57 (16 pts) pour les deux modèles — terrain de jeu idéal pour la KD.</a:t>
-            </a:r>
-            <a:endParaRPr lang="en-US" sz="1400" dirty="0"/>
-          </a:p>
-        </p:txBody>
-      </p:sp>
-      <p:sp>
-        <p:nvSpPr>
-          <p:cNvPr id="7" name="Shape 5"/>
-          <p:cNvSpPr/>
-          <p:nvPr/>
-        </p:nvSpPr>
-        <p:spPr>
-          <a:xfrm>
-            <a:off x="548640" y="2990088"/>
-            <a:ext cx="11064240" cy="1325880"/>
+              <a:t>CE seule, nuages denses</a:t>
+            </a:r>
+            <a:endParaRPr lang="en-US" sz="1250" dirty="0"/>
+          </a:p>
+        </p:txBody>
+      </p:sp>
+      <p:sp>
+        <p:nvSpPr>
+          <p:cNvPr id="8" name="Shape 6"/>
+          <p:cNvSpPr/>
+          <p:nvPr/>
+        </p:nvSpPr>
+        <p:spPr>
+          <a:xfrm>
+            <a:off x="4297680" y="1554480"/>
+            <a:ext cx="3566160" cy="1920240"/>
           </a:xfrm>
           <a:prstGeom prst="roundRect">
             <a:avLst>
-              <a:gd name="adj" fmla="val 6207"/>
+              <a:gd name="adj" fmla="val 4286"/>
             </a:avLst>
           </a:prstGeom>
           <a:solidFill>
@@ -9245,14 +13385,34 @@
       </p:sp>
       <p:sp>
         <p:nvSpPr>
-          <p:cNvPr id="8" name="Text 6"/>
+          <p:cNvPr id="9" name="Shape 7"/>
+          <p:cNvSpPr/>
+          <p:nvPr/>
+        </p:nvSpPr>
+        <p:spPr>
+          <a:xfrm>
+            <a:off x="4526280" y="1810512"/>
+            <a:ext cx="530352" cy="530352"/>
+          </a:xfrm>
+          <a:prstGeom prst="ellipse">
+            <a:avLst/>
+          </a:prstGeom>
+          <a:solidFill>
+            <a:srgbClr val="E76F51"/>
+          </a:solidFill>
+          <a:ln/>
+        </p:spPr>
+      </p:sp>
+      <p:sp>
+        <p:nvSpPr>
+          <p:cNvPr id="10" name="Text 8"/>
           <p:cNvSpPr txBox="1"/>
           <p:nvPr/>
         </p:nvSpPr>
         <p:spPr>
           <a:xfrm>
-            <a:off x="868680" y="3246120"/>
-            <a:ext cx="822960" cy="822960"/>
+            <a:off x="4526280" y="1810512"/>
+            <a:ext cx="530352" cy="530352"/>
           </a:xfrm>
           <a:prstGeom prst="rect">
             <a:avLst/>
@@ -9268,9 +13428,9 @@
               <a:buNone/>
             </a:pPr>
             <a:r>
-              <a:rPr lang="en-US" sz="3000" b="1" dirty="0">
-                <a:solidFill>
-                  <a:srgbClr val="E76F51"/>
+              <a:rPr lang="en-US" sz="1800" b="1" dirty="0">
+                <a:solidFill>
+                  <a:srgbClr val="FFFFFF"/>
                 </a:solidFill>
                 <a:latin typeface="Cambria" pitchFamily="34" charset="0"/>
                 <a:ea typeface="Cambria" pitchFamily="34" charset="-122"/>
@@ -9278,20 +13438,20 @@
               </a:rPr>
               <a:t>2</a:t>
             </a:r>
-            <a:endParaRPr lang="en-US" sz="3000" dirty="0"/>
-          </a:p>
-        </p:txBody>
-      </p:sp>
-      <p:sp>
-        <p:nvSpPr>
-          <p:cNvPr id="9" name="Text 7"/>
+            <a:endParaRPr lang="en-US" sz="1800" dirty="0"/>
+          </a:p>
+        </p:txBody>
+      </p:sp>
+      <p:sp>
+        <p:nvSpPr>
+          <p:cNvPr id="11" name="Text 9"/>
           <p:cNvSpPr txBox="1"/>
           <p:nvPr/>
         </p:nvSpPr>
         <p:spPr>
           <a:xfrm>
-            <a:off x="1828800" y="3145536"/>
-            <a:ext cx="9509760" cy="457200"/>
+            <a:off x="5212080" y="1801368"/>
+            <a:ext cx="2560320" cy="548640"/>
           </a:xfrm>
           <a:prstGeom prst="rect">
             <a:avLst/>
@@ -9307,30 +13467,30 @@
               <a:buNone/>
             </a:pPr>
             <a:r>
-              <a:rPr lang="en-US" sz="1800" b="1" dirty="0">
-                <a:solidFill>
-                  <a:srgbClr val="16323D"/>
+              <a:rPr lang="en-US" sz="1550" b="1" dirty="0">
+                <a:solidFill>
+                  <a:srgbClr val="0B3C5D"/>
                 </a:solidFill>
                 <a:latin typeface="Cambria" pitchFamily="34" charset="0"/>
                 <a:ea typeface="Cambria" pitchFamily="34" charset="-122"/>
                 <a:cs typeface="Cambria" pitchFamily="34" charset="-120"/>
               </a:rPr>
-              <a:t>Surprise honnête</a:t>
-            </a:r>
-            <a:endParaRPr lang="en-US" sz="1800" dirty="0"/>
-          </a:p>
-        </p:txBody>
-      </p:sp>
-      <p:sp>
-        <p:nvSpPr>
-          <p:cNvPr id="10" name="Text 8"/>
+              <a:t>aug — le témoin</a:t>
+            </a:r>
+            <a:endParaRPr lang="en-US" sz="1550" dirty="0"/>
+          </a:p>
+        </p:txBody>
+      </p:sp>
+      <p:sp>
+        <p:nvSpPr>
+          <p:cNvPr id="12" name="Text 10"/>
           <p:cNvSpPr txBox="1"/>
           <p:nvPr/>
         </p:nvSpPr>
         <p:spPr>
           <a:xfrm>
-            <a:off x="1828800" y="3584448"/>
-            <a:ext cx="9601200" cy="658368"/>
+            <a:off x="4572000" y="2468880"/>
+            <a:ext cx="3108960" cy="914400"/>
           </a:xfrm>
           <a:prstGeom prst="rect">
             <a:avLst/>
@@ -9344,39 +13504,39 @@
           <a:p>
             <a:pPr indent="0" marL="0">
               <a:lnSpc>
-                <a:spcPct val="103000"/>
+                <a:spcPct val="105000"/>
               </a:lnSpc>
               <a:buNone/>
             </a:pPr>
             <a:r>
-              <a:rPr lang="en-US" sz="1400" dirty="0">
-                <a:solidFill>
-                  <a:srgbClr val="33474F"/>
+              <a:rPr lang="en-US" sz="1250" dirty="0">
+                <a:solidFill>
+                  <a:srgbClr val="16323D"/>
                 </a:solidFill>
                 <a:latin typeface="Calibri" pitchFamily="34" charset="0"/>
                 <a:ea typeface="Calibri" pitchFamily="34" charset="-122"/>
                 <a:cs typeface="Calibri" pitchFamily="34" charset="-120"/>
               </a:rPr>
-              <a:t>Le student 54k égale/dépasse le teacher 0.8M à pleine densité : dataset petit &amp; difficile, la capacité du teacher n'aide pas (sur-apprentissage).</a:t>
-            </a:r>
-            <a:endParaRPr lang="en-US" sz="1400" dirty="0"/>
-          </a:p>
-        </p:txBody>
-      </p:sp>
-      <p:sp>
-        <p:nvSpPr>
-          <p:cNvPr id="11" name="Shape 9"/>
-          <p:cNvSpPr/>
-          <p:nvPr/>
-        </p:nvSpPr>
-        <p:spPr>
-          <a:xfrm>
-            <a:off x="548640" y="4471416"/>
-            <a:ext cx="11064240" cy="1325880"/>
+              <a:t>CE seule, student voit un nuage sous-échantillonné (N ~ log-U[16, 1024]) — sans teacher</a:t>
+            </a:r>
+            <a:endParaRPr lang="en-US" sz="1250" dirty="0"/>
+          </a:p>
+        </p:txBody>
+      </p:sp>
+      <p:sp>
+        <p:nvSpPr>
+          <p:cNvPr id="13" name="Shape 11"/>
+          <p:cNvSpPr/>
+          <p:nvPr/>
+        </p:nvSpPr>
+        <p:spPr>
+          <a:xfrm>
+            <a:off x="8046720" y="1554480"/>
+            <a:ext cx="3566160" cy="1920240"/>
           </a:xfrm>
           <a:prstGeom prst="roundRect">
             <a:avLst>
-              <a:gd name="adj" fmla="val 6207"/>
+              <a:gd name="adj" fmla="val 4286"/>
             </a:avLst>
           </a:prstGeom>
           <a:solidFill>
@@ -9394,14 +13554,34 @@
       </p:sp>
       <p:sp>
         <p:nvSpPr>
-          <p:cNvPr id="12" name="Text 10"/>
+          <p:cNvPr id="14" name="Shape 12"/>
+          <p:cNvSpPr/>
+          <p:nvPr/>
+        </p:nvSpPr>
+        <p:spPr>
+          <a:xfrm>
+            <a:off x="8275320" y="1810512"/>
+            <a:ext cx="530352" cy="530352"/>
+          </a:xfrm>
+          <a:prstGeom prst="ellipse">
+            <a:avLst/>
+          </a:prstGeom>
+          <a:solidFill>
+            <a:srgbClr val="1C7293"/>
+          </a:solidFill>
+          <a:ln/>
+        </p:spPr>
+      </p:sp>
+      <p:sp>
+        <p:nvSpPr>
+          <p:cNvPr id="15" name="Text 13"/>
           <p:cNvSpPr txBox="1"/>
           <p:nvPr/>
         </p:nvSpPr>
         <p:spPr>
           <a:xfrm>
-            <a:off x="868680" y="4727448"/>
-            <a:ext cx="822960" cy="822960"/>
+            <a:off x="8275320" y="1810512"/>
+            <a:ext cx="530352" cy="530352"/>
           </a:xfrm>
           <a:prstGeom prst="rect">
             <a:avLst/>
@@ -9417,9 +13597,9 @@
               <a:buNone/>
             </a:pPr>
             <a:r>
-              <a:rPr lang="en-US" sz="3000" b="1" dirty="0">
-                <a:solidFill>
-                  <a:srgbClr val="0B3C5D"/>
+              <a:rPr lang="en-US" sz="1800" b="1" dirty="0">
+                <a:solidFill>
+                  <a:srgbClr val="FFFFFF"/>
                 </a:solidFill>
                 <a:latin typeface="Cambria" pitchFamily="34" charset="0"/>
                 <a:ea typeface="Cambria" pitchFamily="34" charset="-122"/>
@@ -9427,20 +13607,20 @@
               </a:rPr>
               <a:t>3</a:t>
             </a:r>
-            <a:endParaRPr lang="en-US" sz="3000" dirty="0"/>
-          </a:p>
-        </p:txBody>
-      </p:sp>
-      <p:sp>
-        <p:nvSpPr>
-          <p:cNvPr id="13" name="Text 11"/>
+            <a:endParaRPr lang="en-US" sz="1800" dirty="0"/>
+          </a:p>
+        </p:txBody>
+      </p:sp>
+      <p:sp>
+        <p:nvSpPr>
+          <p:cNvPr id="16" name="Text 14"/>
           <p:cNvSpPr txBox="1"/>
           <p:nvPr/>
         </p:nvSpPr>
         <p:spPr>
           <a:xfrm>
-            <a:off x="1828800" y="4626864"/>
-            <a:ext cx="9509760" cy="457200"/>
+            <a:off x="8961120" y="1801368"/>
+            <a:ext cx="2560320" cy="548640"/>
           </a:xfrm>
           <a:prstGeom prst="rect">
             <a:avLst/>
@@ -9456,30 +13636,30 @@
               <a:buNone/>
             </a:pPr>
             <a:r>
-              <a:rPr lang="en-US" sz="1800" b="1" dirty="0">
-                <a:solidFill>
-                  <a:srgbClr val="16323D"/>
+              <a:rPr lang="en-US" sz="1550" b="1" dirty="0">
+                <a:solidFill>
+                  <a:srgbClr val="0B3C5D"/>
                 </a:solidFill>
                 <a:latin typeface="Cambria" pitchFamily="34" charset="0"/>
                 <a:ea typeface="Cambria" pitchFamily="34" charset="-122"/>
                 <a:cs typeface="Cambria" pitchFamily="34" charset="-120"/>
               </a:rPr>
-              <a:t>Le vrai signal pour la KD</a:t>
-            </a:r>
-            <a:endParaRPr lang="en-US" sz="1800" dirty="0"/>
-          </a:p>
-        </p:txBody>
-      </p:sp>
-      <p:sp>
-        <p:nvSpPr>
-          <p:cNvPr id="14" name="Text 12"/>
+              <a:t>KD logit (Hinton)</a:t>
+            </a:r>
+            <a:endParaRPr lang="en-US" sz="1550" dirty="0"/>
+          </a:p>
+        </p:txBody>
+      </p:sp>
+      <p:sp>
+        <p:nvSpPr>
+          <p:cNvPr id="17" name="Text 15"/>
           <p:cNvSpPr txBox="1"/>
           <p:nvPr/>
         </p:nvSpPr>
         <p:spPr>
           <a:xfrm>
-            <a:off x="1828800" y="5065776"/>
-            <a:ext cx="9601200" cy="658368"/>
+            <a:off x="8321040" y="2468880"/>
+            <a:ext cx="3108960" cy="914400"/>
           </a:xfrm>
           <a:prstGeom prst="rect">
             <a:avLst/>
@@ -9493,22 +13673,568 @@
           <a:p>
             <a:pPr indent="0" marL="0">
               <a:lnSpc>
-                <a:spcPct val="103000"/>
+                <a:spcPct val="105000"/>
               </a:lnSpc>
               <a:buNone/>
             </a:pPr>
             <a:r>
-              <a:rPr lang="en-US" sz="1400" dirty="0">
-                <a:solidFill>
-                  <a:srgbClr val="33474F"/>
+              <a:rPr lang="en-US" sz="1250" dirty="0">
+                <a:solidFill>
+                  <a:srgbClr val="16323D"/>
                 </a:solidFill>
                 <a:latin typeface="Calibri" pitchFamily="34" charset="0"/>
                 <a:ea typeface="Calibri" pitchFamily="34" charset="-122"/>
                 <a:cs typeface="Calibri" pitchFamily="34" charset="-120"/>
               </a:rPr>
-              <a:t>Le teacher se dégrade plus gracieusement en sparsité extrême. On recadre H1 : la KD ne vise pas la précision mais la robustesse basse-densité.</a:t>
-            </a:r>
-            <a:endParaRPr lang="en-US" sz="1400" dirty="0"/>
+              <a:t>α·CE + (1-α)·T²·KL(z_s/T ‖ z_t/T), teacher gelé, entrées denses</a:t>
+            </a:r>
+            <a:endParaRPr lang="en-US" sz="1250" dirty="0"/>
+          </a:p>
+        </p:txBody>
+      </p:sp>
+      <p:sp>
+        <p:nvSpPr>
+          <p:cNvPr id="18" name="Shape 16"/>
+          <p:cNvSpPr/>
+          <p:nvPr/>
+        </p:nvSpPr>
+        <p:spPr>
+          <a:xfrm>
+            <a:off x="548640" y="3703320"/>
+            <a:ext cx="3566160" cy="1920240"/>
+          </a:xfrm>
+          <a:prstGeom prst="roundRect">
+            <a:avLst>
+              <a:gd name="adj" fmla="val 4286"/>
+            </a:avLst>
+          </a:prstGeom>
+          <a:solidFill>
+            <a:srgbClr val="EAF3F3"/>
+          </a:solidFill>
+          <a:ln/>
+          <a:effectLst>
+            <a:outerShdw sx="100000" sy="100000" kx="0" ky="0" algn="bl" rotWithShape="0" blurRad="88900" dist="25400" dir="5400000">
+              <a:srgbClr val="9AAEB5">
+                <a:alpha val="35000"/>
+              </a:srgbClr>
+            </a:outerShdw>
+          </a:effectLst>
+        </p:spPr>
+      </p:sp>
+      <p:sp>
+        <p:nvSpPr>
+          <p:cNvPr id="19" name="Shape 17"/>
+          <p:cNvSpPr/>
+          <p:nvPr/>
+        </p:nvSpPr>
+        <p:spPr>
+          <a:xfrm>
+            <a:off x="777240" y="3959352"/>
+            <a:ext cx="530352" cy="530352"/>
+          </a:xfrm>
+          <a:prstGeom prst="ellipse">
+            <a:avLst/>
+          </a:prstGeom>
+          <a:solidFill>
+            <a:srgbClr val="1C7293"/>
+          </a:solidFill>
+          <a:ln/>
+        </p:spPr>
+      </p:sp>
+      <p:sp>
+        <p:nvSpPr>
+          <p:cNvPr id="20" name="Text 18"/>
+          <p:cNvSpPr txBox="1"/>
+          <p:nvPr/>
+        </p:nvSpPr>
+        <p:spPr>
+          <a:xfrm>
+            <a:off x="777240" y="3959352"/>
+            <a:ext cx="530352" cy="530352"/>
+          </a:xfrm>
+          <a:prstGeom prst="rect">
+            <a:avLst/>
+          </a:prstGeom>
+          <a:noFill/>
+          <a:ln/>
+        </p:spPr>
+        <p:txBody>
+          <a:bodyPr wrap="square" lIns="0" tIns="0" rIns="0" bIns="0" rtlCol="0" anchor="ctr"/>
+          <a:lstStyle/>
+          <a:p>
+            <a:pPr algn="ctr" indent="0" marL="0">
+              <a:buNone/>
+            </a:pPr>
+            <a:r>
+              <a:rPr lang="en-US" sz="1800" b="1" dirty="0">
+                <a:solidFill>
+                  <a:srgbClr val="FFFFFF"/>
+                </a:solidFill>
+                <a:latin typeface="Cambria" pitchFamily="34" charset="0"/>
+                <a:ea typeface="Cambria" pitchFamily="34" charset="-122"/>
+                <a:cs typeface="Cambria" pitchFamily="34" charset="-120"/>
+              </a:rPr>
+              <a:t>4</a:t>
+            </a:r>
+            <a:endParaRPr lang="en-US" sz="1800" dirty="0"/>
+          </a:p>
+        </p:txBody>
+      </p:sp>
+      <p:sp>
+        <p:nvSpPr>
+          <p:cNvPr id="21" name="Text 19"/>
+          <p:cNvSpPr txBox="1"/>
+          <p:nvPr/>
+        </p:nvSpPr>
+        <p:spPr>
+          <a:xfrm>
+            <a:off x="1463040" y="3950208"/>
+            <a:ext cx="2560320" cy="548640"/>
+          </a:xfrm>
+          <a:prstGeom prst="rect">
+            <a:avLst/>
+          </a:prstGeom>
+          <a:noFill/>
+          <a:ln/>
+        </p:spPr>
+        <p:txBody>
+          <a:bodyPr wrap="square" lIns="0" tIns="0" rIns="0" bIns="0" rtlCol="0" anchor="ctr"/>
+          <a:lstStyle/>
+          <a:p>
+            <a:pPr indent="0" marL="0">
+              <a:buNone/>
+            </a:pPr>
+            <a:r>
+              <a:rPr lang="en-US" sz="1550" b="1" dirty="0">
+                <a:solidFill>
+                  <a:srgbClr val="0B3C5D"/>
+                </a:solidFill>
+                <a:latin typeface="Cambria" pitchFamily="34" charset="0"/>
+                <a:ea typeface="Cambria" pitchFamily="34" charset="-122"/>
+                <a:cs typeface="Cambria" pitchFamily="34" charset="-120"/>
+              </a:rPr>
+              <a:t>KD robuste</a:t>
+            </a:r>
+            <a:endParaRPr lang="en-US" sz="1550" dirty="0"/>
+          </a:p>
+        </p:txBody>
+      </p:sp>
+      <p:sp>
+        <p:nvSpPr>
+          <p:cNvPr id="22" name="Text 20"/>
+          <p:cNvSpPr txBox="1"/>
+          <p:nvPr/>
+        </p:nvSpPr>
+        <p:spPr>
+          <a:xfrm>
+            <a:off x="822960" y="4617720"/>
+            <a:ext cx="3108960" cy="914400"/>
+          </a:xfrm>
+          <a:prstGeom prst="rect">
+            <a:avLst/>
+          </a:prstGeom>
+          <a:noFill/>
+          <a:ln/>
+        </p:spPr>
+        <p:txBody>
+          <a:bodyPr wrap="square" lIns="0" tIns="0" rIns="0" bIns="0" rtlCol="0" anchor="ctr"/>
+          <a:lstStyle/>
+          <a:p>
+            <a:pPr indent="0" marL="0">
+              <a:lnSpc>
+                <a:spcPct val="105000"/>
+              </a:lnSpc>
+              <a:buNone/>
+            </a:pPr>
+            <a:r>
+              <a:rPr lang="en-US" sz="1250" dirty="0">
+                <a:solidFill>
+                  <a:srgbClr val="16323D"/>
+                </a:solidFill>
+                <a:latin typeface="Calibri" pitchFamily="34" charset="0"/>
+                <a:ea typeface="Calibri" pitchFamily="34" charset="-122"/>
+                <a:cs typeface="Calibri" pitchFamily="34" charset="-120"/>
+              </a:rPr>
+              <a:t>teacher voit le nuage dense, student un nuage sous-échantillonné</a:t>
+            </a:r>
+            <a:endParaRPr lang="en-US" sz="1250" dirty="0"/>
+          </a:p>
+        </p:txBody>
+      </p:sp>
+      <p:sp>
+        <p:nvSpPr>
+          <p:cNvPr id="23" name="Shape 21"/>
+          <p:cNvSpPr/>
+          <p:nvPr/>
+        </p:nvSpPr>
+        <p:spPr>
+          <a:xfrm>
+            <a:off x="4297680" y="3703320"/>
+            <a:ext cx="3566160" cy="1920240"/>
+          </a:xfrm>
+          <a:prstGeom prst="roundRect">
+            <a:avLst>
+              <a:gd name="adj" fmla="val 4286"/>
+            </a:avLst>
+          </a:prstGeom>
+          <a:solidFill>
+            <a:srgbClr val="EAF3F3"/>
+          </a:solidFill>
+          <a:ln/>
+          <a:effectLst>
+            <a:outerShdw sx="100000" sy="100000" kx="0" ky="0" algn="bl" rotWithShape="0" blurRad="88900" dist="25400" dir="5400000">
+              <a:srgbClr val="9AAEB5">
+                <a:alpha val="35000"/>
+              </a:srgbClr>
+            </a:outerShdw>
+          </a:effectLst>
+        </p:spPr>
+      </p:sp>
+      <p:sp>
+        <p:nvSpPr>
+          <p:cNvPr id="24" name="Shape 22"/>
+          <p:cNvSpPr/>
+          <p:nvPr/>
+        </p:nvSpPr>
+        <p:spPr>
+          <a:xfrm>
+            <a:off x="4526280" y="3959352"/>
+            <a:ext cx="530352" cy="530352"/>
+          </a:xfrm>
+          <a:prstGeom prst="ellipse">
+            <a:avLst/>
+          </a:prstGeom>
+          <a:solidFill>
+            <a:srgbClr val="1C7293"/>
+          </a:solidFill>
+          <a:ln/>
+        </p:spPr>
+      </p:sp>
+      <p:sp>
+        <p:nvSpPr>
+          <p:cNvPr id="25" name="Text 23"/>
+          <p:cNvSpPr txBox="1"/>
+          <p:nvPr/>
+        </p:nvSpPr>
+        <p:spPr>
+          <a:xfrm>
+            <a:off x="4526280" y="3959352"/>
+            <a:ext cx="530352" cy="530352"/>
+          </a:xfrm>
+          <a:prstGeom prst="rect">
+            <a:avLst/>
+          </a:prstGeom>
+          <a:noFill/>
+          <a:ln/>
+        </p:spPr>
+        <p:txBody>
+          <a:bodyPr wrap="square" lIns="0" tIns="0" rIns="0" bIns="0" rtlCol="0" anchor="ctr"/>
+          <a:lstStyle/>
+          <a:p>
+            <a:pPr algn="ctr" indent="0" marL="0">
+              <a:buNone/>
+            </a:pPr>
+            <a:r>
+              <a:rPr lang="en-US" sz="1800" b="1" dirty="0">
+                <a:solidFill>
+                  <a:srgbClr val="FFFFFF"/>
+                </a:solidFill>
+                <a:latin typeface="Cambria" pitchFamily="34" charset="0"/>
+                <a:ea typeface="Cambria" pitchFamily="34" charset="-122"/>
+                <a:cs typeface="Cambria" pitchFamily="34" charset="-120"/>
+              </a:rPr>
+              <a:t>5</a:t>
+            </a:r>
+            <a:endParaRPr lang="en-US" sz="1800" dirty="0"/>
+          </a:p>
+        </p:txBody>
+      </p:sp>
+      <p:sp>
+        <p:nvSpPr>
+          <p:cNvPr id="26" name="Text 24"/>
+          <p:cNvSpPr txBox="1"/>
+          <p:nvPr/>
+        </p:nvSpPr>
+        <p:spPr>
+          <a:xfrm>
+            <a:off x="5212080" y="3950208"/>
+            <a:ext cx="2560320" cy="548640"/>
+          </a:xfrm>
+          <a:prstGeom prst="rect">
+            <a:avLst/>
+          </a:prstGeom>
+          <a:noFill/>
+          <a:ln/>
+        </p:spPr>
+        <p:txBody>
+          <a:bodyPr wrap="square" lIns="0" tIns="0" rIns="0" bIns="0" rtlCol="0" anchor="ctr"/>
+          <a:lstStyle/>
+          <a:p>
+            <a:pPr indent="0" marL="0">
+              <a:buNone/>
+            </a:pPr>
+            <a:r>
+              <a:rPr lang="en-US" sz="1550" b="1" dirty="0">
+                <a:solidFill>
+                  <a:srgbClr val="0B3C5D"/>
+                </a:solidFill>
+                <a:latin typeface="Cambria" pitchFamily="34" charset="0"/>
+                <a:ea typeface="Cambria" pitchFamily="34" charset="-122"/>
+                <a:cs typeface="Cambria" pitchFamily="34" charset="-120"/>
+              </a:rPr>
+              <a:t>+ KD de features</a:t>
+            </a:r>
+            <a:endParaRPr lang="en-US" sz="1550" dirty="0"/>
+          </a:p>
+        </p:txBody>
+      </p:sp>
+      <p:sp>
+        <p:nvSpPr>
+          <p:cNvPr id="27" name="Text 25"/>
+          <p:cNvSpPr txBox="1"/>
+          <p:nvPr/>
+        </p:nvSpPr>
+        <p:spPr>
+          <a:xfrm>
+            <a:off x="4572000" y="4617720"/>
+            <a:ext cx="3108960" cy="914400"/>
+          </a:xfrm>
+          <a:prstGeom prst="rect">
+            <a:avLst/>
+          </a:prstGeom>
+          <a:noFill/>
+          <a:ln/>
+        </p:spPr>
+        <p:txBody>
+          <a:bodyPr wrap="square" lIns="0" tIns="0" rIns="0" bIns="0" rtlCol="0" anchor="ctr"/>
+          <a:lstStyle/>
+          <a:p>
+            <a:pPr indent="0" marL="0">
+              <a:lnSpc>
+                <a:spcPct val="105000"/>
+              </a:lnSpc>
+              <a:buNone/>
+            </a:pPr>
+            <a:r>
+              <a:rPr lang="en-US" sz="1250" dirty="0">
+                <a:solidFill>
+                  <a:srgbClr val="16323D"/>
+                </a:solidFill>
+                <a:latin typeface="Calibri" pitchFamily="34" charset="0"/>
+                <a:ea typeface="Calibri" pitchFamily="34" charset="-122"/>
+                <a:cs typeface="Calibri" pitchFamily="34" charset="-120"/>
+              </a:rPr>
+              <a:t>+ alignement des vecteurs globaux g (projection 256 → 1024)</a:t>
+            </a:r>
+            <a:endParaRPr lang="en-US" sz="1250" dirty="0"/>
+          </a:p>
+        </p:txBody>
+      </p:sp>
+      <p:sp>
+        <p:nvSpPr>
+          <p:cNvPr id="28" name="Shape 26"/>
+          <p:cNvSpPr/>
+          <p:nvPr/>
+        </p:nvSpPr>
+        <p:spPr>
+          <a:xfrm>
+            <a:off x="8046720" y="3703320"/>
+            <a:ext cx="3566160" cy="1920240"/>
+          </a:xfrm>
+          <a:prstGeom prst="roundRect">
+            <a:avLst>
+              <a:gd name="adj" fmla="val 4286"/>
+            </a:avLst>
+          </a:prstGeom>
+          <a:solidFill>
+            <a:srgbClr val="EAF3F3"/>
+          </a:solidFill>
+          <a:ln/>
+          <a:effectLst>
+            <a:outerShdw sx="100000" sy="100000" kx="0" ky="0" algn="bl" rotWithShape="0" blurRad="88900" dist="25400" dir="5400000">
+              <a:srgbClr val="9AAEB5">
+                <a:alpha val="35000"/>
+              </a:srgbClr>
+            </a:outerShdw>
+          </a:effectLst>
+        </p:spPr>
+      </p:sp>
+      <p:sp>
+        <p:nvSpPr>
+          <p:cNvPr id="29" name="Shape 27"/>
+          <p:cNvSpPr/>
+          <p:nvPr/>
+        </p:nvSpPr>
+        <p:spPr>
+          <a:xfrm>
+            <a:off x="8275320" y="3959352"/>
+            <a:ext cx="530352" cy="530352"/>
+          </a:xfrm>
+          <a:prstGeom prst="ellipse">
+            <a:avLst/>
+          </a:prstGeom>
+          <a:solidFill>
+            <a:srgbClr val="1C7293"/>
+          </a:solidFill>
+          <a:ln/>
+        </p:spPr>
+      </p:sp>
+      <p:sp>
+        <p:nvSpPr>
+          <p:cNvPr id="30" name="Text 28"/>
+          <p:cNvSpPr txBox="1"/>
+          <p:nvPr/>
+        </p:nvSpPr>
+        <p:spPr>
+          <a:xfrm>
+            <a:off x="8275320" y="3959352"/>
+            <a:ext cx="530352" cy="530352"/>
+          </a:xfrm>
+          <a:prstGeom prst="rect">
+            <a:avLst/>
+          </a:prstGeom>
+          <a:noFill/>
+          <a:ln/>
+        </p:spPr>
+        <p:txBody>
+          <a:bodyPr wrap="square" lIns="0" tIns="0" rIns="0" bIns="0" rtlCol="0" anchor="ctr"/>
+          <a:lstStyle/>
+          <a:p>
+            <a:pPr algn="ctr" indent="0" marL="0">
+              <a:buNone/>
+            </a:pPr>
+            <a:r>
+              <a:rPr lang="en-US" sz="1800" b="1" dirty="0">
+                <a:solidFill>
+                  <a:srgbClr val="FFFFFF"/>
+                </a:solidFill>
+                <a:latin typeface="Cambria" pitchFamily="34" charset="0"/>
+                <a:ea typeface="Cambria" pitchFamily="34" charset="-122"/>
+                <a:cs typeface="Cambria" pitchFamily="34" charset="-120"/>
+              </a:rPr>
+              <a:t>6</a:t>
+            </a:r>
+            <a:endParaRPr lang="en-US" sz="1800" dirty="0"/>
+          </a:p>
+        </p:txBody>
+      </p:sp>
+      <p:sp>
+        <p:nvSpPr>
+          <p:cNvPr id="31" name="Text 29"/>
+          <p:cNvSpPr txBox="1"/>
+          <p:nvPr/>
+        </p:nvSpPr>
+        <p:spPr>
+          <a:xfrm>
+            <a:off x="8961120" y="3950208"/>
+            <a:ext cx="2560320" cy="548640"/>
+          </a:xfrm>
+          <a:prstGeom prst="rect">
+            <a:avLst/>
+          </a:prstGeom>
+          <a:noFill/>
+          <a:ln/>
+        </p:spPr>
+        <p:txBody>
+          <a:bodyPr wrap="square" lIns="0" tIns="0" rIns="0" bIns="0" rtlCol="0" anchor="ctr"/>
+          <a:lstStyle/>
+          <a:p>
+            <a:pPr indent="0" marL="0">
+              <a:buNone/>
+            </a:pPr>
+            <a:r>
+              <a:rPr lang="en-US" sz="1550" b="1" dirty="0">
+                <a:solidFill>
+                  <a:srgbClr val="0B3C5D"/>
+                </a:solidFill>
+                <a:latin typeface="Cambria" pitchFamily="34" charset="0"/>
+                <a:ea typeface="Cambria" pitchFamily="34" charset="-122"/>
+                <a:cs typeface="Cambria" pitchFamily="34" charset="-120"/>
+              </a:rPr>
+              <a:t>KD robuste, teacher robuste</a:t>
+            </a:r>
+            <a:endParaRPr lang="en-US" sz="1550" dirty="0"/>
+          </a:p>
+        </p:txBody>
+      </p:sp>
+      <p:sp>
+        <p:nvSpPr>
+          <p:cNvPr id="32" name="Text 30"/>
+          <p:cNvSpPr txBox="1"/>
+          <p:nvPr/>
+        </p:nvSpPr>
+        <p:spPr>
+          <a:xfrm>
+            <a:off x="8321040" y="4617720"/>
+            <a:ext cx="3108960" cy="914400"/>
+          </a:xfrm>
+          <a:prstGeom prst="rect">
+            <a:avLst/>
+          </a:prstGeom>
+          <a:noFill/>
+          <a:ln/>
+        </p:spPr>
+        <p:txBody>
+          <a:bodyPr wrap="square" lIns="0" tIns="0" rIns="0" bIns="0" rtlCol="0" anchor="ctr"/>
+          <a:lstStyle/>
+          <a:p>
+            <a:pPr indent="0" marL="0">
+              <a:lnSpc>
+                <a:spcPct val="105000"/>
+              </a:lnSpc>
+              <a:buNone/>
+            </a:pPr>
+            <a:r>
+              <a:rPr lang="en-US" sz="1250" dirty="0">
+                <a:solidFill>
+                  <a:srgbClr val="16323D"/>
+                </a:solidFill>
+                <a:latin typeface="Calibri" pitchFamily="34" charset="0"/>
+                <a:ea typeface="Calibri" pitchFamily="34" charset="-122"/>
+                <a:cs typeface="Calibri" pitchFamily="34" charset="-120"/>
+              </a:rPr>
+              <a:t>teacher lui-même entraîné avec sous-échantillonnage</a:t>
+            </a:r>
+            <a:endParaRPr lang="en-US" sz="1250" dirty="0"/>
+          </a:p>
+        </p:txBody>
+      </p:sp>
+      <p:sp>
+        <p:nvSpPr>
+          <p:cNvPr id="33" name="Text 31"/>
+          <p:cNvSpPr txBox="1"/>
+          <p:nvPr/>
+        </p:nvSpPr>
+        <p:spPr>
+          <a:xfrm>
+            <a:off x="548640" y="5943600"/>
+            <a:ext cx="11064240" cy="457200"/>
+          </a:xfrm>
+          <a:prstGeom prst="rect">
+            <a:avLst/>
+          </a:prstGeom>
+          <a:noFill/>
+          <a:ln/>
+        </p:spPr>
+        <p:txBody>
+          <a:bodyPr wrap="square" lIns="0" tIns="0" rIns="0" bIns="0" rtlCol="0" anchor="ctr"/>
+          <a:lstStyle/>
+          <a:p>
+            <a:pPr indent="0" marL="0">
+              <a:buNone/>
+            </a:pPr>
+            <a:r>
+              <a:rPr lang="en-US" sz="1300" i="1" dirty="0">
+                <a:solidFill>
+                  <a:srgbClr val="6B7B84"/>
+                </a:solidFill>
+                <a:latin typeface="Calibri" pitchFamily="34" charset="0"/>
+                <a:ea typeface="Calibri" pitchFamily="34" charset="-122"/>
+                <a:cs typeface="Calibri" pitchFamily="34" charset="-120"/>
+              </a:rPr>
+              <a:t>Le témoin « aug » voit exactement les mêmes entrées que la KD robuste : tout écart entre les deux est attribuable au teacher.</a:t>
+            </a:r>
+            <a:endParaRPr lang="en-US" sz="1300" dirty="0"/>
           </a:p>
         </p:txBody>
       </p:sp>
@@ -9577,30 +14303,46 @@
                 <a:ea typeface="Cambria" pitchFamily="34" charset="-122"/>
                 <a:cs typeface="Cambria" pitchFamily="34" charset="-120"/>
               </a:rPr>
-              <a:t>Deuxième moitié — la distillation</a:t>
+              <a:t>Résultats — courbes de robustesse (AUC test)</a:t>
             </a:r>
             <a:endParaRPr lang="en-US" sz="3200" dirty="0"/>
           </a:p>
         </p:txBody>
       </p:sp>
-      <p:sp>
-        <p:nvSpPr>
-          <p:cNvPr id="3" name="Shape 1"/>
-          <p:cNvSpPr/>
-          <p:nvPr/>
-        </p:nvSpPr>
-        <p:spPr>
-          <a:xfrm>
-            <a:off x="548640" y="1554480"/>
-            <a:ext cx="5394960" cy="1874520"/>
+      <p:graphicFrame>
+        <p:nvGraphicFramePr>
+          <p:cNvPr id="3" name="Chart 0" descr=""/>
+          <p:cNvGraphicFramePr/>
+          <p:nvPr/>
+        </p:nvGraphicFramePr>
+        <p:xfrm>
+          <a:off x="548640" y="1417320"/>
+          <a:ext cx="7406640" cy="4846320"/>
+        </p:xfrm>
+        <a:graphic xmlns:a="http://schemas.openxmlformats.org/drawingml/2006/main">
+          <a:graphicData uri="http://schemas.openxmlformats.org/drawingml/2006/chart">
+            <c:chart xmlns:c="http://schemas.openxmlformats.org/drawingml/2006/chart" r:id="rId1"/>
+          </a:graphicData>
+        </a:graphic>
+      </p:graphicFrame>
+      <p:sp>
+        <p:nvSpPr>
+          <p:cNvPr id="4" name="Shape 1"/>
+          <p:cNvSpPr/>
+          <p:nvPr/>
+        </p:nvSpPr>
+        <p:spPr>
+          <a:xfrm>
+            <a:off x="8183880" y="1554480"/>
+            <a:ext cx="3429000" cy="4572000"/>
           </a:xfrm>
           <a:prstGeom prst="roundRect">
             <a:avLst>
-              <a:gd name="adj" fmla="val 4390"/>
+              <a:gd name="adj" fmla="val 2400"/>
             </a:avLst>
           </a:prstGeom>
           <a:solidFill>
-            <a:srgbClr val="EAF3F3"/>
+            <a:srgbClr val="08293A"/>
           </a:solidFill>
           <a:ln/>
           <a:effectLst>
@@ -9614,34 +14356,14 @@
       </p:sp>
       <p:sp>
         <p:nvSpPr>
-          <p:cNvPr id="4" name="Shape 2"/>
-          <p:cNvSpPr/>
-          <p:nvPr/>
-        </p:nvSpPr>
-        <p:spPr>
-          <a:xfrm>
-            <a:off x="822960" y="1828800"/>
-            <a:ext cx="566928" cy="566928"/>
-          </a:xfrm>
-          <a:prstGeom prst="ellipse">
-            <a:avLst/>
-          </a:prstGeom>
-          <a:solidFill>
-            <a:srgbClr val="1C7293"/>
-          </a:solidFill>
-          <a:ln/>
-        </p:spPr>
-      </p:sp>
-      <p:sp>
-        <p:nvSpPr>
-          <p:cNvPr id="5" name="Text 3"/>
+          <p:cNvPr id="5" name="Text 2"/>
           <p:cNvSpPr txBox="1"/>
           <p:nvPr/>
         </p:nvSpPr>
         <p:spPr>
           <a:xfrm>
-            <a:off x="822960" y="1828800"/>
-            <a:ext cx="566928" cy="566928"/>
+            <a:off x="8412480" y="1783080"/>
+            <a:ext cx="3017520" cy="365760"/>
           </a:xfrm>
           <a:prstGeom prst="rect">
             <a:avLst/>
@@ -9653,34 +14375,34 @@
           <a:bodyPr wrap="square" lIns="0" tIns="0" rIns="0" bIns="0" rtlCol="0" anchor="ctr"/>
           <a:lstStyle/>
           <a:p>
-            <a:pPr algn="ctr" indent="0" marL="0">
+            <a:pPr indent="0" marL="0">
               <a:buNone/>
             </a:pPr>
             <a:r>
-              <a:rPr lang="en-US" sz="1800" b="1" dirty="0">
-                <a:solidFill>
-                  <a:srgbClr val="FFFFFF"/>
+              <a:rPr lang="en-US" sz="1700" b="1" dirty="0">
+                <a:solidFill>
+                  <a:srgbClr val="2EC4B6"/>
                 </a:solidFill>
                 <a:latin typeface="Cambria" pitchFamily="34" charset="0"/>
                 <a:ea typeface="Cambria" pitchFamily="34" charset="-122"/>
                 <a:cs typeface="Cambria" pitchFamily="34" charset="-120"/>
               </a:rPr>
-              <a:t>1</a:t>
-            </a:r>
-            <a:endParaRPr lang="en-US" sz="1800" dirty="0"/>
-          </a:p>
-        </p:txBody>
-      </p:sp>
-      <p:sp>
-        <p:nvSpPr>
-          <p:cNvPr id="6" name="Text 4"/>
+              <a:t>À retenir</a:t>
+            </a:r>
+            <a:endParaRPr lang="en-US" sz="1700" dirty="0"/>
+          </a:p>
+        </p:txBody>
+      </p:sp>
+      <p:sp>
+        <p:nvSpPr>
+          <p:cNvPr id="6" name="Text 3"/>
           <p:cNvSpPr txBox="1"/>
           <p:nvPr/>
         </p:nvSpPr>
         <p:spPr>
           <a:xfrm>
-            <a:off x="1554480" y="1847088"/>
-            <a:ext cx="4206240" cy="548640"/>
+            <a:off x="8503920" y="2286000"/>
+            <a:ext cx="2971800" cy="3657600"/>
           </a:xfrm>
           <a:prstGeom prst="rect">
             <a:avLst/>
@@ -9692,570 +14414,76 @@
           <a:bodyPr wrap="square" lIns="0" tIns="0" rIns="0" bIns="0" rtlCol="0" anchor="ctr"/>
           <a:lstStyle/>
           <a:p>
-            <a:pPr indent="0" marL="0">
-              <a:buNone/>
-            </a:pPr>
-            <a:r>
-              <a:rPr lang="en-US" sz="1650" b="1" dirty="0">
-                <a:solidFill>
-                  <a:srgbClr val="0B3C5D"/>
-                </a:solidFill>
-                <a:latin typeface="Cambria" pitchFamily="34" charset="0"/>
-                <a:ea typeface="Cambria" pitchFamily="34" charset="-122"/>
-                <a:cs typeface="Cambria" pitchFamily="34" charset="-120"/>
-              </a:rPr>
-              <a:t>KD logit (Hinton)</a:t>
-            </a:r>
-            <a:endParaRPr lang="en-US" sz="1650" dirty="0"/>
-          </a:p>
-        </p:txBody>
-      </p:sp>
-      <p:sp>
-        <p:nvSpPr>
-          <p:cNvPr id="7" name="Text 5"/>
-          <p:cNvSpPr txBox="1"/>
-          <p:nvPr/>
-        </p:nvSpPr>
-        <p:spPr>
-          <a:xfrm>
-            <a:off x="868680" y="2514600"/>
-            <a:ext cx="4754880" cy="822960"/>
-          </a:xfrm>
-          <a:prstGeom prst="rect">
-            <a:avLst/>
-          </a:prstGeom>
-          <a:noFill/>
-          <a:ln/>
-        </p:spPr>
-        <p:txBody>
-          <a:bodyPr wrap="square" lIns="0" tIns="0" rIns="0" bIns="0" rtlCol="0" anchor="ctr"/>
-          <a:lstStyle/>
-          <a:p>
-            <a:pPr indent="0" marL="0">
+            <a:pPr marL="203200" indent="-203200">
               <a:lnSpc>
                 <a:spcPct val="105000"/>
               </a:lnSpc>
-              <a:buNone/>
-            </a:pPr>
-            <a:r>
-              <a:rPr lang="en-US" sz="1350" dirty="0">
-                <a:solidFill>
-                  <a:srgbClr val="16323D"/>
+              <a:spcAft>
+                <a:spcPts val="1100"/>
+              </a:spcAft>
+              <a:buSzPct val="100000"/>
+              <a:buChar char="•"/>
+            </a:pPr>
+            <a:r>
+              <a:rPr lang="en-US" sz="1300" dirty="0">
+                <a:solidFill>
+                  <a:srgbClr val="E6F2F3"/>
                 </a:solidFill>
                 <a:latin typeface="Calibri" pitchFamily="34" charset="0"/>
                 <a:ea typeface="Calibri" pitchFamily="34" charset="-122"/>
                 <a:cs typeface="Calibri" pitchFamily="34" charset="-120"/>
               </a:rPr>
-              <a:t>α·CE + (1-α)·KL(z_s/T ‖ z_t/T), teacher gelé</a:t>
-            </a:r>
-            <a:endParaRPr lang="en-US" sz="1350" dirty="0"/>
-          </a:p>
-        </p:txBody>
-      </p:sp>
-      <p:sp>
-        <p:nvSpPr>
-          <p:cNvPr id="8" name="Shape 6"/>
-          <p:cNvSpPr/>
-          <p:nvPr/>
-        </p:nvSpPr>
-        <p:spPr>
-          <a:xfrm>
-            <a:off x="6217920" y="1554480"/>
-            <a:ext cx="5394960" cy="1874520"/>
-          </a:xfrm>
-          <a:prstGeom prst="roundRect">
-            <a:avLst>
-              <a:gd name="adj" fmla="val 4390"/>
-            </a:avLst>
-          </a:prstGeom>
-          <a:solidFill>
-            <a:srgbClr val="EAF3F3"/>
-          </a:solidFill>
-          <a:ln/>
-          <a:effectLst>
-            <a:outerShdw sx="100000" sy="100000" kx="0" ky="0" algn="bl" rotWithShape="0" blurRad="88900" dist="25400" dir="5400000">
-              <a:srgbClr val="9AAEB5">
-                <a:alpha val="35000"/>
-              </a:srgbClr>
-            </a:outerShdw>
-          </a:effectLst>
-        </p:spPr>
-      </p:sp>
-      <p:sp>
-        <p:nvSpPr>
-          <p:cNvPr id="9" name="Shape 7"/>
-          <p:cNvSpPr/>
-          <p:nvPr/>
-        </p:nvSpPr>
-        <p:spPr>
-          <a:xfrm>
-            <a:off x="6492240" y="1828800"/>
-            <a:ext cx="566928" cy="566928"/>
-          </a:xfrm>
-          <a:prstGeom prst="ellipse">
-            <a:avLst/>
-          </a:prstGeom>
-          <a:solidFill>
-            <a:srgbClr val="1C7293"/>
-          </a:solidFill>
-          <a:ln/>
-        </p:spPr>
-      </p:sp>
-      <p:sp>
-        <p:nvSpPr>
-          <p:cNvPr id="10" name="Text 8"/>
-          <p:cNvSpPr txBox="1"/>
-          <p:nvPr/>
-        </p:nvSpPr>
-        <p:spPr>
-          <a:xfrm>
-            <a:off x="6492240" y="1828800"/>
-            <a:ext cx="566928" cy="566928"/>
-          </a:xfrm>
-          <a:prstGeom prst="rect">
-            <a:avLst/>
-          </a:prstGeom>
-          <a:noFill/>
-          <a:ln/>
-        </p:spPr>
-        <p:txBody>
-          <a:bodyPr wrap="square" lIns="0" tIns="0" rIns="0" bIns="0" rtlCol="0" anchor="ctr"/>
-          <a:lstStyle/>
-          <a:p>
-            <a:pPr algn="ctr" indent="0" marL="0">
-              <a:buNone/>
-            </a:pPr>
-            <a:r>
-              <a:rPr lang="en-US" sz="1800" b="1" dirty="0">
-                <a:solidFill>
-                  <a:srgbClr val="FFFFFF"/>
-                </a:solidFill>
-                <a:latin typeface="Cambria" pitchFamily="34" charset="0"/>
-                <a:ea typeface="Cambria" pitchFamily="34" charset="-122"/>
-                <a:cs typeface="Cambria" pitchFamily="34" charset="-120"/>
-              </a:rPr>
-              <a:t>2</a:t>
-            </a:r>
-            <a:endParaRPr lang="en-US" sz="1800" dirty="0"/>
-          </a:p>
-        </p:txBody>
-      </p:sp>
-      <p:sp>
-        <p:nvSpPr>
-          <p:cNvPr id="11" name="Text 9"/>
-          <p:cNvSpPr txBox="1"/>
-          <p:nvPr/>
-        </p:nvSpPr>
-        <p:spPr>
-          <a:xfrm>
-            <a:off x="7223760" y="1847088"/>
-            <a:ext cx="4206240" cy="548640"/>
-          </a:xfrm>
-          <a:prstGeom prst="rect">
-            <a:avLst/>
-          </a:prstGeom>
-          <a:noFill/>
-          <a:ln/>
-        </p:spPr>
-        <p:txBody>
-          <a:bodyPr wrap="square" lIns="0" tIns="0" rIns="0" bIns="0" rtlCol="0" anchor="ctr"/>
-          <a:lstStyle/>
-          <a:p>
-            <a:pPr indent="0" marL="0">
-              <a:buNone/>
-            </a:pPr>
-            <a:r>
-              <a:rPr lang="en-US" sz="1650" b="1" dirty="0">
-                <a:solidFill>
-                  <a:srgbClr val="0B3C5D"/>
-                </a:solidFill>
-                <a:latin typeface="Cambria" pitchFamily="34" charset="0"/>
-                <a:ea typeface="Cambria" pitchFamily="34" charset="-122"/>
-                <a:cs typeface="Cambria" pitchFamily="34" charset="-120"/>
-              </a:rPr>
-              <a:t>KD robuste (idée originale)</a:t>
-            </a:r>
-            <a:endParaRPr lang="en-US" sz="1650" dirty="0"/>
-          </a:p>
-        </p:txBody>
-      </p:sp>
-      <p:sp>
-        <p:nvSpPr>
-          <p:cNvPr id="12" name="Text 10"/>
-          <p:cNvSpPr txBox="1"/>
-          <p:nvPr/>
-        </p:nvSpPr>
-        <p:spPr>
-          <a:xfrm>
-            <a:off x="6537960" y="2514600"/>
-            <a:ext cx="4754880" cy="822960"/>
-          </a:xfrm>
-          <a:prstGeom prst="rect">
-            <a:avLst/>
-          </a:prstGeom>
-          <a:noFill/>
-          <a:ln/>
-        </p:spPr>
-        <p:txBody>
-          <a:bodyPr wrap="square" lIns="0" tIns="0" rIns="0" bIns="0" rtlCol="0" anchor="ctr"/>
-          <a:lstStyle/>
-          <a:p>
-            <a:pPr indent="0" marL="0">
+              <a:t>KD robuste ≫ scratch : +0.03 → +0.08 AUC, 5/5 seeds, p ≤ 0.01.</a:t>
+            </a:r>
+            <a:endParaRPr lang="en-US" sz="1300" dirty="0"/>
+          </a:p>
+          <a:p>
+            <a:pPr marL="203200" indent="-203200">
               <a:lnSpc>
                 <a:spcPct val="105000"/>
               </a:lnSpc>
-              <a:buNone/>
-            </a:pPr>
-            <a:r>
-              <a:rPr lang="en-US" sz="1350" dirty="0">
-                <a:solidFill>
-                  <a:srgbClr val="16323D"/>
+              <a:spcAft>
+                <a:spcPts val="1100"/>
+              </a:spcAft>
+              <a:buSzPct val="100000"/>
+              <a:buChar char="•"/>
+            </a:pPr>
+            <a:r>
+              <a:rPr lang="en-US" sz="1300" dirty="0">
+                <a:solidFill>
+                  <a:srgbClr val="E6F2F3"/>
                 </a:solidFill>
                 <a:latin typeface="Calibri" pitchFamily="34" charset="0"/>
                 <a:ea typeface="Calibri" pitchFamily="34" charset="-122"/>
                 <a:cs typeface="Calibri" pitchFamily="34" charset="-120"/>
               </a:rPr>
-              <a:t>teacher voit le nuage dense, student voit un nuage sous-échantillonné → apprend la sparsité</a:t>
-            </a:r>
-            <a:endParaRPr lang="en-US" sz="1350" dirty="0"/>
-          </a:p>
-        </p:txBody>
-      </p:sp>
-      <p:sp>
-        <p:nvSpPr>
-          <p:cNvPr id="13" name="Shape 11"/>
-          <p:cNvSpPr/>
-          <p:nvPr/>
-        </p:nvSpPr>
-        <p:spPr>
-          <a:xfrm>
-            <a:off x="548640" y="3703320"/>
-            <a:ext cx="5394960" cy="1874520"/>
-          </a:xfrm>
-          <a:prstGeom prst="roundRect">
-            <a:avLst>
-              <a:gd name="adj" fmla="val 4390"/>
-            </a:avLst>
-          </a:prstGeom>
-          <a:solidFill>
-            <a:srgbClr val="F2F6F7"/>
-          </a:solidFill>
-          <a:ln/>
-          <a:effectLst>
-            <a:outerShdw sx="100000" sy="100000" kx="0" ky="0" algn="bl" rotWithShape="0" blurRad="88900" dist="25400" dir="5400000">
-              <a:srgbClr val="9AAEB5">
-                <a:alpha val="35000"/>
-              </a:srgbClr>
-            </a:outerShdw>
-          </a:effectLst>
-        </p:spPr>
-      </p:sp>
-      <p:sp>
-        <p:nvSpPr>
-          <p:cNvPr id="14" name="Shape 12"/>
-          <p:cNvSpPr/>
-          <p:nvPr/>
-        </p:nvSpPr>
-        <p:spPr>
-          <a:xfrm>
-            <a:off x="822960" y="3977640"/>
-            <a:ext cx="566928" cy="566928"/>
-          </a:xfrm>
-          <a:prstGeom prst="ellipse">
-            <a:avLst/>
-          </a:prstGeom>
-          <a:solidFill>
-            <a:srgbClr val="E76F51"/>
-          </a:solidFill>
-          <a:ln/>
-        </p:spPr>
-      </p:sp>
-      <p:sp>
-        <p:nvSpPr>
-          <p:cNvPr id="15" name="Text 13"/>
-          <p:cNvSpPr txBox="1"/>
-          <p:nvPr/>
-        </p:nvSpPr>
-        <p:spPr>
-          <a:xfrm>
-            <a:off x="822960" y="3977640"/>
-            <a:ext cx="566928" cy="566928"/>
-          </a:xfrm>
-          <a:prstGeom prst="rect">
-            <a:avLst/>
-          </a:prstGeom>
-          <a:noFill/>
-          <a:ln/>
-        </p:spPr>
-        <p:txBody>
-          <a:bodyPr wrap="square" lIns="0" tIns="0" rIns="0" bIns="0" rtlCol="0" anchor="ctr"/>
-          <a:lstStyle/>
-          <a:p>
-            <a:pPr algn="ctr" indent="0" marL="0">
-              <a:buNone/>
-            </a:pPr>
-            <a:r>
-              <a:rPr lang="en-US" sz="1800" b="1" dirty="0">
-                <a:solidFill>
-                  <a:srgbClr val="FFFFFF"/>
-                </a:solidFill>
-                <a:latin typeface="Cambria" pitchFamily="34" charset="0"/>
-                <a:ea typeface="Cambria" pitchFamily="34" charset="-122"/>
-                <a:cs typeface="Cambria" pitchFamily="34" charset="-120"/>
-              </a:rPr>
-              <a:t>3</a:t>
-            </a:r>
-            <a:endParaRPr lang="en-US" sz="1800" dirty="0"/>
-          </a:p>
-        </p:txBody>
-      </p:sp>
-      <p:sp>
-        <p:nvSpPr>
-          <p:cNvPr id="16" name="Text 14"/>
-          <p:cNvSpPr txBox="1"/>
-          <p:nvPr/>
-        </p:nvSpPr>
-        <p:spPr>
-          <a:xfrm>
-            <a:off x="1554480" y="3995928"/>
-            <a:ext cx="4206240" cy="548640"/>
-          </a:xfrm>
-          <a:prstGeom prst="rect">
-            <a:avLst/>
-          </a:prstGeom>
-          <a:noFill/>
-          <a:ln/>
-        </p:spPr>
-        <p:txBody>
-          <a:bodyPr wrap="square" lIns="0" tIns="0" rIns="0" bIns="0" rtlCol="0" anchor="ctr"/>
-          <a:lstStyle/>
-          <a:p>
-            <a:pPr indent="0" marL="0">
-              <a:buNone/>
-            </a:pPr>
-            <a:r>
-              <a:rPr lang="en-US" sz="1650" b="1" dirty="0">
-                <a:solidFill>
-                  <a:srgbClr val="0B3C5D"/>
-                </a:solidFill>
-                <a:latin typeface="Cambria" pitchFamily="34" charset="0"/>
-                <a:ea typeface="Cambria" pitchFamily="34" charset="-122"/>
-                <a:cs typeface="Cambria" pitchFamily="34" charset="-120"/>
-              </a:rPr>
-              <a:t>KD de features</a:t>
-            </a:r>
-            <a:endParaRPr lang="en-US" sz="1650" dirty="0"/>
-          </a:p>
-        </p:txBody>
-      </p:sp>
-      <p:sp>
-        <p:nvSpPr>
-          <p:cNvPr id="17" name="Text 15"/>
-          <p:cNvSpPr txBox="1"/>
-          <p:nvPr/>
-        </p:nvSpPr>
-        <p:spPr>
-          <a:xfrm>
-            <a:off x="868680" y="4663440"/>
-            <a:ext cx="4754880" cy="822960"/>
-          </a:xfrm>
-          <a:prstGeom prst="rect">
-            <a:avLst/>
-          </a:prstGeom>
-          <a:noFill/>
-          <a:ln/>
-        </p:spPr>
-        <p:txBody>
-          <a:bodyPr wrap="square" lIns="0" tIns="0" rIns="0" bIns="0" rtlCol="0" anchor="ctr"/>
-          <a:lstStyle/>
-          <a:p>
-            <a:pPr indent="0" marL="0">
+              <a:t>Mais aug (sans teacher) fait la même chose : les deux courbes se superposent.</a:t>
+            </a:r>
+            <a:endParaRPr lang="en-US" sz="1300" dirty="0"/>
+          </a:p>
+          <a:p>
+            <a:pPr marL="203200" indent="-203200">
               <a:lnSpc>
                 <a:spcPct val="105000"/>
               </a:lnSpc>
-              <a:buNone/>
-            </a:pPr>
-            <a:r>
-              <a:rPr lang="en-US" sz="1350" dirty="0">
-                <a:solidFill>
-                  <a:srgbClr val="16323D"/>
+              <a:spcAft>
+                <a:spcPts val="1100"/>
+              </a:spcAft>
+              <a:buSzPct val="100000"/>
+              <a:buChar char="•"/>
+            </a:pPr>
+            <a:r>
+              <a:rPr lang="en-US" sz="1300" dirty="0">
+                <a:solidFill>
+                  <a:srgbClr val="E6F2F3"/>
                 </a:solidFill>
                 <a:latin typeface="Calibri" pitchFamily="34" charset="0"/>
                 <a:ea typeface="Calibri" pitchFamily="34" charset="-122"/>
                 <a:cs typeface="Calibri" pitchFamily="34" charset="-120"/>
               </a:rPr>
-              <a:t>aligner le vecteur global g (déjà exposé par le modèle)</a:t>
-            </a:r>
-            <a:endParaRPr lang="en-US" sz="1350" dirty="0"/>
-          </a:p>
-        </p:txBody>
-      </p:sp>
-      <p:sp>
-        <p:nvSpPr>
-          <p:cNvPr id="18" name="Shape 16"/>
-          <p:cNvSpPr/>
-          <p:nvPr/>
-        </p:nvSpPr>
-        <p:spPr>
-          <a:xfrm>
-            <a:off x="6217920" y="3703320"/>
-            <a:ext cx="5394960" cy="1874520"/>
-          </a:xfrm>
-          <a:prstGeom prst="roundRect">
-            <a:avLst>
-              <a:gd name="adj" fmla="val 4390"/>
-            </a:avLst>
-          </a:prstGeom>
-          <a:solidFill>
-            <a:srgbClr val="F2F6F7"/>
-          </a:solidFill>
-          <a:ln/>
-          <a:effectLst>
-            <a:outerShdw sx="100000" sy="100000" kx="0" ky="0" algn="bl" rotWithShape="0" blurRad="88900" dist="25400" dir="5400000">
-              <a:srgbClr val="9AAEB5">
-                <a:alpha val="35000"/>
-              </a:srgbClr>
-            </a:outerShdw>
-          </a:effectLst>
-        </p:spPr>
-      </p:sp>
-      <p:sp>
-        <p:nvSpPr>
-          <p:cNvPr id="19" name="Shape 17"/>
-          <p:cNvSpPr/>
-          <p:nvPr/>
-        </p:nvSpPr>
-        <p:spPr>
-          <a:xfrm>
-            <a:off x="6492240" y="3977640"/>
-            <a:ext cx="566928" cy="566928"/>
-          </a:xfrm>
-          <a:prstGeom prst="ellipse">
-            <a:avLst/>
-          </a:prstGeom>
-          <a:solidFill>
-            <a:srgbClr val="E76F51"/>
-          </a:solidFill>
-          <a:ln/>
-        </p:spPr>
-      </p:sp>
-      <p:sp>
-        <p:nvSpPr>
-          <p:cNvPr id="20" name="Text 18"/>
-          <p:cNvSpPr txBox="1"/>
-          <p:nvPr/>
-        </p:nvSpPr>
-        <p:spPr>
-          <a:xfrm>
-            <a:off x="6492240" y="3977640"/>
-            <a:ext cx="566928" cy="566928"/>
-          </a:xfrm>
-          <a:prstGeom prst="rect">
-            <a:avLst/>
-          </a:prstGeom>
-          <a:noFill/>
-          <a:ln/>
-        </p:spPr>
-        <p:txBody>
-          <a:bodyPr wrap="square" lIns="0" tIns="0" rIns="0" bIns="0" rtlCol="0" anchor="ctr"/>
-          <a:lstStyle/>
-          <a:p>
-            <a:pPr algn="ctr" indent="0" marL="0">
-              <a:buNone/>
-            </a:pPr>
-            <a:r>
-              <a:rPr lang="en-US" sz="1800" b="1" dirty="0">
-                <a:solidFill>
-                  <a:srgbClr val="FFFFFF"/>
-                </a:solidFill>
-                <a:latin typeface="Cambria" pitchFamily="34" charset="0"/>
-                <a:ea typeface="Cambria" pitchFamily="34" charset="-122"/>
-                <a:cs typeface="Cambria" pitchFamily="34" charset="-120"/>
-              </a:rPr>
-              <a:t>4</a:t>
-            </a:r>
-            <a:endParaRPr lang="en-US" sz="1800" dirty="0"/>
-          </a:p>
-        </p:txBody>
-      </p:sp>
-      <p:sp>
-        <p:nvSpPr>
-          <p:cNvPr id="21" name="Text 19"/>
-          <p:cNvSpPr txBox="1"/>
-          <p:nvPr/>
-        </p:nvSpPr>
-        <p:spPr>
-          <a:xfrm>
-            <a:off x="7223760" y="3995928"/>
-            <a:ext cx="4206240" cy="548640"/>
-          </a:xfrm>
-          <a:prstGeom prst="rect">
-            <a:avLst/>
-          </a:prstGeom>
-          <a:noFill/>
-          <a:ln/>
-        </p:spPr>
-        <p:txBody>
-          <a:bodyPr wrap="square" lIns="0" tIns="0" rIns="0" bIns="0" rtlCol="0" anchor="ctr"/>
-          <a:lstStyle/>
-          <a:p>
-            <a:pPr indent="0" marL="0">
-              <a:buNone/>
-            </a:pPr>
-            <a:r>
-              <a:rPr lang="en-US" sz="1650" b="1" dirty="0">
-                <a:solidFill>
-                  <a:srgbClr val="0B3C5D"/>
-                </a:solidFill>
-                <a:latin typeface="Cambria" pitchFamily="34" charset="0"/>
-                <a:ea typeface="Cambria" pitchFamily="34" charset="-122"/>
-                <a:cs typeface="Cambria" pitchFamily="34" charset="-120"/>
-              </a:rPr>
-              <a:t>Comparaison &amp; test de H1</a:t>
-            </a:r>
-            <a:endParaRPr lang="en-US" sz="1650" dirty="0"/>
-          </a:p>
-        </p:txBody>
-      </p:sp>
-      <p:sp>
-        <p:nvSpPr>
-          <p:cNvPr id="22" name="Text 20"/>
-          <p:cNvSpPr txBox="1"/>
-          <p:nvPr/>
-        </p:nvSpPr>
-        <p:spPr>
-          <a:xfrm>
-            <a:off x="6537960" y="4663440"/>
-            <a:ext cx="4754880" cy="822960"/>
-          </a:xfrm>
-          <a:prstGeom prst="rect">
-            <a:avLst/>
-          </a:prstGeom>
-          <a:noFill/>
-          <a:ln/>
-        </p:spPr>
-        <p:txBody>
-          <a:bodyPr wrap="square" lIns="0" tIns="0" rIns="0" bIns="0" rtlCol="0" anchor="ctr"/>
-          <a:lstStyle/>
-          <a:p>
-            <a:pPr indent="0" marL="0">
-              <a:lnSpc>
-                <a:spcPct val="105000"/>
-              </a:lnSpc>
-              <a:buNone/>
-            </a:pPr>
-            <a:r>
-              <a:rPr lang="en-US" sz="1350" dirty="0">
-                <a:solidFill>
-                  <a:srgbClr val="16323D"/>
-                </a:solidFill>
-                <a:latin typeface="Calibri" pitchFamily="34" charset="0"/>
-                <a:ea typeface="Calibri" pitchFamily="34" charset="-122"/>
-                <a:cs typeface="Calibri" pitchFamily="34" charset="-120"/>
-              </a:rPr>
-              <a:t>courbes student_KD vs scratch vs teacher ; conclure (même si H1 infirmée)</a:t>
-            </a:r>
-            <a:endParaRPr lang="en-US" sz="1350" dirty="0"/>
+              <a:t>KD logit classique : gain faible et non significatif (p ≥ 0.08).</a:t>
+            </a:r>
+            <a:endParaRPr lang="en-US" sz="1300" dirty="0"/>
           </a:p>
         </p:txBody>
       </p:sp>
